--- a/system-design-101/vi/lessons/sd-10-027/slides/sd-10-027.pptx
+++ b/system-design-101/vi/lessons/sd-10-027/slides/sd-10-027.pptx
@@ -2001,6 +2001,83 @@
               <a:buNone/>
             </a:pPr>
             <a:r>
+              <a:rPr lang="en-US" sz="3000" dirty="0" spc="-10" kern="0">
+                <a:solidFill>
+                  <a:srgbClr val="C4C8D6"/>
+                </a:solidFill>
+                <a:latin typeface="Be Vietnam Pro" pitchFamily="34" charset="0"/>
+                <a:ea typeface="Be Vietnam Pro" pitchFamily="34" charset="-122"/>
+                <a:cs typeface="Be Vietnam Pro" pitchFamily="34" charset="-120"/>
+              </a:rPr>
+              <a:t>Một</a:t>
+            </a:r>
+            <a:r>
+              <a:rPr lang="en-US" sz="3000" dirty="0" spc="2" kern="0">
+                <a:solidFill>
+                  <a:srgbClr val="C4C8D6"/>
+                </a:solidFill>
+                <a:latin typeface="Be Vietnam Pro" pitchFamily="34" charset="0"/>
+                <a:ea typeface="Be Vietnam Pro" pitchFamily="34" charset="-122"/>
+                <a:cs typeface="Be Vietnam Pro" pitchFamily="34" charset="-120"/>
+              </a:rPr>
+              <a:t> dịch vụ</a:t>
+            </a:r>
+            <a:r>
+              <a:rPr lang="en-US" sz="3000" dirty="0" spc="11" kern="0">
+                <a:solidFill>
+                  <a:srgbClr val="C4C8D6"/>
+                </a:solidFill>
+                <a:latin typeface="Be Vietnam Pro" pitchFamily="34" charset="0"/>
+                <a:ea typeface="Be Vietnam Pro" pitchFamily="34" charset="-122"/>
+                <a:cs typeface="Be Vietnam Pro" pitchFamily="34" charset="-120"/>
+              </a:rPr>
+              <a:t> mượn</a:t>
+            </a:r>
+            <a:r>
+              <a:rPr lang="en-US" sz="3000" dirty="0" spc="-7" kern="0">
+                <a:solidFill>
+                  <a:srgbClr val="C4C8D6"/>
+                </a:solidFill>
+                <a:latin typeface="Be Vietnam Pro" pitchFamily="34" charset="0"/>
+                <a:ea typeface="Be Vietnam Pro" pitchFamily="34" charset="-122"/>
+                <a:cs typeface="Be Vietnam Pro" pitchFamily="34" charset="-120"/>
+              </a:rPr>
+              <a:t> sách</a:t>
+            </a:r>
+            <a:r>
+              <a:rPr lang="en-US" sz="3000" dirty="0" spc="42" kern="0">
+                <a:solidFill>
+                  <a:srgbClr val="C4C8D6"/>
+                </a:solidFill>
+                <a:latin typeface="Be Vietnam Pro" pitchFamily="34" charset="0"/>
+                <a:ea typeface="Be Vietnam Pro" pitchFamily="34" charset="-122"/>
+                <a:cs typeface="Be Vietnam Pro" pitchFamily="34" charset="-120"/>
+              </a:rPr>
+              <a:t> đi</a:t>
+            </a:r>
+            <a:r>
+              <a:rPr lang="en-US" sz="3000" dirty="0" spc="2" kern="0">
+                <a:solidFill>
+                  <a:srgbClr val="C4C8D6"/>
+                </a:solidFill>
+                <a:latin typeface="Be Vietnam Pro" pitchFamily="34" charset="0"/>
+                <a:ea typeface="Be Vietnam Pro" pitchFamily="34" charset="-122"/>
+                <a:cs typeface="Be Vietnam Pro" pitchFamily="34" charset="-120"/>
+              </a:rPr>
+              <a:t> qua</a:t>
+            </a:r>
+            <a:r>
+              <a:rPr lang="en-US" sz="3000" dirty="0" spc="13" kern="0">
+                <a:solidFill>
+                  <a:srgbClr val="C4C8D6"/>
+                </a:solidFill>
+                <a:latin typeface="Be Vietnam Pro" pitchFamily="34" charset="0"/>
+                <a:ea typeface="Be Vietnam Pro" pitchFamily="34" charset="-122"/>
+                <a:cs typeface="Be Vietnam Pro" pitchFamily="34" charset="-120"/>
+              </a:rPr>
+              <a:t> mười</a:t>
+            </a:r>
+            <a:r>
               <a:rPr lang="en-US" sz="3000" dirty="0" spc="-5" kern="0">
                 <a:solidFill>
                   <a:srgbClr val="C4C8D6"/>
@@ -2009,10 +2086,10 @@
                 <a:ea typeface="Be Vietnam Pro" pitchFamily="34" charset="-122"/>
                 <a:cs typeface="Be Vietnam Pro" pitchFamily="34" charset="-120"/>
               </a:rPr>
-              <a:t>Theo</a:t>
-            </a:r>
-            <a:r>
-              <a:rPr lang="en-US" sz="3000" dirty="0" spc="0" kern="0">
+              <a:t> một</a:t>
+            </a:r>
+            <a:r>
+              <a:rPr lang="en-US" sz="3000" dirty="0" spc="10" kern="0">
                 <a:solidFill>
                   <a:srgbClr val="C4C8D6"/>
                 </a:solidFill>
@@ -2020,95 +2097,7 @@
                 <a:ea typeface="Be Vietnam Pro" pitchFamily="34" charset="-122"/>
                 <a:cs typeface="Be Vietnam Pro" pitchFamily="34" charset="-120"/>
               </a:rPr>
-              <a:t> nguồn,</a:t>
-            </a:r>
-            <a:r>
-              <a:rPr lang="en-US" sz="3000" dirty="0" spc="-2" kern="0">
-                <a:solidFill>
-                  <a:srgbClr val="C4C8D6"/>
-                </a:solidFill>
-                <a:latin typeface="Be Vietnam Pro" pitchFamily="34" charset="0"/>
-                <a:ea typeface="Be Vietnam Pro" pitchFamily="34" charset="-122"/>
-                <a:cs typeface="Be Vietnam Pro" pitchFamily="34" charset="-120"/>
-              </a:rPr>
-              <a:t> cần học</a:t>
-            </a:r>
-            <a:r>
-              <a:rPr lang="en-US" sz="3000" dirty="0" spc="4" kern="0">
-                <a:solidFill>
-                  <a:srgbClr val="C4C8D6"/>
-                </a:solidFill>
-                <a:latin typeface="Be Vietnam Pro" pitchFamily="34" charset="0"/>
-                <a:ea typeface="Be Vietnam Pro" pitchFamily="34" charset="-122"/>
-                <a:cs typeface="Be Vietnam Pro" pitchFamily="34" charset="-120"/>
-              </a:rPr>
-              <a:t> gì</a:t>
-            </a:r>
-            <a:r>
-              <a:rPr lang="en-US" sz="3000" dirty="0" spc="21" kern="0">
-                <a:solidFill>
-                  <a:srgbClr val="C4C8D6"/>
-                </a:solidFill>
-                <a:latin typeface="Be Vietnam Pro" pitchFamily="34" charset="0"/>
-                <a:ea typeface="Be Vietnam Pro" pitchFamily="34" charset="-122"/>
-                <a:cs typeface="Be Vietnam Pro" pitchFamily="34" charset="-120"/>
-              </a:rPr>
-              <a:t> để</a:t>
-            </a:r>
-            <a:r>
-              <a:rPr lang="en-US" sz="3000" dirty="0" spc="41" kern="0">
-                <a:solidFill>
-                  <a:srgbClr val="C4C8D6"/>
-                </a:solidFill>
-                <a:latin typeface="Be Vietnam Pro" pitchFamily="34" charset="0"/>
-                <a:ea typeface="Be Vietnam Pro" pitchFamily="34" charset="-122"/>
-                <a:cs typeface="Be Vietnam Pro" pitchFamily="34" charset="-120"/>
-              </a:rPr>
-              <a:t> đi</a:t>
-            </a:r>
-            <a:r>
-              <a:rPr lang="en-US" sz="3000" dirty="0" spc="-1" kern="0">
-                <a:solidFill>
-                  <a:srgbClr val="C4C8D6"/>
-                </a:solidFill>
-                <a:latin typeface="Be Vietnam Pro" pitchFamily="34" charset="0"/>
-                <a:ea typeface="Be Vietnam Pro" pitchFamily="34" charset="-122"/>
-                <a:cs typeface="Be Vietnam Pro" pitchFamily="34" charset="-120"/>
-              </a:rPr>
-              <a:t> từ</a:t>
-            </a:r>
-            <a:r>
-              <a:rPr lang="en-US" sz="3000" dirty="0" spc="0" kern="0">
-                <a:solidFill>
-                  <a:srgbClr val="C4C8D6"/>
-                </a:solidFill>
-                <a:latin typeface="Be Vietnam Pro" pitchFamily="34" charset="0"/>
-                <a:ea typeface="Be Vietnam Pro" pitchFamily="34" charset="-122"/>
-                <a:cs typeface="Be Vietnam Pro" pitchFamily="34" charset="-120"/>
-              </a:rPr>
-              <a:t> junior</a:t>
-            </a:r>
-            <a:r>
-              <a:rPr lang="en-US" sz="3000" dirty="0" spc="-13" kern="0">
-                <a:solidFill>
-                  <a:srgbClr val="C4C8D6"/>
-                </a:solidFill>
-                <a:latin typeface="Be Vietnam Pro" pitchFamily="34" charset="0"/>
-                <a:ea typeface="Be Vietnam Pro" pitchFamily="34" charset="-122"/>
-                <a:cs typeface="Be Vietnam Pro" pitchFamily="34" charset="-120"/>
-              </a:rPr>
-              <a:t> tới</a:t>
-            </a:r>
-            <a:r>
-              <a:rPr lang="en-US" sz="3000" dirty="0" spc="-5" kern="0">
-                <a:solidFill>
-                  <a:srgbClr val="C4C8D6"/>
-                </a:solidFill>
-                <a:latin typeface="Be Vietnam Pro" pitchFamily="34" charset="0"/>
-                <a:ea typeface="Be Vietnam Pro" pitchFamily="34" charset="-122"/>
-                <a:cs typeface="Be Vietnam Pro" pitchFamily="34" charset="-120"/>
-              </a:rPr>
-              <a:t> senior?</a:t>
+              <a:t> bước.</a:t>
             </a:r>
             <a:endParaRPr lang="en-US" sz="3000" dirty="0"/>
           </a:p>
@@ -2320,7 +2309,7 @@
               <a:buNone/>
             </a:pPr>
             <a:r>
-              <a:rPr lang="en-US" sz="5700" dirty="0" spc="-5" kern="0">
+              <a:rPr lang="en-US" sz="5700" dirty="0" spc="-8" kern="0">
                 <a:solidFill>
                   <a:srgbClr val="F3EEE3"/>
                 </a:solidFill>
@@ -2328,7 +2317,7 @@
                 <a:ea typeface="Bricolage Grotesque ExtraBold" pitchFamily="34" charset="-122"/>
                 <a:cs typeface="Bricolage Grotesque ExtraBold" pitchFamily="34" charset="-120"/>
               </a:rPr>
-              <a:t>3</a:t>
+              <a:t>20</a:t>
             </a:r>
             <a:endParaRPr lang="en-US" sz="5700" dirty="0"/>
           </a:p>
@@ -2359,7 +2348,7 @@
               <a:buNone/>
             </a:pPr>
             <a:r>
-              <a:rPr lang="en-US" sz="1950" dirty="0" spc="22" kern="0">
+              <a:rPr lang="en-US" sz="1950" dirty="0" spc="-7" kern="0">
                 <a:solidFill>
                   <a:srgbClr val="9AA0B5"/>
                 </a:solidFill>
@@ -2367,10 +2356,10 @@
                 <a:ea typeface="Be Vietnam Pro" pitchFamily="34" charset="-122"/>
                 <a:cs typeface="Be Vietnam Pro" pitchFamily="34" charset="-120"/>
               </a:rPr>
-              <a:t>điều</a:t>
-            </a:r>
-            <a:r>
-              <a:rPr lang="en-US" sz="1950" dirty="0" spc="-1" kern="0">
+              <a:t>so</a:t>
+            </a:r>
+            <a:r>
+              <a:rPr lang="en-US" sz="1950" dirty="0" spc="-3" kern="0">
                 <a:solidFill>
                   <a:srgbClr val="9AA0B5"/>
                 </a:solidFill>
@@ -2378,10 +2367,10 @@
                 <a:ea typeface="Be Vietnam Pro" pitchFamily="34" charset="-122"/>
                 <a:cs typeface="Be Vietnam Pro" pitchFamily="34" charset="-120"/>
               </a:rPr>
-              <a:t> cần</a:t>
-            </a:r>
-            <a:r>
-              <a:rPr lang="en-US" sz="1950" dirty="0" spc="0" kern="0">
+              <a:t> sánh ở</a:t>
+            </a:r>
+            <a:r>
+              <a:rPr lang="en-US" sz="1950" dirty="0" spc="3" kern="0">
                 <a:solidFill>
                   <a:srgbClr val="9AA0B5"/>
                 </a:solidFill>
@@ -2389,7 +2378,18 @@
                 <a:ea typeface="Be Vietnam Pro" pitchFamily="34" charset="-122"/>
                 <a:cs typeface="Be Vietnam Pro" pitchFamily="34" charset="-120"/>
               </a:rPr>
-              <a:t> nhớ</a:t>
+              <a:t> bước</a:t>
+            </a:r>
+            <a:r>
+              <a:rPr lang="en-US" sz="1950" dirty="0" spc="-2" kern="0">
+                <a:solidFill>
+                  <a:srgbClr val="9AA0B5"/>
+                </a:solidFill>
+                <a:latin typeface="Be Vietnam Pro" pitchFamily="34" charset="0"/>
+                <a:ea typeface="Be Vietnam Pro" pitchFamily="34" charset="-122"/>
+                <a:cs typeface="Be Vietnam Pro" pitchFamily="34" charset="-120"/>
+              </a:rPr>
+              <a:t> 8</a:t>
             </a:r>
             <a:endParaRPr lang="en-US" sz="1950" dirty="0"/>
           </a:p>
@@ -2420,7 +2420,7 @@
               <a:buNone/>
             </a:pPr>
             <a:r>
-              <a:rPr lang="en-US" sz="5700" dirty="0" spc="5" kern="0">
+              <a:rPr lang="en-US" sz="5700" dirty="0" spc="-1" kern="0">
                 <a:solidFill>
                   <a:srgbClr val="F3EEE3"/>
                 </a:solidFill>
@@ -2428,7 +2428,7 @@
                 <a:ea typeface="Bricolage Grotesque ExtraBold" pitchFamily="34" charset="-122"/>
                 <a:cs typeface="Bricolage Grotesque ExtraBold" pitchFamily="34" charset="-120"/>
               </a:rPr>
-              <a:t>1</a:t>
+              <a:t>6</a:t>
             </a:r>
             <a:endParaRPr lang="en-US" sz="5700" dirty="0"/>
           </a:p>
@@ -2459,7 +2459,7 @@
               <a:buNone/>
             </a:pPr>
             <a:r>
-              <a:rPr lang="en-US" sz="1950" dirty="0" spc="3" kern="0">
+              <a:rPr lang="en-US" sz="1950" dirty="0" spc="-8" kern="0">
                 <a:solidFill>
                   <a:srgbClr val="9AA0B5"/>
                 </a:solidFill>
@@ -2467,7 +2467,51 @@
                 <a:ea typeface="Be Vietnam Pro" pitchFamily="34" charset="-122"/>
                 <a:cs typeface="Be Vietnam Pro" pitchFamily="34" charset="-120"/>
               </a:rPr>
-              <a:t>nguồn</a:t>
+              <a:t>bộ</a:t>
+            </a:r>
+            <a:r>
+              <a:rPr lang="en-US" sz="1950" dirty="0" spc="-11" kern="0">
+                <a:solidFill>
+                  <a:srgbClr val="9AA0B5"/>
+                </a:solidFill>
+                <a:latin typeface="Be Vietnam Pro" pitchFamily="34" charset="0"/>
+                <a:ea typeface="Be Vietnam Pro" pitchFamily="34" charset="-122"/>
+                <a:cs typeface="Be Vietnam Pro" pitchFamily="34" charset="-120"/>
+              </a:rPr>
+              <a:t> tài</a:t>
+            </a:r>
+            <a:r>
+              <a:rPr lang="en-US" sz="1950" dirty="0" spc="0" kern="0">
+                <a:solidFill>
+                  <a:srgbClr val="9AA0B5"/>
+                </a:solidFill>
+                <a:latin typeface="Be Vietnam Pro" pitchFamily="34" charset="0"/>
+                <a:ea typeface="Be Vietnam Pro" pitchFamily="34" charset="-122"/>
+                <a:cs typeface="Be Vietnam Pro" pitchFamily="34" charset="-120"/>
+              </a:rPr>
+              <a:t> liệu</a:t>
+            </a:r>
+            <a:r>
+              <a:rPr lang="en-US" sz="1950" dirty="0" spc="14" kern="0">
+                <a:solidFill>
+                  <a:srgbClr val="9AA0B5"/>
+                </a:solidFill>
+                <a:latin typeface="Be Vietnam Pro" pitchFamily="34" charset="0"/>
+                <a:ea typeface="Be Vietnam Pro" pitchFamily="34" charset="-122"/>
+                <a:cs typeface="Be Vietnam Pro" pitchFamily="34" charset="-120"/>
+              </a:rPr>
+              <a:t> đã</a:t>
+            </a:r>
+            <a:r>
+              <a:rPr lang="en-US" sz="1950" dirty="0" spc="6" kern="0">
+                <a:solidFill>
+                  <a:srgbClr val="9AA0B5"/>
+                </a:solidFill>
+                <a:latin typeface="Be Vietnam Pro" pitchFamily="34" charset="0"/>
+                <a:ea typeface="Be Vietnam Pro" pitchFamily="34" charset="-122"/>
+                <a:cs typeface="Be Vietnam Pro" pitchFamily="34" charset="-120"/>
+              </a:rPr>
+              <a:t> đọc</a:t>
             </a:r>
             <a:endParaRPr lang="en-US" sz="1950" dirty="0"/>
           </a:p>
@@ -4300,7 +4344,7 @@
               <a:buNone/>
             </a:pPr>
             <a:r>
-              <a:rPr lang="en-US" sz="8400" dirty="0" spc="-52" kern="0">
+              <a:rPr lang="en-US" sz="8400" dirty="0" spc="-90" kern="0">
                 <a:solidFill>
                   <a:srgbClr val="3DD6A0"/>
                 </a:solidFill>
@@ -4308,7 +4352,7 @@
                 <a:ea typeface="Bricolage Grotesque ExtraBold" pitchFamily="34" charset="-122"/>
                 <a:cs typeface="Bricolage Grotesque ExtraBold" pitchFamily="34" charset="-120"/>
               </a:rPr>
-              <a:t>DSA</a:t>
+              <a:t>PKCE</a:t>
             </a:r>
             <a:endParaRPr lang="en-US" sz="8400" dirty="0"/>
           </a:p>
@@ -4339,7 +4383,7 @@
               <a:buNone/>
             </a:pPr>
             <a:r>
-              <a:rPr lang="en-US" sz="1800" dirty="0" spc="-17" kern="0">
+              <a:rPr lang="en-US" sz="1800" dirty="0" spc="-15" kern="0">
                 <a:solidFill>
                   <a:srgbClr val="9AA0B5"/>
                 </a:solidFill>
@@ -4347,10 +4391,10 @@
                 <a:ea typeface="Be Vietnam Pro" pitchFamily="34" charset="-122"/>
                 <a:cs typeface="Be Vietnam Pro" pitchFamily="34" charset="-120"/>
               </a:rPr>
-              <a:t>Data</a:t>
-            </a:r>
-            <a:r>
-              <a:rPr lang="en-US" sz="1800" dirty="0" spc="-6" kern="0">
+              <a:t>Proof</a:t>
+            </a:r>
+            <a:r>
+              <a:rPr lang="en-US" sz="1800" dirty="0" spc="-37" kern="0">
                 <a:solidFill>
                   <a:srgbClr val="9AA0B5"/>
                 </a:solidFill>
@@ -4358,10 +4402,10 @@
                 <a:ea typeface="Be Vietnam Pro" pitchFamily="34" charset="-122"/>
                 <a:cs typeface="Be Vietnam Pro" pitchFamily="34" charset="-120"/>
               </a:rPr>
-              <a:t> Structures</a:t>
-            </a:r>
-            <a:r>
-              <a:rPr lang="en-US" sz="1800" dirty="0" spc="0" kern="0">
+              <a:t> Key</a:t>
+            </a:r>
+            <a:r>
+              <a:rPr lang="en-US" sz="1800" dirty="0" spc="-12" kern="0">
                 <a:solidFill>
                   <a:srgbClr val="9AA0B5"/>
                 </a:solidFill>
@@ -4369,7 +4413,29 @@
                 <a:ea typeface="Be Vietnam Pro" pitchFamily="34" charset="-122"/>
                 <a:cs typeface="Be Vietnam Pro" pitchFamily="34" charset="-120"/>
               </a:rPr>
-              <a:t> and Algorithms</a:t>
+              <a:t> for</a:t>
+            </a:r>
+            <a:r>
+              <a:rPr lang="en-US" sz="1800" dirty="0" spc="-1" kern="0">
+                <a:solidFill>
+                  <a:srgbClr val="9AA0B5"/>
+                </a:solidFill>
+                <a:latin typeface="Be Vietnam Pro" pitchFamily="34" charset="0"/>
+                <a:ea typeface="Be Vietnam Pro" pitchFamily="34" charset="-122"/>
+                <a:cs typeface="Be Vietnam Pro" pitchFamily="34" charset="-120"/>
+              </a:rPr>
+              <a:t> Code</a:t>
+            </a:r>
+            <a:r>
+              <a:rPr lang="en-US" sz="1800" dirty="0" spc="-9" kern="0">
+                <a:solidFill>
+                  <a:srgbClr val="9AA0B5"/>
+                </a:solidFill>
+                <a:latin typeface="Be Vietnam Pro" pitchFamily="34" charset="0"/>
+                <a:ea typeface="Be Vietnam Pro" pitchFamily="34" charset="-122"/>
+                <a:cs typeface="Be Vietnam Pro" pitchFamily="34" charset="-120"/>
+              </a:rPr>
+              <a:t> Exchange</a:t>
             </a:r>
             <a:endParaRPr lang="en-US" sz="1800" dirty="0"/>
           </a:p>
@@ -4403,6 +4469,39 @@
               <a:buNone/>
             </a:pPr>
             <a:r>
+              <a:rPr lang="en-US" sz="2400" b="1" dirty="0" spc="20" kern="0">
+                <a:solidFill>
+                  <a:srgbClr val="3DD6A0"/>
+                </a:solidFill>
+                <a:latin typeface="Be Vietnam Pro" pitchFamily="34" charset="0"/>
+                <a:ea typeface="Be Vietnam Pro" pitchFamily="34" charset="-122"/>
+                <a:cs typeface="Be Vietnam Pro" pitchFamily="34" charset="-120"/>
+              </a:rPr>
+              <a:t>chứng</a:t>
+            </a:r>
+            <a:r>
+              <a:rPr lang="en-US" sz="2400" b="1" dirty="0" spc="-1" kern="0">
+                <a:solidFill>
+                  <a:srgbClr val="3DD6A0"/>
+                </a:solidFill>
+                <a:latin typeface="Be Vietnam Pro" pitchFamily="34" charset="0"/>
+                <a:ea typeface="Be Vietnam Pro" pitchFamily="34" charset="-122"/>
+                <a:cs typeface="Be Vietnam Pro" pitchFamily="34" charset="-120"/>
+              </a:rPr>
+              <a:t> minh</a:t>
+            </a:r>
+            <a:r>
+              <a:rPr lang="en-US" sz="2400" b="1" dirty="0" spc="-4" kern="0">
+                <a:solidFill>
+                  <a:srgbClr val="3DD6A0"/>
+                </a:solidFill>
+                <a:latin typeface="Be Vietnam Pro" pitchFamily="34" charset="0"/>
+                <a:ea typeface="Be Vietnam Pro" pitchFamily="34" charset="-122"/>
+                <a:cs typeface="Be Vietnam Pro" pitchFamily="34" charset="-120"/>
+              </a:rPr>
+              <a:t> khóa</a:t>
+            </a:r>
+            <a:r>
               <a:rPr lang="en-US" sz="2400" b="1" dirty="0" spc="0" kern="0">
                 <a:solidFill>
                   <a:srgbClr val="3DD6A0"/>
@@ -4411,10 +4510,10 @@
                 <a:ea typeface="Be Vietnam Pro" pitchFamily="34" charset="-122"/>
                 <a:cs typeface="Be Vietnam Pro" pitchFamily="34" charset="-120"/>
               </a:rPr>
-              <a:t>cấu</a:t>
-            </a:r>
-            <a:r>
-              <a:rPr lang="en-US" sz="2400" b="1" dirty="0" spc="2" kern="0">
+              <a:t> khi</a:t>
+            </a:r>
+            <a:r>
+              <a:rPr lang="en-US" sz="2400" b="1" dirty="0" spc="6" kern="0">
                 <a:solidFill>
                   <a:srgbClr val="3DD6A0"/>
                 </a:solidFill>
@@ -4422,10 +4521,10 @@
                 <a:ea typeface="Be Vietnam Pro" pitchFamily="34" charset="-122"/>
                 <a:cs typeface="Be Vietnam Pro" pitchFamily="34" charset="-120"/>
               </a:rPr>
-              <a:t> trúc</a:t>
-            </a:r>
-            <a:r>
-              <a:rPr lang="en-US" sz="2400" b="1" dirty="0" spc="3" kern="0">
+              <a:t> đổi</a:t>
+            </a:r>
+            <a:r>
+              <a:rPr lang="en-US" sz="2400" b="1" dirty="0" spc="-2" kern="0">
                 <a:solidFill>
                   <a:srgbClr val="3DD6A0"/>
                 </a:solidFill>
@@ -4433,40 +4532,7 @@
                 <a:ea typeface="Be Vietnam Pro" pitchFamily="34" charset="-122"/>
                 <a:cs typeface="Be Vietnam Pro" pitchFamily="34" charset="-120"/>
               </a:rPr>
-              <a:t> dữ</a:t>
-            </a:r>
-            <a:r>
-              <a:rPr lang="en-US" sz="2400" b="1" dirty="0" spc="0" kern="0">
-                <a:solidFill>
-                  <a:srgbClr val="3DD6A0"/>
-                </a:solidFill>
-                <a:latin typeface="Be Vietnam Pro" pitchFamily="34" charset="0"/>
-                <a:ea typeface="Be Vietnam Pro" pitchFamily="34" charset="-122"/>
-                <a:cs typeface="Be Vietnam Pro" pitchFamily="34" charset="-120"/>
-              </a:rPr>
-              <a:t> liệu</a:t>
-            </a:r>
-            <a:r>
-              <a:rPr lang="en-US" sz="2400" b="1" dirty="0" spc="-19" kern="0">
-                <a:solidFill>
-                  <a:srgbClr val="3DD6A0"/>
-                </a:solidFill>
-                <a:latin typeface="Be Vietnam Pro" pitchFamily="34" charset="0"/>
-                <a:ea typeface="Be Vietnam Pro" pitchFamily="34" charset="-122"/>
-                <a:cs typeface="Be Vietnam Pro" pitchFamily="34" charset="-120"/>
-              </a:rPr>
-              <a:t> và</a:t>
-            </a:r>
-            <a:r>
-              <a:rPr lang="en-US" sz="2400" b="1" dirty="0" spc="-3" kern="0">
-                <a:solidFill>
-                  <a:srgbClr val="3DD6A0"/>
-                </a:solidFill>
-                <a:latin typeface="Be Vietnam Pro" pitchFamily="34" charset="0"/>
-                <a:ea typeface="Be Vietnam Pro" pitchFamily="34" charset="-122"/>
-                <a:cs typeface="Be Vietnam Pro" pitchFamily="34" charset="-120"/>
-              </a:rPr>
-              <a:t> thuật toán</a:t>
+              <a:t> mã</a:t>
             </a:r>
             <a:endParaRPr lang="en-US" sz="2400" dirty="0"/>
           </a:p>
@@ -4500,6 +4566,39 @@
               <a:buNone/>
             </a:pPr>
             <a:r>
+              <a:rPr lang="en-US" sz="2100" dirty="0" spc="0" kern="0">
+                <a:solidFill>
+                  <a:srgbClr val="C4C8D6"/>
+                </a:solidFill>
+                <a:latin typeface="Be Vietnam Pro" pitchFamily="34" charset="0"/>
+                <a:ea typeface="Be Vietnam Pro" pitchFamily="34" charset="-122"/>
+                <a:cs typeface="Be Vietnam Pro" pitchFamily="34" charset="-120"/>
+              </a:rPr>
+              <a:t>Chống</a:t>
+            </a:r>
+            <a:r>
+              <a:rPr lang="en-US" sz="2100" dirty="0" spc="-31" kern="0">
+                <a:solidFill>
+                  <a:srgbClr val="C4C8D6"/>
+                </a:solidFill>
+                <a:latin typeface="Be Vietnam Pro" pitchFamily="34" charset="0"/>
+                <a:ea typeface="Be Vietnam Pro" pitchFamily="34" charset="-122"/>
+                <a:cs typeface="Be Vietnam Pro" pitchFamily="34" charset="-120"/>
+              </a:rPr>
+              <a:t> kẻ</a:t>
+            </a:r>
+            <a:r>
+              <a:rPr lang="en-US" sz="2100" dirty="0" spc="-18" kern="0">
+                <a:solidFill>
+                  <a:srgbClr val="C4C8D6"/>
+                </a:solidFill>
+                <a:latin typeface="Be Vietnam Pro" pitchFamily="34" charset="0"/>
+                <a:ea typeface="Be Vietnam Pro" pitchFamily="34" charset="-122"/>
+                <a:cs typeface="Be Vietnam Pro" pitchFamily="34" charset="-120"/>
+              </a:rPr>
+              <a:t> xấu</a:t>
+            </a:r>
+            <a:r>
               <a:rPr lang="en-US" sz="2100" dirty="0" spc="-1" kern="0">
                 <a:solidFill>
                   <a:srgbClr val="C4C8D6"/>
@@ -4508,10 +4607,10 @@
                 <a:ea typeface="Be Vietnam Pro" pitchFamily="34" charset="-122"/>
                 <a:cs typeface="Be Vietnam Pro" pitchFamily="34" charset="-120"/>
               </a:rPr>
-              <a:t>Cách</a:t>
-            </a:r>
-            <a:r>
-              <a:rPr lang="en-US" sz="2100" dirty="0" spc="-17" kern="0">
+              <a:t> chặn</a:t>
+            </a:r>
+            <a:r>
+              <a:rPr lang="en-US" sz="2100" dirty="0" spc="-2" kern="0">
                 <a:solidFill>
                   <a:srgbClr val="C4C8D6"/>
                 </a:solidFill>
@@ -4519,10 +4618,10 @@
                 <a:ea typeface="Be Vietnam Pro" pitchFamily="34" charset="-122"/>
                 <a:cs typeface="Be Vietnam Pro" pitchFamily="34" charset="-120"/>
               </a:rPr>
-              <a:t> tổ</a:t>
-            </a:r>
-            <a:r>
-              <a:rPr lang="en-US" sz="2100" dirty="0" spc="6" kern="0">
+              <a:t> mã</a:t>
+            </a:r>
+            <a:r>
+              <a:rPr lang="en-US" sz="2100" dirty="0" spc="-1" kern="0">
                 <a:solidFill>
                   <a:srgbClr val="C4C8D6"/>
                 </a:solidFill>
@@ -4530,7 +4629,73 @@
                 <a:ea typeface="Be Vietnam Pro" pitchFamily="34" charset="-122"/>
                 <a:cs typeface="Be Vietnam Pro" pitchFamily="34" charset="-120"/>
               </a:rPr>
-              <a:t> chức</a:t>
+              <a:t> ủy</a:t>
+            </a:r>
+            <a:r>
+              <a:rPr lang="en-US" sz="2100" dirty="0" spc="-13" kern="0">
+                <a:solidFill>
+                  <a:srgbClr val="C4C8D6"/>
+                </a:solidFill>
+                <a:latin typeface="Be Vietnam Pro" pitchFamily="34" charset="0"/>
+                <a:ea typeface="Be Vietnam Pro" pitchFamily="34" charset="-122"/>
+                <a:cs typeface="Be Vietnam Pro" pitchFamily="34" charset="-120"/>
+              </a:rPr>
+              <a:t> quyền</a:t>
+            </a:r>
+            <a:r>
+              <a:rPr lang="en-US" sz="2100" dirty="0" spc="-22" kern="0">
+                <a:solidFill>
+                  <a:srgbClr val="C4C8D6"/>
+                </a:solidFill>
+                <a:latin typeface="Be Vietnam Pro" pitchFamily="34" charset="0"/>
+                <a:ea typeface="Be Vietnam Pro" pitchFamily="34" charset="-122"/>
+                <a:cs typeface="Be Vietnam Pro" pitchFamily="34" charset="-120"/>
+              </a:rPr>
+              <a:t> rồi</a:t>
+            </a:r>
+            <a:r>
+              <a:rPr lang="en-US" sz="2100" dirty="0" spc="9" kern="0">
+                <a:solidFill>
+                  <a:srgbClr val="C4C8D6"/>
+                </a:solidFill>
+                <a:latin typeface="Be Vietnam Pro" pitchFamily="34" charset="0"/>
+                <a:ea typeface="Be Vietnam Pro" pitchFamily="34" charset="-122"/>
+                <a:cs typeface="Be Vietnam Pro" pitchFamily="34" charset="-120"/>
+              </a:rPr>
+              <a:t> đem đổi</a:t>
+            </a:r>
+            <a:r>
+              <a:rPr lang="en-US" sz="2100" dirty="0" spc="-10" kern="0">
+                <a:solidFill>
+                  <a:srgbClr val="C4C8D6"/>
+                </a:solidFill>
+                <a:latin typeface="Be Vietnam Pro" pitchFamily="34" charset="0"/>
+                <a:ea typeface="Be Vietnam Pro" pitchFamily="34" charset="-122"/>
+                <a:cs typeface="Be Vietnam Pro" pitchFamily="34" charset="-120"/>
+              </a:rPr>
+              <a:t> lấy</a:t>
+            </a:r>
+            <a:r>
+              <a:rPr lang="en-US" sz="2100" dirty="0" spc="-13" kern="0">
+                <a:solidFill>
+                  <a:srgbClr val="C4C8D6"/>
+                </a:solidFill>
+                <a:latin typeface="Be Vietnam Pro" pitchFamily="34" charset="0"/>
+                <a:ea typeface="Be Vietnam Pro" pitchFamily="34" charset="-122"/>
+                <a:cs typeface="Be Vietnam Pro" pitchFamily="34" charset="-120"/>
+              </a:rPr>
+              <a:t> quyền</a:t>
+            </a:r>
+            <a:r>
+              <a:rPr lang="en-US" sz="2100" dirty="0" spc="-1" kern="0">
+                <a:solidFill>
+                  <a:srgbClr val="C4C8D6"/>
+                </a:solidFill>
+                <a:latin typeface="Be Vietnam Pro" pitchFamily="34" charset="0"/>
+                <a:ea typeface="Be Vietnam Pro" pitchFamily="34" charset="-122"/>
+                <a:cs typeface="Be Vietnam Pro" pitchFamily="34" charset="-120"/>
+              </a:rPr>
+              <a:t> truy</a:t>
             </a:r>
             <a:r>
               <a:rPr lang="en-US" sz="2100" dirty="0" spc="-3" kern="0">
@@ -4541,117 +4706,7 @@
                 <a:ea typeface="Be Vietnam Pro" pitchFamily="34" charset="-122"/>
                 <a:cs typeface="Be Vietnam Pro" pitchFamily="34" charset="-120"/>
               </a:rPr>
-              <a:t> dữ</a:t>
-            </a:r>
-            <a:r>
-              <a:rPr lang="en-US" sz="2100" dirty="0" spc="1" kern="0">
-                <a:solidFill>
-                  <a:srgbClr val="C4C8D6"/>
-                </a:solidFill>
-                <a:latin typeface="Be Vietnam Pro" pitchFamily="34" charset="0"/>
-                <a:ea typeface="Be Vietnam Pro" pitchFamily="34" charset="-122"/>
-                <a:cs typeface="Be Vietnam Pro" pitchFamily="34" charset="-120"/>
-              </a:rPr>
-              <a:t> liệu</a:t>
-            </a:r>
-            <a:r>
-              <a:rPr lang="en-US" sz="2100" dirty="0" spc="-18" kern="0">
-                <a:solidFill>
-                  <a:srgbClr val="C4C8D6"/>
-                </a:solidFill>
-                <a:latin typeface="Be Vietnam Pro" pitchFamily="34" charset="0"/>
-                <a:ea typeface="Be Vietnam Pro" pitchFamily="34" charset="-122"/>
-                <a:cs typeface="Be Vietnam Pro" pitchFamily="34" charset="-120"/>
-              </a:rPr>
-              <a:t> và</a:t>
-            </a:r>
-            <a:r>
-              <a:rPr lang="en-US" sz="2100" dirty="0" spc="-2" kern="0">
-                <a:solidFill>
-                  <a:srgbClr val="C4C8D6"/>
-                </a:solidFill>
-                <a:latin typeface="Be Vietnam Pro" pitchFamily="34" charset="0"/>
-                <a:ea typeface="Be Vietnam Pro" pitchFamily="34" charset="-122"/>
-                <a:cs typeface="Be Vietnam Pro" pitchFamily="34" charset="-120"/>
-              </a:rPr>
-              <a:t> cách</a:t>
-            </a:r>
-            <a:r>
-              <a:rPr lang="en-US" sz="2100" dirty="0" spc="0" kern="0">
-                <a:solidFill>
-                  <a:srgbClr val="C4C8D6"/>
-                </a:solidFill>
-                <a:latin typeface="Be Vietnam Pro" pitchFamily="34" charset="0"/>
-                <a:ea typeface="Be Vietnam Pro" pitchFamily="34" charset="-122"/>
-                <a:cs typeface="Be Vietnam Pro" pitchFamily="34" charset="-120"/>
-              </a:rPr>
-              <a:t> giải</a:t>
-            </a:r>
-            <a:r>
-              <a:rPr lang="en-US" sz="2100" dirty="0" spc="-5" kern="0">
-                <a:solidFill>
-                  <a:srgbClr val="C4C8D6"/>
-                </a:solidFill>
-                <a:latin typeface="Be Vietnam Pro" pitchFamily="34" charset="0"/>
-                <a:ea typeface="Be Vietnam Pro" pitchFamily="34" charset="-122"/>
-                <a:cs typeface="Be Vietnam Pro" pitchFamily="34" charset="-120"/>
-              </a:rPr>
-              <a:t> bài</a:t>
-            </a:r>
-            <a:r>
-              <a:rPr lang="en-US" sz="2100" dirty="0" spc="-12" kern="0">
-                <a:solidFill>
-                  <a:srgbClr val="C4C8D6"/>
-                </a:solidFill>
-                <a:latin typeface="Be Vietnam Pro" pitchFamily="34" charset="0"/>
-                <a:ea typeface="Be Vietnam Pro" pitchFamily="34" charset="-122"/>
-                <a:cs typeface="Be Vietnam Pro" pitchFamily="34" charset="-120"/>
-              </a:rPr>
-              <a:t> toán</a:t>
-            </a:r>
-            <a:r>
-              <a:rPr lang="en-US" sz="2100" dirty="0" spc="-17" kern="0">
-                <a:solidFill>
-                  <a:srgbClr val="C4C8D6"/>
-                </a:solidFill>
-                <a:latin typeface="Be Vietnam Pro" pitchFamily="34" charset="0"/>
-                <a:ea typeface="Be Vietnam Pro" pitchFamily="34" charset="-122"/>
-                <a:cs typeface="Be Vietnam Pro" pitchFamily="34" charset="-120"/>
-              </a:rPr>
-              <a:t> trên</a:t>
-            </a:r>
-            <a:r>
-              <a:rPr lang="en-US" sz="2100" dirty="0" spc="-2" kern="0">
-                <a:solidFill>
-                  <a:srgbClr val="C4C8D6"/>
-                </a:solidFill>
-                <a:latin typeface="Be Vietnam Pro" pitchFamily="34" charset="0"/>
-                <a:ea typeface="Be Vietnam Pro" pitchFamily="34" charset="-122"/>
-                <a:cs typeface="Be Vietnam Pro" pitchFamily="34" charset="-120"/>
-              </a:rPr>
-              <a:t> dữ</a:t>
-            </a:r>
-            <a:r>
-              <a:rPr lang="en-US" sz="2100" dirty="0" spc="1" kern="0">
-                <a:solidFill>
-                  <a:srgbClr val="C4C8D6"/>
-                </a:solidFill>
-                <a:latin typeface="Be Vietnam Pro" pitchFamily="34" charset="0"/>
-                <a:ea typeface="Be Vietnam Pro" pitchFamily="34" charset="-122"/>
-                <a:cs typeface="Be Vietnam Pro" pitchFamily="34" charset="-120"/>
-              </a:rPr>
-              <a:t> liệu</a:t>
-            </a:r>
-            <a:r>
-              <a:rPr lang="en-US" sz="2100" dirty="0" spc="9" kern="0">
-                <a:solidFill>
-                  <a:srgbClr val="C4C8D6"/>
-                </a:solidFill>
-                <a:latin typeface="Be Vietnam Pro" pitchFamily="34" charset="0"/>
-                <a:ea typeface="Be Vietnam Pro" pitchFamily="34" charset="-122"/>
-                <a:cs typeface="Be Vietnam Pro" pitchFamily="34" charset="-120"/>
-              </a:rPr>
-              <a:t> đó.</a:t>
+              <a:t> cập.</a:t>
             </a:r>
             <a:endParaRPr lang="en-US" sz="2100" dirty="0"/>
           </a:p>
@@ -4759,6 +4814,39 @@
               <a:buNone/>
             </a:pPr>
             <a:r>
+              <a:rPr lang="en-US" sz="2400" dirty="0" spc="-3" kern="0">
+                <a:solidFill>
+                  <a:srgbClr val="F3EEE3"/>
+                </a:solidFill>
+                <a:latin typeface="Be Vietnam Pro" pitchFamily="34" charset="0"/>
+                <a:ea typeface="Be Vietnam Pro" pitchFamily="34" charset="-122"/>
+                <a:cs typeface="Be Vietnam Pro" pitchFamily="34" charset="-120"/>
+              </a:rPr>
+              <a:t>ByteByteGo:</a:t>
+            </a:r>
+            <a:r>
+              <a:rPr lang="en-US" sz="2400" dirty="0" spc="-10" kern="0">
+                <a:solidFill>
+                  <a:srgbClr val="F3EEE3"/>
+                </a:solidFill>
+                <a:latin typeface="Be Vietnam Pro" pitchFamily="34" charset="0"/>
+                <a:ea typeface="Be Vietnam Pro" pitchFamily="34" charset="-122"/>
+                <a:cs typeface="Be Vietnam Pro" pitchFamily="34" charset="-120"/>
+              </a:rPr>
+              <a:t> tên</a:t>
+            </a:r>
+            <a:r>
+              <a:rPr lang="en-US" sz="2400" dirty="0" spc="7" kern="0">
+                <a:solidFill>
+                  <a:srgbClr val="F3EEE3"/>
+                </a:solidFill>
+                <a:latin typeface="Be Vietnam Pro" pitchFamily="34" charset="0"/>
+                <a:ea typeface="Be Vietnam Pro" pitchFamily="34" charset="-122"/>
+                <a:cs typeface="Be Vietnam Pro" pitchFamily="34" charset="-120"/>
+              </a:rPr>
+              <a:t> mười</a:t>
+            </a:r>
+            <a:r>
               <a:rPr lang="en-US" sz="2400" dirty="0" spc="-2" kern="0">
                 <a:solidFill>
                   <a:srgbClr val="F3EEE3"/>
@@ -4767,10 +4855,10 @@
                 <a:ea typeface="Be Vietnam Pro" pitchFamily="34" charset="-122"/>
                 <a:cs typeface="Be Vietnam Pro" pitchFamily="34" charset="-120"/>
               </a:rPr>
-              <a:t>ByteByteGo,</a:t>
-            </a:r>
-            <a:r>
-              <a:rPr lang="en-US" sz="2400" dirty="0" spc="-3" kern="0">
+              <a:t> một</a:t>
+            </a:r>
+            <a:r>
+              <a:rPr lang="en-US" sz="2400" dirty="0" spc="5" kern="0">
                 <a:solidFill>
                   <a:srgbClr val="F3EEE3"/>
                 </a:solidFill>
@@ -4778,7 +4866,29 @@
                 <a:ea typeface="Be Vietnam Pro" pitchFamily="34" charset="-122"/>
                 <a:cs typeface="Be Vietnam Pro" pitchFamily="34" charset="-120"/>
               </a:rPr>
-              <a:t> bài</a:t>
+              <a:t> bước.</a:t>
+            </a:r>
+            <a:r>
+              <a:rPr lang="en-US" sz="2400" dirty="0" spc="-54" kern="0">
+                <a:solidFill>
+                  <a:srgbClr val="F3EEE3"/>
+                </a:solidFill>
+                <a:latin typeface="Be Vietnam Pro" pitchFamily="34" charset="0"/>
+                <a:ea typeface="Be Vietnam Pro" pitchFamily="34" charset="-122"/>
+                <a:cs typeface="Be Vietnam Pro" pitchFamily="34" charset="-120"/>
+              </a:rPr>
+              <a:t> Tài</a:t>
+            </a:r>
+            <a:r>
+              <a:rPr lang="en-US" sz="2400" dirty="0" spc="-1" kern="0">
+                <a:solidFill>
+                  <a:srgbClr val="F3EEE3"/>
+                </a:solidFill>
+                <a:latin typeface="Be Vietnam Pro" pitchFamily="34" charset="0"/>
+                <a:ea typeface="Be Vietnam Pro" pitchFamily="34" charset="-122"/>
+                <a:cs typeface="Be Vietnam Pro" pitchFamily="34" charset="-120"/>
+              </a:rPr>
+              <a:t> liệu:</a:t>
             </a:r>
             <a:r>
               <a:rPr lang="en-US" sz="2400" dirty="0" spc="1" kern="0">
@@ -4789,10 +4899,10 @@
                 <a:ea typeface="Be Vietnam Pro" pitchFamily="34" charset="-122"/>
                 <a:cs typeface="Be Vietnam Pro" pitchFamily="34" charset="-120"/>
               </a:rPr>
-              <a:t> nguồn</a:t>
-            </a:r>
-            <a:r>
-              <a:rPr lang="en-US" sz="2400" dirty="0" spc="-10" kern="0">
+              <a:t> gRPC,</a:t>
+            </a:r>
+            <a:r>
+              <a:rPr lang="en-US" sz="2400" dirty="0" spc="-16" kern="0">
                 <a:solidFill>
                   <a:srgbClr val="F3EEE3"/>
                 </a:solidFill>
@@ -4800,10 +4910,10 @@
                 <a:ea typeface="Be Vietnam Pro" pitchFamily="34" charset="-122"/>
                 <a:cs typeface="Be Vietnam Pro" pitchFamily="34" charset="-120"/>
               </a:rPr>
-              <a:t> tại</a:t>
-            </a:r>
-            <a:r>
-              <a:rPr lang="en-US" sz="2400" dirty="0" spc="2" kern="0">
+              <a:t> Kubernetes,</a:t>
+            </a:r>
+            <a:r>
+              <a:rPr lang="en-US" sz="2400" dirty="0" spc="-46" kern="0">
                 <a:solidFill>
                   <a:srgbClr val="F3EEE3"/>
                 </a:solidFill>
@@ -4811,10 +4921,10 @@
                 <a:ea typeface="Be Vietnam Pro" pitchFamily="34" charset="-122"/>
                 <a:cs typeface="Be Vietnam Pro" pitchFamily="34" charset="-120"/>
               </a:rPr>
-              <a:t> commit</a:t>
-            </a:r>
-            <a:r>
-              <a:rPr lang="en-US" sz="2400" dirty="0" spc="-1" kern="0">
+              <a:t> OWASP,</a:t>
+            </a:r>
+            <a:r>
+              <a:rPr lang="en-US" sz="2400" dirty="0" spc="7" kern="0">
                 <a:solidFill>
                   <a:srgbClr val="F3EEE3"/>
                 </a:solidFill>
@@ -4822,10 +4932,10 @@
                 <a:ea typeface="Be Vietnam Pro" pitchFamily="34" charset="-122"/>
                 <a:cs typeface="Be Vietnam Pro" pitchFamily="34" charset="-120"/>
               </a:rPr>
-              <a:t> cố</a:t>
-            </a:r>
-            <a:r>
-              <a:rPr lang="en-US" sz="2400" dirty="0" spc="16" kern="0">
+              <a:t> Python,</a:t>
+            </a:r>
+            <a:r>
+              <a:rPr lang="en-US" sz="2400" dirty="0" spc="-19" kern="0">
                 <a:solidFill>
                   <a:srgbClr val="F3EEE3"/>
                 </a:solidFill>
@@ -4833,10 +4943,10 @@
                 <a:ea typeface="Be Vietnam Pro" pitchFamily="34" charset="-122"/>
                 <a:cs typeface="Be Vietnam Pro" pitchFamily="34" charset="-120"/>
               </a:rPr>
-              <a:t> định:</a:t>
-            </a:r>
-            <a:r>
-              <a:rPr lang="en-US" sz="2400" dirty="0" spc="8" kern="0">
+              <a:t> Redis,</a:t>
+            </a:r>
+            <a:r>
+              <a:rPr lang="en-US" sz="2400" dirty="0" spc="0" kern="0">
                 <a:solidFill>
                   <a:srgbClr val="F3EEE3"/>
                 </a:solidFill>
@@ -4844,73 +4954,7 @@
                 <a:ea typeface="Be Vietnam Pro" pitchFamily="34" charset="-122"/>
                 <a:cs typeface="Be Vietnam Pro" pitchFamily="34" charset="-120"/>
               </a:rPr>
-              <a:t> mười</a:t>
-            </a:r>
-            <a:r>
-              <a:rPr lang="en-US" sz="2400" dirty="0" spc="-3" kern="0">
-                <a:solidFill>
-                  <a:srgbClr val="F3EEE3"/>
-                </a:solidFill>
-                <a:latin typeface="Be Vietnam Pro" pitchFamily="34" charset="0"/>
-                <a:ea typeface="Be Vietnam Pro" pitchFamily="34" charset="-122"/>
-                <a:cs typeface="Be Vietnam Pro" pitchFamily="34" charset="-120"/>
-              </a:rPr>
-              <a:t> một</a:t>
-            </a:r>
-            <a:r>
-              <a:rPr lang="en-US" sz="2400" dirty="0" spc="6" kern="0">
-                <a:solidFill>
-                  <a:srgbClr val="F3EEE3"/>
-                </a:solidFill>
-                <a:latin typeface="Be Vietnam Pro" pitchFamily="34" charset="0"/>
-                <a:ea typeface="Be Vietnam Pro" pitchFamily="34" charset="-122"/>
-                <a:cs typeface="Be Vietnam Pro" pitchFamily="34" charset="-120"/>
-              </a:rPr>
-              <a:t> bước</a:t>
-            </a:r>
-            <a:r>
-              <a:rPr lang="en-US" sz="2400" dirty="0" spc="-15" kern="0">
-                <a:solidFill>
-                  <a:srgbClr val="F3EEE3"/>
-                </a:solidFill>
-                <a:latin typeface="Be Vietnam Pro" pitchFamily="34" charset="0"/>
-                <a:ea typeface="Be Vietnam Pro" pitchFamily="34" charset="-122"/>
-                <a:cs typeface="Be Vietnam Pro" pitchFamily="34" charset="-120"/>
-              </a:rPr>
-              <a:t> và</a:t>
-            </a:r>
-            <a:r>
-              <a:rPr lang="en-US" sz="2400" dirty="0" spc="-1" kern="0">
-                <a:solidFill>
-                  <a:srgbClr val="F3EEE3"/>
-                </a:solidFill>
-                <a:latin typeface="Be Vietnam Pro" pitchFamily="34" charset="0"/>
-                <a:ea typeface="Be Vietnam Pro" pitchFamily="34" charset="-122"/>
-                <a:cs typeface="Be Vietnam Pro" pitchFamily="34" charset="-120"/>
-              </a:rPr>
-              <a:t> ví</a:t>
-            </a:r>
-            <a:r>
-              <a:rPr lang="en-US" sz="2400" dirty="0" spc="4" kern="0">
-                <a:solidFill>
-                  <a:srgbClr val="F3EEE3"/>
-                </a:solidFill>
-                <a:latin typeface="Be Vietnam Pro" pitchFamily="34" charset="0"/>
-                <a:ea typeface="Be Vietnam Pro" pitchFamily="34" charset="-122"/>
-                <a:cs typeface="Be Vietnam Pro" pitchFamily="34" charset="-120"/>
-              </a:rPr>
-              <a:t> dụ</a:t>
-            </a:r>
-            <a:r>
-              <a:rPr lang="en-US" sz="2400" dirty="0" spc="1" kern="0">
-                <a:solidFill>
-                  <a:srgbClr val="F3EEE3"/>
-                </a:solidFill>
-                <a:latin typeface="Be Vietnam Pro" pitchFamily="34" charset="0"/>
-                <a:ea typeface="Be Vietnam Pro" pitchFamily="34" charset="-122"/>
-                <a:cs typeface="Be Vietnam Pro" pitchFamily="34" charset="-120"/>
-              </a:rPr>
-              <a:t> công cụ.</a:t>
+              <a:t> GitHub.</a:t>
             </a:r>
             <a:endParaRPr lang="en-US" sz="2400" dirty="0"/>
           </a:p>
@@ -4985,7 +5029,7 @@
               <a:t> ngày</a:t>
             </a:r>
             <a:r>
-              <a:rPr lang="en-US" sz="2100" dirty="0" spc="-1" kern="0">
+              <a:rPr lang="en-US" sz="2100" dirty="0" spc="0" kern="0">
                 <a:solidFill>
                   <a:srgbClr val="C4C8D6"/>
                 </a:solidFill>
@@ -4993,10 +5037,10 @@
                 <a:ea typeface="Be Vietnam Pro" pitchFamily="34" charset="-122"/>
                 <a:cs typeface="Be Vietnam Pro" pitchFamily="34" charset="-120"/>
               </a:rPr>
-              <a:t> 2026-10-18.</a:t>
-            </a:r>
-            <a:r>
-              <a:rPr lang="en-US" sz="2100" dirty="0" spc="0" kern="0">
+              <a:t> 2026-10-19.</a:t>
+            </a:r>
+            <a:r>
+              <a:rPr lang="en-US" sz="2100" dirty="0" spc="-6" kern="0">
                 <a:solidFill>
                   <a:srgbClr val="C4C8D6"/>
                 </a:solidFill>
@@ -5004,7 +5048,73 @@
                 <a:ea typeface="Be Vietnam Pro" pitchFamily="34" charset="-122"/>
                 <a:cs typeface="Be Vietnam Pro" pitchFamily="34" charset="-120"/>
               </a:rPr>
-              <a:t> Hình</a:t>
+              <a:t> Số</a:t>
+            </a:r>
+            <a:r>
+              <a:rPr lang="en-US" sz="2100" dirty="0" spc="12" kern="0">
+                <a:solidFill>
+                  <a:srgbClr val="C4C8D6"/>
+                </a:solidFill>
+                <a:latin typeface="Be Vietnam Pro" pitchFamily="34" charset="0"/>
+                <a:ea typeface="Be Vietnam Pro" pitchFamily="34" charset="-122"/>
+                <a:cs typeface="Be Vietnam Pro" pitchFamily="34" charset="-120"/>
+              </a:rPr>
+              <a:t> đo</a:t>
+            </a:r>
+            <a:r>
+              <a:rPr lang="en-US" sz="2100" dirty="0" spc="-5" kern="0">
+                <a:solidFill>
+                  <a:srgbClr val="C4C8D6"/>
+                </a:solidFill>
+                <a:latin typeface="Be Vietnam Pro" pitchFamily="34" charset="0"/>
+                <a:ea typeface="Be Vietnam Pro" pitchFamily="34" charset="-122"/>
+                <a:cs typeface="Be Vietnam Pro" pitchFamily="34" charset="-120"/>
+              </a:rPr>
+              <a:t> ở</a:t>
+            </a:r>
+            <a:r>
+              <a:rPr lang="en-US" sz="2100" dirty="0" spc="3" kern="0">
+                <a:solidFill>
+                  <a:srgbClr val="C4C8D6"/>
+                </a:solidFill>
+                <a:latin typeface="Be Vietnam Pro" pitchFamily="34" charset="0"/>
+                <a:ea typeface="Be Vietnam Pro" pitchFamily="34" charset="-122"/>
+                <a:cs typeface="Be Vietnam Pro" pitchFamily="34" charset="-120"/>
+              </a:rPr>
+              <a:t> bước</a:t>
+            </a:r>
+            <a:r>
+              <a:rPr lang="en-US" sz="2100" dirty="0" spc="-6" kern="0">
+                <a:solidFill>
+                  <a:srgbClr val="C4C8D6"/>
+                </a:solidFill>
+                <a:latin typeface="Be Vietnam Pro" pitchFamily="34" charset="0"/>
+                <a:ea typeface="Be Vietnam Pro" pitchFamily="34" charset="-122"/>
+                <a:cs typeface="Be Vietnam Pro" pitchFamily="34" charset="-120"/>
+              </a:rPr>
+              <a:t> 8</a:t>
+            </a:r>
+            <a:r>
+              <a:rPr lang="en-US" sz="2100" dirty="0" spc="-4" kern="0">
+                <a:solidFill>
+                  <a:srgbClr val="C4C8D6"/>
+                </a:solidFill>
+                <a:latin typeface="Be Vietnam Pro" pitchFamily="34" charset="0"/>
+                <a:ea typeface="Be Vietnam Pro" pitchFamily="34" charset="-122"/>
+                <a:cs typeface="Be Vietnam Pro" pitchFamily="34" charset="-120"/>
+              </a:rPr>
+              <a:t> do</a:t>
+            </a:r>
+            <a:r>
+              <a:rPr lang="en-US" sz="2100" dirty="0" spc="4" kern="0">
+                <a:solidFill>
+                  <a:srgbClr val="C4C8D6"/>
+                </a:solidFill>
+                <a:latin typeface="Be Vietnam Pro" pitchFamily="34" charset="0"/>
+                <a:ea typeface="Be Vietnam Pro" pitchFamily="34" charset="-122"/>
+                <a:cs typeface="Be Vietnam Pro" pitchFamily="34" charset="-120"/>
+              </a:rPr>
+              <a:t> người</a:t>
             </a:r>
             <a:r>
               <a:rPr lang="en-US" sz="2100" dirty="0" spc="1" kern="0">
@@ -5015,10 +5125,10 @@
                 <a:ea typeface="Be Vietnam Pro" pitchFamily="34" charset="-122"/>
                 <a:cs typeface="Be Vietnam Pro" pitchFamily="34" charset="-120"/>
               </a:rPr>
-              <a:t> minh</a:t>
-            </a:r>
-            <a:r>
-              <a:rPr lang="en-US" sz="2100" dirty="0" spc="-6" kern="0">
+              <a:t> biên</a:t>
+            </a:r>
+            <a:r>
+              <a:rPr lang="en-US" sz="2100" dirty="0" spc="-7" kern="0">
                 <a:solidFill>
                   <a:srgbClr val="C4C8D6"/>
                 </a:solidFill>
@@ -5026,51 +5136,7 @@
                 <a:ea typeface="Be Vietnam Pro" pitchFamily="34" charset="-122"/>
                 <a:cs typeface="Be Vietnam Pro" pitchFamily="34" charset="-120"/>
               </a:rPr>
-              <a:t> họa</a:t>
-            </a:r>
-            <a:r>
-              <a:rPr lang="en-US" sz="2100" dirty="0" spc="-3" kern="0">
-                <a:solidFill>
-                  <a:srgbClr val="C4C8D6"/>
-                </a:solidFill>
-                <a:latin typeface="Be Vietnam Pro" pitchFamily="34" charset="0"/>
-                <a:ea typeface="Be Vietnam Pro" pitchFamily="34" charset="-122"/>
-                <a:cs typeface="Be Vietnam Pro" pitchFamily="34" charset="-120"/>
-              </a:rPr>
-              <a:t> là</a:t>
-            </a:r>
-            <a:r>
-              <a:rPr lang="en-US" sz="2100" dirty="0" spc="-4" kern="0">
-                <a:solidFill>
-                  <a:srgbClr val="C4C8D6"/>
-                </a:solidFill>
-                <a:latin typeface="Be Vietnam Pro" pitchFamily="34" charset="0"/>
-                <a:ea typeface="Be Vietnam Pro" pitchFamily="34" charset="-122"/>
-                <a:cs typeface="Be Vietnam Pro" pitchFamily="34" charset="-120"/>
-              </a:rPr>
-              <a:t> thiết</a:t>
-            </a:r>
-            <a:r>
-              <a:rPr lang="en-US" sz="2100" dirty="0" spc="-30" kern="0">
-                <a:solidFill>
-                  <a:srgbClr val="C4C8D6"/>
-                </a:solidFill>
-                <a:latin typeface="Be Vietnam Pro" pitchFamily="34" charset="0"/>
-                <a:ea typeface="Be Vietnam Pro" pitchFamily="34" charset="-122"/>
-                <a:cs typeface="Be Vietnam Pro" pitchFamily="34" charset="-120"/>
-              </a:rPr>
-              <a:t> kế</a:t>
-            </a:r>
-            <a:r>
-              <a:rPr lang="en-US" sz="2100" dirty="0" spc="-1" kern="0">
-                <a:solidFill>
-                  <a:srgbClr val="C4C8D6"/>
-                </a:solidFill>
-                <a:latin typeface="Be Vietnam Pro" pitchFamily="34" charset="0"/>
-                <a:ea typeface="Be Vietnam Pro" pitchFamily="34" charset="-122"/>
-                <a:cs typeface="Be Vietnam Pro" pitchFamily="34" charset="-120"/>
-              </a:rPr>
-              <a:t> mới.</a:t>
+              <a:t> soạn chạy.</a:t>
             </a:r>
             <a:endParaRPr lang="en-US" sz="2100" dirty="0"/>
           </a:p>
@@ -5749,6 +5815,17 @@
               <a:buNone/>
             </a:pPr>
             <a:r>
+              <a:rPr lang="en-US" sz="2850" dirty="0" spc="-11" kern="0">
+                <a:solidFill>
+                  <a:srgbClr val="14161C"/>
+                </a:solidFill>
+                <a:latin typeface="Be Vietnam Pro" pitchFamily="34" charset="0"/>
+                <a:ea typeface="Be Vietnam Pro" pitchFamily="34" charset="-122"/>
+                <a:cs typeface="Be Vietnam Pro" pitchFamily="34" charset="-120"/>
+              </a:rPr>
+              <a:t>Một</a:t>
+            </a:r>
+            <a:r>
               <a:rPr lang="en-US" sz="2850" dirty="0" spc="-1" kern="0">
                 <a:solidFill>
                   <a:srgbClr val="14161C"/>
@@ -5757,29 +5834,7 @@
                 <a:ea typeface="Be Vietnam Pro" pitchFamily="34" charset="-122"/>
                 <a:cs typeface="Be Vietnam Pro" pitchFamily="34" charset="-120"/>
               </a:rPr>
-              <a:t>Bài</a:t>
-            </a:r>
-            <a:r>
-              <a:rPr lang="en-US" sz="2850" dirty="0" spc="-2" kern="0">
-                <a:solidFill>
-                  <a:srgbClr val="14161C"/>
-                </a:solidFill>
-                <a:latin typeface="Be Vietnam Pro" pitchFamily="34" charset="0"/>
-                <a:ea typeface="Be Vietnam Pro" pitchFamily="34" charset="-122"/>
-                <a:cs typeface="Be Vietnam Pro" pitchFamily="34" charset="-120"/>
-              </a:rPr>
-              <a:t> nguồn</a:t>
-            </a:r>
-            <a:r>
-              <a:rPr lang="en-US" sz="2850" dirty="0" spc="-15" kern="0">
-                <a:solidFill>
-                  <a:srgbClr val="14161C"/>
-                </a:solidFill>
-                <a:latin typeface="Be Vietnam Pro" pitchFamily="34" charset="0"/>
-                <a:ea typeface="Be Vietnam Pro" pitchFamily="34" charset="-122"/>
-                <a:cs typeface="Be Vietnam Pro" pitchFamily="34" charset="-120"/>
-              </a:rPr>
-              <a:t> gợi</a:t>
+              <a:t> dịch</a:t>
             </a:r>
             <a:r>
               <a:rPr lang="en-US" sz="2850" dirty="0" spc="3" kern="0">
@@ -5790,7 +5845,95 @@
                 <a:ea typeface="Be Vietnam Pro" pitchFamily="34" charset="-122"/>
                 <a:cs typeface="Be Vietnam Pro" pitchFamily="34" charset="-120"/>
               </a:rPr>
-              <a:t> ý</a:t>
+              <a:t> vụ</a:t>
+            </a:r>
+            <a:r>
+              <a:rPr lang="en-US" sz="2850" dirty="0" spc="8" kern="0">
+                <a:solidFill>
+                  <a:srgbClr val="14161C"/>
+                </a:solidFill>
+                <a:latin typeface="Be Vietnam Pro" pitchFamily="34" charset="0"/>
+                <a:ea typeface="Be Vietnam Pro" pitchFamily="34" charset="-122"/>
+                <a:cs typeface="Be Vietnam Pro" pitchFamily="34" charset="-120"/>
+              </a:rPr>
+              <a:t> mượn</a:t>
+            </a:r>
+            <a:r>
+              <a:rPr lang="en-US" sz="2850" dirty="0" spc="-6" kern="0">
+                <a:solidFill>
+                  <a:srgbClr val="14161C"/>
+                </a:solidFill>
+                <a:latin typeface="Be Vietnam Pro" pitchFamily="34" charset="0"/>
+                <a:ea typeface="Be Vietnam Pro" pitchFamily="34" charset="-122"/>
+                <a:cs typeface="Be Vietnam Pro" pitchFamily="34" charset="-120"/>
+              </a:rPr>
+              <a:t> sách</a:t>
+            </a:r>
+            <a:r>
+              <a:rPr lang="en-US" sz="2850" dirty="0" spc="1" kern="0">
+                <a:solidFill>
+                  <a:srgbClr val="14161C"/>
+                </a:solidFill>
+                <a:latin typeface="Be Vietnam Pro" pitchFamily="34" charset="0"/>
+                <a:ea typeface="Be Vietnam Pro" pitchFamily="34" charset="-122"/>
+                <a:cs typeface="Be Vietnam Pro" pitchFamily="34" charset="-120"/>
+              </a:rPr>
+              <a:t> của</a:t>
+            </a:r>
+            <a:r>
+              <a:rPr lang="en-US" sz="2850" dirty="0" spc="0" kern="0">
+                <a:solidFill>
+                  <a:srgbClr val="14161C"/>
+                </a:solidFill>
+                <a:latin typeface="Be Vietnam Pro" pitchFamily="34" charset="0"/>
+                <a:ea typeface="Be Vietnam Pro" pitchFamily="34" charset="-122"/>
+                <a:cs typeface="Be Vietnam Pro" pitchFamily="34" charset="-120"/>
+              </a:rPr>
+              <a:t> thư</a:t>
+            </a:r>
+            <a:r>
+              <a:rPr lang="en-US" sz="2850" dirty="0" spc="1" kern="0">
+                <a:solidFill>
+                  <a:srgbClr val="14161C"/>
+                </a:solidFill>
+                <a:latin typeface="Be Vietnam Pro" pitchFamily="34" charset="0"/>
+                <a:ea typeface="Be Vietnam Pro" pitchFamily="34" charset="-122"/>
+                <a:cs typeface="Be Vietnam Pro" pitchFamily="34" charset="-120"/>
+              </a:rPr>
+              <a:t> viện</a:t>
+            </a:r>
+            <a:r>
+              <a:rPr lang="en-US" sz="2850" dirty="0" spc="0" kern="0">
+                <a:solidFill>
+                  <a:srgbClr val="14161C"/>
+                </a:solidFill>
+                <a:latin typeface="Be Vietnam Pro" pitchFamily="34" charset="0"/>
+                <a:ea typeface="Be Vietnam Pro" pitchFamily="34" charset="-122"/>
+                <a:cs typeface="Be Vietnam Pro" pitchFamily="34" charset="-120"/>
+              </a:rPr>
+              <a:t> nhỏ</a:t>
+            </a:r>
+            <a:r>
+              <a:rPr lang="en-US" sz="2850" dirty="0" spc="40" kern="0">
+                <a:solidFill>
+                  <a:srgbClr val="14161C"/>
+                </a:solidFill>
+                <a:latin typeface="Be Vietnam Pro" pitchFamily="34" charset="0"/>
+                <a:ea typeface="Be Vietnam Pro" pitchFamily="34" charset="-122"/>
+                <a:cs typeface="Be Vietnam Pro" pitchFamily="34" charset="-120"/>
+              </a:rPr>
+              <a:t> đi</a:t>
+            </a:r>
+            <a:r>
+              <a:rPr lang="en-US" sz="2850" dirty="0" spc="1" kern="0">
+                <a:solidFill>
+                  <a:srgbClr val="14161C"/>
+                </a:solidFill>
+                <a:latin typeface="Be Vietnam Pro" pitchFamily="34" charset="0"/>
+                <a:ea typeface="Be Vietnam Pro" pitchFamily="34" charset="-122"/>
+                <a:cs typeface="Be Vietnam Pro" pitchFamily="34" charset="-120"/>
+              </a:rPr>
+              <a:t> qua</a:t>
             </a:r>
             <a:r>
               <a:rPr lang="en-US" sz="2850" dirty="0" spc="9" kern="0">
@@ -5826,39 +5969,6 @@
               <a:t> bước</a:t>
             </a:r>
             <a:r>
-              <a:rPr lang="en-US" sz="2850" dirty="0" spc="20" kern="0">
-                <a:solidFill>
-                  <a:srgbClr val="14161C"/>
-                </a:solidFill>
-                <a:latin typeface="Be Vietnam Pro" pitchFamily="34" charset="0"/>
-                <a:ea typeface="Be Vietnam Pro" pitchFamily="34" charset="-122"/>
-                <a:cs typeface="Be Vietnam Pro" pitchFamily="34" charset="-120"/>
-              </a:rPr>
-              <a:t> để</a:t>
-            </a:r>
-            <a:r>
-              <a:rPr lang="en-US" sz="2850" dirty="0" spc="40" kern="0">
-                <a:solidFill>
-                  <a:srgbClr val="14161C"/>
-                </a:solidFill>
-                <a:latin typeface="Be Vietnam Pro" pitchFamily="34" charset="0"/>
-                <a:ea typeface="Be Vietnam Pro" pitchFamily="34" charset="-122"/>
-                <a:cs typeface="Be Vietnam Pro" pitchFamily="34" charset="-120"/>
-              </a:rPr>
-              <a:t> đi</a:t>
-            </a:r>
-            <a:r>
-              <a:rPr lang="en-US" sz="2850" dirty="0" spc="-1" kern="0">
-                <a:solidFill>
-                  <a:srgbClr val="14161C"/>
-                </a:solidFill>
-                <a:latin typeface="Be Vietnam Pro" pitchFamily="34" charset="0"/>
-                <a:ea typeface="Be Vietnam Pro" pitchFamily="34" charset="-122"/>
-                <a:cs typeface="Be Vietnam Pro" pitchFamily="34" charset="-120"/>
-              </a:rPr>
-              <a:t> từ</a:t>
-            </a:r>
-            <a:r>
               <a:rPr lang="en-US" sz="2850" dirty="0" spc="1" kern="0">
                 <a:solidFill>
                   <a:srgbClr val="14161C"/>
@@ -5867,62 +5977,7 @@
                 <a:ea typeface="Be Vietnam Pro" pitchFamily="34" charset="-122"/>
                 <a:cs typeface="Be Vietnam Pro" pitchFamily="34" charset="-120"/>
               </a:rPr>
-              <a:t> lập</a:t>
-            </a:r>
-            <a:r>
-              <a:rPr lang="en-US" sz="2850" dirty="0" spc="9" kern="0">
-                <a:solidFill>
-                  <a:srgbClr val="14161C"/>
-                </a:solidFill>
-                <a:latin typeface="Be Vietnam Pro" pitchFamily="34" charset="0"/>
-                <a:ea typeface="Be Vietnam Pro" pitchFamily="34" charset="-122"/>
-                <a:cs typeface="Be Vietnam Pro" pitchFamily="34" charset="-120"/>
-              </a:rPr>
-              <a:t> trình</a:t>
-            </a:r>
-            <a:r>
-              <a:rPr lang="en-US" sz="2850" dirty="0" spc="1" kern="0">
-                <a:solidFill>
-                  <a:srgbClr val="14161C"/>
-                </a:solidFill>
-                <a:latin typeface="Be Vietnam Pro" pitchFamily="34" charset="0"/>
-                <a:ea typeface="Be Vietnam Pro" pitchFamily="34" charset="-122"/>
-                <a:cs typeface="Be Vietnam Pro" pitchFamily="34" charset="-120"/>
-              </a:rPr>
-              <a:t> viên</a:t>
-            </a:r>
-            <a:r>
-              <a:rPr lang="en-US" sz="2850" dirty="0" spc="0" kern="0">
-                <a:solidFill>
-                  <a:srgbClr val="14161C"/>
-                </a:solidFill>
-                <a:latin typeface="Be Vietnam Pro" pitchFamily="34" charset="0"/>
-                <a:ea typeface="Be Vietnam Pro" pitchFamily="34" charset="-122"/>
-                <a:cs typeface="Be Vietnam Pro" pitchFamily="34" charset="-120"/>
-              </a:rPr>
-              <a:t> mới</a:t>
-            </a:r>
-            <a:r>
-              <a:rPr lang="en-US" sz="2850" dirty="0" spc="-11" kern="0">
-                <a:solidFill>
-                  <a:srgbClr val="14161C"/>
-                </a:solidFill>
-                <a:latin typeface="Be Vietnam Pro" pitchFamily="34" charset="0"/>
-                <a:ea typeface="Be Vietnam Pro" pitchFamily="34" charset="-122"/>
-                <a:cs typeface="Be Vietnam Pro" pitchFamily="34" charset="-120"/>
-              </a:rPr>
-              <a:t> vào</a:t>
-            </a:r>
-            <a:r>
-              <a:rPr lang="en-US" sz="2850" dirty="0" spc="-1" kern="0">
-                <a:solidFill>
-                  <a:srgbClr val="14161C"/>
-                </a:solidFill>
-                <a:latin typeface="Be Vietnam Pro" pitchFamily="34" charset="0"/>
-                <a:ea typeface="Be Vietnam Pro" pitchFamily="34" charset="-122"/>
-                <a:cs typeface="Be Vietnam Pro" pitchFamily="34" charset="-120"/>
-              </a:rPr>
-              <a:t> nghề</a:t>
+              <a:t> của</a:t>
             </a:r>
             <a:r>
               <a:rPr lang="en-US" sz="2850" dirty="0" spc="2" kern="0">
@@ -5933,51 +5988,18 @@
                 <a:ea typeface="Be Vietnam Pro" pitchFamily="34" charset="-122"/>
                 <a:cs typeface="Be Vietnam Pro" pitchFamily="34" charset="-120"/>
               </a:rPr>
-              <a:t> (junior)</a:t>
-            </a:r>
-            <a:r>
-              <a:rPr lang="en-US" sz="2850" dirty="0" spc="-14" kern="0">
-                <a:solidFill>
-                  <a:srgbClr val="14161C"/>
-                </a:solidFill>
-                <a:latin typeface="Be Vietnam Pro" pitchFamily="34" charset="0"/>
-                <a:ea typeface="Be Vietnam Pro" pitchFamily="34" charset="-122"/>
-                <a:cs typeface="Be Vietnam Pro" pitchFamily="34" charset="-120"/>
-              </a:rPr>
-              <a:t> tới</a:t>
-            </a:r>
-            <a:r>
-              <a:rPr lang="en-US" sz="2850" dirty="0" spc="-1" kern="0">
-                <a:solidFill>
-                  <a:srgbClr val="14161C"/>
-                </a:solidFill>
-                <a:latin typeface="Be Vietnam Pro" pitchFamily="34" charset="0"/>
-                <a:ea typeface="Be Vietnam Pro" pitchFamily="34" charset="-122"/>
-                <a:cs typeface="Be Vietnam Pro" pitchFamily="34" charset="-120"/>
-              </a:rPr>
-              <a:t> cấp</a:t>
-            </a:r>
-            <a:r>
-              <a:rPr lang="en-US" sz="2850" dirty="0" spc="3" kern="0">
-                <a:solidFill>
-                  <a:srgbClr val="14161C"/>
-                </a:solidFill>
-                <a:latin typeface="Be Vietnam Pro" pitchFamily="34" charset="0"/>
-                <a:ea typeface="Be Vietnam Pro" pitchFamily="34" charset="-122"/>
-                <a:cs typeface="Be Vietnam Pro" pitchFamily="34" charset="-120"/>
-              </a:rPr>
-              <a:t> cao</a:t>
-            </a:r>
-            <a:r>
-              <a:rPr lang="en-US" sz="2850" dirty="0" spc="-2" kern="0">
-                <a:solidFill>
-                  <a:srgbClr val="14161C"/>
-                </a:solidFill>
-                <a:latin typeface="Be Vietnam Pro" pitchFamily="34" charset="0"/>
-                <a:ea typeface="Be Vietnam Pro" pitchFamily="34" charset="-122"/>
-                <a:cs typeface="Be Vietnam Pro" pitchFamily="34" charset="-120"/>
-              </a:rPr>
-              <a:t> (senior).</a:t>
+              <a:t> lộ</a:t>
+            </a:r>
+            <a:r>
+              <a:rPr lang="en-US" sz="2850" dirty="0" spc="8" kern="0">
+                <a:solidFill>
+                  <a:srgbClr val="14161C"/>
+                </a:solidFill>
+                <a:latin typeface="Be Vietnam Pro" pitchFamily="34" charset="0"/>
+                <a:ea typeface="Be Vietnam Pro" pitchFamily="34" charset="-122"/>
+                <a:cs typeface="Be Vietnam Pro" pitchFamily="34" charset="-120"/>
+              </a:rPr>
+              <a:t> trình.</a:t>
             </a:r>
             <a:endParaRPr lang="en-US" sz="2850" dirty="0"/>
           </a:p>
@@ -6057,7 +6079,7 @@
       </p:sp>
       <p:sp>
         <p:nvSpPr>
-          <p:cNvPr id="7" name="Text richtext-1792339126427-950908799"/>
+          <p:cNvPr id="7" name="Text 5"/>
           <p:cNvSpPr/>
           <p:nvPr/>
         </p:nvSpPr>
@@ -6076,16 +6098,14 @@
           <a:bodyPr wrap="square" lIns="0" tIns="9700" rIns="0" bIns="-9700" rtlCol="0" anchor="t"/>
           <a:lstStyle/>
           <a:p>
-            <a:pPr algn="l" marL="323850" indent="-231371">
+            <a:pPr algn="l" indent="0" marL="0">
               <a:lnSpc>
                 <a:spcPts val="3443"/>
               </a:lnSpc>
               <a:spcAft>
                 <a:spcPts val="1050"/>
               </a:spcAft>
-              <a:buSzPct val="100000"/>
-              <a:buFont typeface="Arial"/>
-              <a:buChar char="•"/>
+              <a:buNone/>
             </a:pPr>
             <a:r>
               <a:rPr lang="en-US" sz="2550" dirty="0" spc="1" kern="0">
@@ -6156,18 +6176,71 @@
             <a:endParaRPr lang="en-US" sz="2550" dirty="0"/>
           </a:p>
           <a:p>
-            <a:pPr algn="l" marL="323850" indent="-231371">
+            <a:pPr algn="l" indent="0" marL="0">
               <a:lnSpc>
                 <a:spcPts val="3443"/>
               </a:lnSpc>
               <a:spcAft>
                 <a:spcPts val="1050"/>
               </a:spcAft>
-              <a:buSzPct val="100000"/>
-              <a:buFont typeface="Arial"/>
-              <a:buChar char="•"/>
+              <a:buNone/>
             </a:pPr>
             <a:r>
+              <a:rPr lang="en-US" sz="2550" dirty="0" spc="-11" kern="0">
+                <a:solidFill>
+                  <a:srgbClr val="14161C"/>
+                </a:solidFill>
+                <a:latin typeface="Be Vietnam Pro" pitchFamily="34" charset="0"/>
+                <a:ea typeface="Be Vietnam Pro" pitchFamily="34" charset="-122"/>
+                <a:cs typeface="Be Vietnam Pro" pitchFamily="34" charset="-120"/>
+              </a:rPr>
+              <a:t>Thấy</a:t>
+            </a:r>
+            <a:r>
+              <a:rPr lang="en-US" sz="2550" dirty="0" spc="0" kern="0">
+                <a:solidFill>
+                  <a:srgbClr val="14161C"/>
+                </a:solidFill>
+                <a:latin typeface="Be Vietnam Pro" pitchFamily="34" charset="0"/>
+                <a:ea typeface="Be Vietnam Pro" pitchFamily="34" charset="-122"/>
+                <a:cs typeface="Be Vietnam Pro" pitchFamily="34" charset="-120"/>
+              </a:rPr>
+              <a:t> mỗi</a:t>
+            </a:r>
+            <a:r>
+              <a:rPr lang="en-US" sz="2550" dirty="0" spc="7" kern="0">
+                <a:solidFill>
+                  <a:srgbClr val="14161C"/>
+                </a:solidFill>
+                <a:latin typeface="Be Vietnam Pro" pitchFamily="34" charset="0"/>
+                <a:ea typeface="Be Vietnam Pro" pitchFamily="34" charset="-122"/>
+                <a:cs typeface="Be Vietnam Pro" pitchFamily="34" charset="-120"/>
+              </a:rPr>
+              <a:t> bước</a:t>
+            </a:r>
+            <a:r>
+              <a:rPr lang="en-US" sz="2550" dirty="0" spc="0" kern="0">
+                <a:solidFill>
+                  <a:srgbClr val="14161C"/>
+                </a:solidFill>
+                <a:latin typeface="Be Vietnam Pro" pitchFamily="34" charset="0"/>
+                <a:ea typeface="Be Vietnam Pro" pitchFamily="34" charset="-122"/>
+                <a:cs typeface="Be Vietnam Pro" pitchFamily="34" charset="-120"/>
+              </a:rPr>
+              <a:t> là</a:t>
+            </a:r>
+            <a:r>
+              <a:rPr lang="en-US" sz="2550" dirty="0" spc="-5" kern="0">
+                <a:solidFill>
+                  <a:srgbClr val="14161C"/>
+                </a:solidFill>
+                <a:latin typeface="Be Vietnam Pro" pitchFamily="34" charset="0"/>
+                <a:ea typeface="Be Vietnam Pro" pitchFamily="34" charset="-122"/>
+                <a:cs typeface="Be Vietnam Pro" pitchFamily="34" charset="-120"/>
+              </a:rPr>
+              <a:t> một</a:t>
+            </a:r>
+            <a:r>
               <a:rPr lang="en-US" sz="2550" dirty="0" spc="-4" kern="0">
                 <a:solidFill>
                   <a:srgbClr val="14161C"/>
@@ -6176,73 +6249,38 @@
                 <a:ea typeface="Be Vietnam Pro" pitchFamily="34" charset="-122"/>
                 <a:cs typeface="Be Vietnam Pro" pitchFamily="34" charset="-120"/>
               </a:rPr>
-              <a:t>Biết</a:t>
-            </a:r>
-            <a:r>
-              <a:rPr lang="en-US" sz="2550" dirty="0" spc="-3" kern="0">
-                <a:solidFill>
-                  <a:srgbClr val="14161C"/>
-                </a:solidFill>
-                <a:latin typeface="Be Vietnam Pro" pitchFamily="34" charset="0"/>
-                <a:ea typeface="Be Vietnam Pro" pitchFamily="34" charset="-122"/>
-                <a:cs typeface="Be Vietnam Pro" pitchFamily="34" charset="-120"/>
-              </a:rPr>
               <a:t> việc</a:t>
             </a:r>
             <a:r>
-              <a:rPr lang="en-US" sz="2550" dirty="0" spc="0" kern="0">
-                <a:solidFill>
-                  <a:srgbClr val="14161C"/>
-                </a:solidFill>
-                <a:latin typeface="Be Vietnam Pro" pitchFamily="34" charset="0"/>
-                <a:ea typeface="Be Vietnam Pro" pitchFamily="34" charset="-122"/>
-                <a:cs typeface="Be Vietnam Pro" pitchFamily="34" charset="-120"/>
-              </a:rPr>
-              <a:t> cần</a:t>
-            </a:r>
-            <a:r>
-              <a:rPr lang="en-US" sz="2550" dirty="0" spc="-4" kern="0">
-                <a:solidFill>
-                  <a:srgbClr val="14161C"/>
-                </a:solidFill>
-                <a:latin typeface="Be Vietnam Pro" pitchFamily="34" charset="0"/>
-                <a:ea typeface="Be Vietnam Pro" pitchFamily="34" charset="-122"/>
-                <a:cs typeface="Be Vietnam Pro" pitchFamily="34" charset="-120"/>
-              </a:rPr>
-              <a:t> học</a:t>
-            </a:r>
-            <a:r>
-              <a:rPr lang="en-US" sz="2550" dirty="0" spc="0" kern="0">
-                <a:solidFill>
-                  <a:srgbClr val="14161C"/>
-                </a:solidFill>
-                <a:latin typeface="Be Vietnam Pro" pitchFamily="34" charset="0"/>
-                <a:ea typeface="Be Vietnam Pro" pitchFamily="34" charset="-122"/>
-                <a:cs typeface="Be Vietnam Pro" pitchFamily="34" charset="-120"/>
-              </a:rPr>
-              <a:t> ở mỗi</a:t>
-            </a:r>
-            <a:r>
-              <a:rPr lang="en-US" sz="2550" dirty="0" spc="6" kern="0">
-                <a:solidFill>
-                  <a:srgbClr val="14161C"/>
-                </a:solidFill>
-                <a:latin typeface="Be Vietnam Pro" pitchFamily="34" charset="0"/>
-                <a:ea typeface="Be Vietnam Pro" pitchFamily="34" charset="-122"/>
-                <a:cs typeface="Be Vietnam Pro" pitchFamily="34" charset="-120"/>
-              </a:rPr>
-              <a:t> bước</a:t>
+              <a:rPr lang="en-US" sz="2550" dirty="0" spc="-1" kern="0">
+                <a:solidFill>
+                  <a:srgbClr val="14161C"/>
+                </a:solidFill>
+                <a:latin typeface="Be Vietnam Pro" pitchFamily="34" charset="0"/>
+                <a:ea typeface="Be Vietnam Pro" pitchFamily="34" charset="-122"/>
+                <a:cs typeface="Be Vietnam Pro" pitchFamily="34" charset="-120"/>
+              </a:rPr>
+              <a:t> cụ</a:t>
+            </a:r>
+            <a:r>
+              <a:rPr lang="en-US" sz="2550" dirty="0" spc="1" kern="0">
+                <a:solidFill>
+                  <a:srgbClr val="14161C"/>
+                </a:solidFill>
+                <a:latin typeface="Be Vietnam Pro" pitchFamily="34" charset="0"/>
+                <a:ea typeface="Be Vietnam Pro" pitchFamily="34" charset="-122"/>
+                <a:cs typeface="Be Vietnam Pro" pitchFamily="34" charset="-120"/>
+              </a:rPr>
+              <a:t> thể</a:t>
             </a:r>
             <a:endParaRPr lang="en-US" sz="2550" dirty="0"/>
           </a:p>
           <a:p>
-            <a:pPr algn="l" marL="323850" indent="-231371">
+            <a:pPr algn="l" indent="0" marL="0">
               <a:lnSpc>
                 <a:spcPts val="3443"/>
               </a:lnSpc>
-              <a:buSzPct val="100000"/>
-              <a:buFont typeface="Arial"/>
-              <a:buChar char="•"/>
+              <a:buNone/>
             </a:pPr>
             <a:r>
               <a:rPr lang="en-US" sz="2550" dirty="0" spc="-4" kern="0">
@@ -6267,26 +6305,15 @@
               <a:t> đây</a:t>
             </a:r>
             <a:r>
-              <a:rPr lang="en-US" sz="2550" dirty="0" spc="1" kern="0">
-                <a:solidFill>
-                  <a:srgbClr val="14161C"/>
-                </a:solidFill>
-                <a:latin typeface="Be Vietnam Pro" pitchFamily="34" charset="0"/>
-                <a:ea typeface="Be Vietnam Pro" pitchFamily="34" charset="-122"/>
-                <a:cs typeface="Be Vietnam Pro" pitchFamily="34" charset="-120"/>
-              </a:rPr>
-              <a:t> là</a:t>
-            </a:r>
-            <a:r>
-              <a:rPr lang="en-US" sz="2550" dirty="0" spc="-1" kern="0">
-                <a:solidFill>
-                  <a:srgbClr val="14161C"/>
-                </a:solidFill>
-                <a:latin typeface="Be Vietnam Pro" pitchFamily="34" charset="0"/>
-                <a:ea typeface="Be Vietnam Pro" pitchFamily="34" charset="-122"/>
-                <a:cs typeface="Be Vietnam Pro" pitchFamily="34" charset="-120"/>
-              </a:rPr>
-              <a:t> lộ</a:t>
+              <a:rPr lang="en-US" sz="2550" dirty="0" spc="0" kern="0">
+                <a:solidFill>
+                  <a:srgbClr val="14161C"/>
+                </a:solidFill>
+                <a:latin typeface="Be Vietnam Pro" pitchFamily="34" charset="0"/>
+                <a:ea typeface="Be Vietnam Pro" pitchFamily="34" charset="-122"/>
+                <a:cs typeface="Be Vietnam Pro" pitchFamily="34" charset="-120"/>
+              </a:rPr>
+              <a:t> không phải lộ</a:t>
             </a:r>
             <a:r>
               <a:rPr lang="en-US" sz="2550" dirty="0" spc="9" kern="0">
@@ -6300,15 +6327,15 @@
               <a:t> trình</a:t>
             </a:r>
             <a:r>
-              <a:rPr lang="en-US" sz="2550" dirty="0" spc="-1" kern="0">
-                <a:solidFill>
-                  <a:srgbClr val="14161C"/>
-                </a:solidFill>
-                <a:latin typeface="Be Vietnam Pro" pitchFamily="34" charset="0"/>
-                <a:ea typeface="Be Vietnam Pro" pitchFamily="34" charset="-122"/>
-                <a:cs typeface="Be Vietnam Pro" pitchFamily="34" charset="-120"/>
-              </a:rPr>
-              <a:t> theo</a:t>
+              <a:rPr lang="en-US" sz="2550" dirty="0" spc="-14" kern="0">
+                <a:solidFill>
+                  <a:srgbClr val="14161C"/>
+                </a:solidFill>
+                <a:latin typeface="Be Vietnam Pro" pitchFamily="34" charset="0"/>
+                <a:ea typeface="Be Vietnam Pro" pitchFamily="34" charset="-122"/>
+                <a:cs typeface="Be Vietnam Pro" pitchFamily="34" charset="-120"/>
+              </a:rPr>
+              <a:t> bắt</a:t>
             </a:r>
             <a:r>
               <a:rPr lang="en-US" sz="2550" dirty="0" spc="-2" kern="0">
@@ -6319,29 +6346,7 @@
                 <a:ea typeface="Be Vietnam Pro" pitchFamily="34" charset="-122"/>
                 <a:cs typeface="Be Vietnam Pro" pitchFamily="34" charset="-120"/>
               </a:rPr>
-              <a:t> ý</a:t>
-            </a:r>
-            <a:r>
-              <a:rPr lang="en-US" sz="2550" dirty="0" spc="-11" kern="0">
-                <a:solidFill>
-                  <a:srgbClr val="14161C"/>
-                </a:solidFill>
-                <a:latin typeface="Be Vietnam Pro" pitchFamily="34" charset="0"/>
-                <a:ea typeface="Be Vietnam Pro" pitchFamily="34" charset="-122"/>
-                <a:cs typeface="Be Vietnam Pro" pitchFamily="34" charset="-120"/>
-              </a:rPr>
-              <a:t> tác</a:t>
-            </a:r>
-            <a:r>
-              <a:rPr lang="en-US" sz="2550" dirty="0" spc="0" kern="0">
-                <a:solidFill>
-                  <a:srgbClr val="14161C"/>
-                </a:solidFill>
-                <a:latin typeface="Be Vietnam Pro" pitchFamily="34" charset="0"/>
-                <a:ea typeface="Be Vietnam Pro" pitchFamily="34" charset="-122"/>
-                <a:cs typeface="Be Vietnam Pro" pitchFamily="34" charset="-120"/>
-              </a:rPr>
-              <a:t> giả</a:t>
+              <a:t> buộc</a:t>
             </a:r>
             <a:endParaRPr lang="en-US" sz="2550" dirty="0"/>
           </a:p>
@@ -6432,7 +6437,7 @@
               <a:t> TRONG</a:t>
             </a:r>
             <a:r>
-              <a:rPr lang="en-US" sz="1800" b="1" spc="225" kern="0" dirty="0">
+              <a:rPr lang="en-US" sz="1800" b="1" spc="220" kern="0" dirty="0">
                 <a:solidFill>
                   <a:srgbClr val="6B6A66"/>
                 </a:solidFill>
@@ -6440,7 +6445,7 @@
                 <a:ea typeface="Be Vietnam Pro" pitchFamily="34" charset="-122"/>
                 <a:cs typeface="Be Vietnam Pro" pitchFamily="34" charset="-120"/>
               </a:rPr>
-              <a:t> NGUỒN</a:t>
+              <a:t> BÀI</a:t>
             </a:r>
             <a:endParaRPr lang="en-US" sz="1800" dirty="0"/>
           </a:p>
@@ -6497,7 +6502,7 @@
               <a:t> việc</a:t>
             </a:r>
             <a:r>
-              <a:rPr lang="en-US" sz="2400" b="1" dirty="0" spc="-1" kern="0">
+              <a:rPr lang="en-US" sz="2400" b="1" dirty="0" spc="-9" kern="0">
                 <a:solidFill>
                   <a:srgbClr val="F3EEE3"/>
                 </a:solidFill>
@@ -6505,10 +6510,10 @@
                 <a:ea typeface="Be Vietnam Pro" pitchFamily="34" charset="-122"/>
                 <a:cs typeface="Be Vietnam Pro" pitchFamily="34" charset="-120"/>
               </a:rPr>
-              <a:t> cần</a:t>
-            </a:r>
-            <a:r>
-              <a:rPr lang="en-US" sz="2400" b="1" dirty="0" spc="-7" kern="0">
+              <a:t> với</a:t>
+            </a:r>
+            <a:r>
+              <a:rPr lang="en-US" sz="2400" b="1" dirty="0" spc="0" kern="0">
                 <a:solidFill>
                   <a:srgbClr val="F3EEE3"/>
                 </a:solidFill>
@@ -6516,7 +6521,18 @@
                 <a:ea typeface="Be Vietnam Pro" pitchFamily="34" charset="-122"/>
                 <a:cs typeface="Be Vietnam Pro" pitchFamily="34" charset="-120"/>
               </a:rPr>
-              <a:t> học</a:t>
+              <a:t> dịch</a:t>
+            </a:r>
+            <a:r>
+              <a:rPr lang="en-US" sz="2400" b="1" dirty="0" spc="3" kern="0">
+                <a:solidFill>
+                  <a:srgbClr val="F3EEE3"/>
+                </a:solidFill>
+                <a:latin typeface="Be Vietnam Pro" pitchFamily="34" charset="0"/>
+                <a:ea typeface="Be Vietnam Pro" pitchFamily="34" charset="-122"/>
+                <a:cs typeface="Be Vietnam Pro" pitchFamily="34" charset="-120"/>
+              </a:rPr>
+              <a:t> vụ</a:t>
             </a:r>
             <a:endParaRPr lang="en-US" sz="2400" dirty="0"/>
           </a:p>
@@ -6590,59 +6606,48 @@
               <a:buNone/>
             </a:pPr>
             <a:r>
-              <a:rPr lang="en-US" sz="2400" b="1" dirty="0" spc="-45" kern="0">
-                <a:solidFill>
-                  <a:srgbClr val="14161C"/>
-                </a:solidFill>
-                <a:latin typeface="Be Vietnam Pro" pitchFamily="34" charset="0"/>
-                <a:ea typeface="Be Vietnam Pro" pitchFamily="34" charset="-122"/>
-                <a:cs typeface="Be Vietnam Pro" pitchFamily="34" charset="-120"/>
-              </a:rPr>
-              <a:t>Vài</a:t>
-            </a:r>
-            <a:r>
-              <a:rPr lang="en-US" sz="2400" b="1" dirty="0" spc="1" kern="0">
-                <a:solidFill>
-                  <a:srgbClr val="14161C"/>
-                </a:solidFill>
-                <a:latin typeface="Be Vietnam Pro" pitchFamily="34" charset="0"/>
-                <a:ea typeface="Be Vietnam Pro" pitchFamily="34" charset="-122"/>
-                <a:cs typeface="Be Vietnam Pro" pitchFamily="34" charset="-120"/>
-              </a:rPr>
-              <a:t> ví</a:t>
-            </a:r>
-            <a:r>
-              <a:rPr lang="en-US" sz="2400" b="1" dirty="0" spc="3" kern="0">
-                <a:solidFill>
-                  <a:srgbClr val="14161C"/>
-                </a:solidFill>
-                <a:latin typeface="Be Vietnam Pro" pitchFamily="34" charset="0"/>
-                <a:ea typeface="Be Vietnam Pro" pitchFamily="34" charset="-122"/>
-                <a:cs typeface="Be Vietnam Pro" pitchFamily="34" charset="-120"/>
-              </a:rPr>
-              <a:t> dụ</a:t>
-            </a:r>
-            <a:r>
-              <a:rPr lang="en-US" sz="2400" b="1" dirty="0" spc="-9" kern="0">
-                <a:solidFill>
-                  <a:srgbClr val="14161C"/>
-                </a:solidFill>
-                <a:latin typeface="Be Vietnam Pro" pitchFamily="34" charset="0"/>
-                <a:ea typeface="Be Vietnam Pro" pitchFamily="34" charset="-122"/>
-                <a:cs typeface="Be Vietnam Pro" pitchFamily="34" charset="-120"/>
-              </a:rPr>
-              <a:t> công</a:t>
-            </a:r>
-            <a:r>
-              <a:rPr lang="en-US" sz="2400" b="1" dirty="0" spc="1" kern="0">
-                <a:solidFill>
-                  <a:srgbClr val="14161C"/>
-                </a:solidFill>
-                <a:latin typeface="Be Vietnam Pro" pitchFamily="34" charset="0"/>
-                <a:ea typeface="Be Vietnam Pro" pitchFamily="34" charset="-122"/>
-                <a:cs typeface="Be Vietnam Pro" pitchFamily="34" charset="-120"/>
-              </a:rPr>
-              <a:t> cụ</a:t>
+              <a:rPr lang="en-US" sz="2400" b="1" dirty="0" spc="-80" kern="0">
+                <a:solidFill>
+                  <a:srgbClr val="14161C"/>
+                </a:solidFill>
+                <a:latin typeface="Be Vietnam Pro" pitchFamily="34" charset="0"/>
+                <a:ea typeface="Be Vietnam Pro" pitchFamily="34" charset="-122"/>
+                <a:cs typeface="Be Vietnam Pro" pitchFamily="34" charset="-120"/>
+              </a:rPr>
+              <a:t>Tài</a:t>
+            </a:r>
+            <a:r>
+              <a:rPr lang="en-US" sz="2400" b="1" dirty="0" spc="0" kern="0">
+                <a:solidFill>
+                  <a:srgbClr val="14161C"/>
+                </a:solidFill>
+                <a:latin typeface="Be Vietnam Pro" pitchFamily="34" charset="0"/>
+                <a:ea typeface="Be Vietnam Pro" pitchFamily="34" charset="-122"/>
+                <a:cs typeface="Be Vietnam Pro" pitchFamily="34" charset="-120"/>
+              </a:rPr>
+              <a:t> liệu</a:t>
+            </a:r>
+            <a:r>
+              <a:rPr lang="en-US" sz="2400" b="1" dirty="0" spc="9" kern="0">
+                <a:solidFill>
+                  <a:srgbClr val="14161C"/>
+                </a:solidFill>
+                <a:latin typeface="Be Vietnam Pro" pitchFamily="34" charset="0"/>
+                <a:ea typeface="Be Vietnam Pro" pitchFamily="34" charset="-122"/>
+                <a:cs typeface="Be Vietnam Pro" pitchFamily="34" charset="-120"/>
+              </a:rPr>
+              <a:t> đã</a:t>
+            </a:r>
+            <a:r>
+              <a:rPr lang="en-US" sz="2400" b="1" dirty="0" spc="4" kern="0">
+                <a:solidFill>
+                  <a:srgbClr val="14161C"/>
+                </a:solidFill>
+                <a:latin typeface="Be Vietnam Pro" pitchFamily="34" charset="0"/>
+                <a:ea typeface="Be Vietnam Pro" pitchFamily="34" charset="-122"/>
+                <a:cs typeface="Be Vietnam Pro" pitchFamily="34" charset="-120"/>
+              </a:rPr>
+              <a:t> đọc</a:t>
             </a:r>
             <a:endParaRPr lang="en-US" sz="2400" dirty="0"/>
           </a:p>
@@ -8164,7 +8169,7 @@
               <a:t> tiên</a:t>
             </a:r>
             <a:r>
-              <a:rPr lang="en-US" sz="2850" dirty="0" spc="1" kern="0">
+              <a:rPr lang="en-US" sz="2850" dirty="0" spc="-12" kern="0">
                 <a:solidFill>
                   <a:srgbClr val="F3EEE3"/>
                 </a:solidFill>
@@ -8172,7 +8177,29 @@
                 <a:ea typeface="Be Vietnam Pro" pitchFamily="34" charset="-122"/>
                 <a:cs typeface="Be Vietnam Pro" pitchFamily="34" charset="-120"/>
               </a:rPr>
-              <a:t> của lộ</a:t>
+              <a:t> với</a:t>
+            </a:r>
+            <a:r>
+              <a:rPr lang="en-US" sz="2850" dirty="0" spc="-1" kern="0">
+                <a:solidFill>
+                  <a:srgbClr val="F3EEE3"/>
+                </a:solidFill>
+                <a:latin typeface="Be Vietnam Pro" pitchFamily="34" charset="0"/>
+                <a:ea typeface="Be Vietnam Pro" pitchFamily="34" charset="-122"/>
+                <a:cs typeface="Be Vietnam Pro" pitchFamily="34" charset="-120"/>
+              </a:rPr>
+              <a:t> dịch</a:t>
+            </a:r>
+            <a:r>
+              <a:rPr lang="en-US" sz="2850" dirty="0" spc="2" kern="0">
+                <a:solidFill>
+                  <a:srgbClr val="F3EEE3"/>
+                </a:solidFill>
+                <a:latin typeface="Be Vietnam Pro" pitchFamily="34" charset="0"/>
+                <a:ea typeface="Be Vietnam Pro" pitchFamily="34" charset="-122"/>
+                <a:cs typeface="Be Vietnam Pro" pitchFamily="34" charset="-120"/>
+              </a:rPr>
+              <a:t> vụ</a:t>
             </a:r>
             <a:r>
               <a:rPr lang="en-US" sz="2850" dirty="0" spc="8" kern="0">
@@ -8183,7 +8210,18 @@
                 <a:ea typeface="Be Vietnam Pro" pitchFamily="34" charset="-122"/>
                 <a:cs typeface="Be Vietnam Pro" pitchFamily="34" charset="-120"/>
               </a:rPr>
-              <a:t> trình.</a:t>
+              <a:t> mượn</a:t>
+            </a:r>
+            <a:r>
+              <a:rPr lang="en-US" sz="2850" dirty="0" spc="-5" kern="0">
+                <a:solidFill>
+                  <a:srgbClr val="F3EEE3"/>
+                </a:solidFill>
+                <a:latin typeface="Be Vietnam Pro" pitchFamily="34" charset="0"/>
+                <a:ea typeface="Be Vietnam Pro" pitchFamily="34" charset="-122"/>
+                <a:cs typeface="Be Vietnam Pro" pitchFamily="34" charset="-120"/>
+              </a:rPr>
+              <a:t> sách.</a:t>
             </a:r>
             <a:endParaRPr lang="en-US" sz="2850" dirty="0"/>
           </a:p>
@@ -8781,7 +8819,7 @@
               <a:buNone/>
             </a:pPr>
             <a:r>
-              <a:rPr lang="en-US" sz="2250" dirty="0" spc="-13" kern="0">
+              <a:rPr lang="en-US" sz="2250" dirty="0" spc="-2" kern="0">
                 <a:solidFill>
                   <a:srgbClr val="C4C8D6"/>
                 </a:solidFill>
@@ -8789,10 +8827,10 @@
                 <a:ea typeface="Be Vietnam Pro" pitchFamily="34" charset="-122"/>
                 <a:cs typeface="Be Vietnam Pro" pitchFamily="34" charset="-120"/>
               </a:rPr>
-              <a:t>Phát</a:t>
-            </a:r>
-            <a:r>
-              <a:rPr lang="en-US" sz="2250" dirty="0" spc="6" kern="0">
+              <a:t>Mỗi</a:t>
+            </a:r>
+            <a:r>
+              <a:rPr lang="en-US" sz="2250" dirty="0" spc="-7" kern="0">
                 <a:solidFill>
                   <a:srgbClr val="C4C8D6"/>
                 </a:solidFill>
@@ -8800,10 +8838,10 @@
                 <a:ea typeface="Be Vietnam Pro" pitchFamily="34" charset="-122"/>
                 <a:cs typeface="Be Vietnam Pro" pitchFamily="34" charset="-120"/>
               </a:rPr>
-              <a:t> triển</a:t>
-            </a:r>
-            <a:r>
-              <a:rPr lang="en-US" sz="2250" dirty="0" spc="1" kern="0">
+              <a:t> thay</a:t>
+            </a:r>
+            <a:r>
+              <a:rPr lang="en-US" sz="2250" dirty="0" spc="12" kern="0">
                 <a:solidFill>
                   <a:srgbClr val="C4C8D6"/>
                 </a:solidFill>
@@ -8811,10 +8849,10 @@
                 <a:ea typeface="Be Vietnam Pro" pitchFamily="34" charset="-122"/>
                 <a:cs typeface="Be Vietnam Pro" pitchFamily="34" charset="-120"/>
               </a:rPr>
-              <a:t> phần</a:t>
-            </a:r>
-            <a:r>
-              <a:rPr lang="en-US" sz="2250" dirty="0" spc="-2" kern="0">
+              <a:t> đổi</a:t>
+            </a:r>
+            <a:r>
+              <a:rPr lang="en-US" sz="2250" dirty="0" spc="5" kern="0">
                 <a:solidFill>
                   <a:srgbClr val="C4C8D6"/>
                 </a:solidFill>
@@ -8822,10 +8860,10 @@
                 <a:ea typeface="Be Vietnam Pro" pitchFamily="34" charset="-122"/>
                 <a:cs typeface="Be Vietnam Pro" pitchFamily="34" charset="-120"/>
               </a:rPr>
-              <a:t> mềm</a:t>
-            </a:r>
-            <a:r>
-              <a:rPr lang="en-US" sz="2250" dirty="0" spc="0" kern="0">
+              <a:t> có</a:t>
+            </a:r>
+            <a:r>
+              <a:rPr lang="en-US" sz="2250" dirty="0" spc="-4" kern="0">
                 <a:solidFill>
                   <a:srgbClr val="C4C8D6"/>
                 </a:solidFill>
@@ -8833,10 +8871,10 @@
                 <a:ea typeface="Be Vietnam Pro" pitchFamily="34" charset="-122"/>
                 <a:cs typeface="Be Vietnam Pro" pitchFamily="34" charset="-120"/>
               </a:rPr>
-              <a:t> là</a:t>
-            </a:r>
-            <a:r>
-              <a:rPr lang="en-US" sz="2250" dirty="0" spc="-13" kern="0">
+              <a:t> một</a:t>
+            </a:r>
+            <a:r>
+              <a:rPr lang="en-US" sz="2250" dirty="0" spc="-1" kern="0">
                 <a:solidFill>
                   <a:srgbClr val="C4C8D6"/>
                 </a:solidFill>
@@ -8844,40 +8882,7 @@
                 <a:ea typeface="Be Vietnam Pro" pitchFamily="34" charset="-122"/>
                 <a:cs typeface="Be Vietnam Pro" pitchFamily="34" charset="-120"/>
               </a:rPr>
-              <a:t> hoạt</a:t>
-            </a:r>
-            <a:r>
-              <a:rPr lang="en-US" sz="2250" dirty="0" spc="11" kern="0">
-                <a:solidFill>
-                  <a:srgbClr val="C4C8D6"/>
-                </a:solidFill>
-                <a:latin typeface="Be Vietnam Pro" pitchFamily="34" charset="0"/>
-                <a:ea typeface="Be Vietnam Pro" pitchFamily="34" charset="-122"/>
-                <a:cs typeface="Be Vietnam Pro" pitchFamily="34" charset="-120"/>
-              </a:rPr>
-              <a:t> động</a:t>
-            </a:r>
-            <a:r>
-              <a:rPr lang="en-US" sz="2250" dirty="0" spc="-24" kern="0">
-                <a:solidFill>
-                  <a:srgbClr val="C4C8D6"/>
-                </a:solidFill>
-                <a:latin typeface="Be Vietnam Pro" pitchFamily="34" charset="0"/>
-                <a:ea typeface="Be Vietnam Pro" pitchFamily="34" charset="-122"/>
-                <a:cs typeface="Be Vietnam Pro" pitchFamily="34" charset="-120"/>
-              </a:rPr>
-              <a:t> xã</a:t>
-            </a:r>
-            <a:r>
-              <a:rPr lang="en-US" sz="2250" dirty="0" spc="2" kern="0">
-                <a:solidFill>
-                  <a:srgbClr val="C4C8D6"/>
-                </a:solidFill>
-                <a:latin typeface="Be Vietnam Pro" pitchFamily="34" charset="0"/>
-                <a:ea typeface="Be Vietnam Pro" pitchFamily="34" charset="-122"/>
-                <a:cs typeface="Be Vietnam Pro" pitchFamily="34" charset="-120"/>
-              </a:rPr>
-              <a:t> hội.</a:t>
+              <a:t> phiếu việc.</a:t>
             </a:r>
             <a:endParaRPr lang="en-US" sz="2250" dirty="0"/>
           </a:p>
@@ -8908,7 +8913,7 @@
               <a:buNone/>
             </a:pPr>
             <a:r>
-              <a:rPr lang="en-US" sz="2100" b="1" dirty="0" spc="-9" kern="0">
+              <a:rPr lang="en-US" sz="2100" b="1" dirty="0" spc="-14" kern="0">
                 <a:solidFill>
                   <a:srgbClr val="7C93FF"/>
                 </a:solidFill>
@@ -8916,10 +8921,10 @@
                 <a:ea typeface="Be Vietnam Pro" pitchFamily="34" charset="-122"/>
                 <a:cs typeface="Be Vietnam Pro" pitchFamily="34" charset="-120"/>
               </a:rPr>
-              <a:t>Jira,</a:t>
-            </a:r>
-            <a:r>
-              <a:rPr lang="en-US" sz="2100" b="1" dirty="0" spc="-5" kern="0">
+              <a:t>Một</a:t>
+            </a:r>
+            <a:r>
+              <a:rPr lang="en-US" sz="2100" b="1" dirty="0" spc="7" kern="0">
                 <a:solidFill>
                   <a:srgbClr val="7C93FF"/>
                 </a:solidFill>
@@ -8927,10 +8932,10 @@
                 <a:ea typeface="Be Vietnam Pro" pitchFamily="34" charset="-122"/>
                 <a:cs typeface="Be Vietnam Pro" pitchFamily="34" charset="-120"/>
               </a:rPr>
-              <a:t> Confluence,</a:t>
-            </a:r>
-            <a:r>
-              <a:rPr lang="en-US" sz="2100" b="1" dirty="0" spc="-2" kern="0">
+              <a:t> người</a:t>
+            </a:r>
+            <a:r>
+              <a:rPr lang="en-US" sz="2100" b="1" dirty="0" spc="2" kern="0">
                 <a:solidFill>
                   <a:srgbClr val="7C93FF"/>
                 </a:solidFill>
@@ -8938,7 +8943,29 @@
                 <a:ea typeface="Be Vietnam Pro" pitchFamily="34" charset="-122"/>
                 <a:cs typeface="Be Vietnam Pro" pitchFamily="34" charset="-120"/>
               </a:rPr>
-              <a:t> Slack,</a:t>
+              <a:t> nhận,</a:t>
+            </a:r>
+            <a:r>
+              <a:rPr lang="en-US" sz="2100" b="1" dirty="0" spc="-14" kern="0">
+                <a:solidFill>
+                  <a:srgbClr val="7C93FF"/>
+                </a:solidFill>
+                <a:latin typeface="Be Vietnam Pro" pitchFamily="34" charset="0"/>
+                <a:ea typeface="Be Vietnam Pro" pitchFamily="34" charset="-122"/>
+                <a:cs typeface="Be Vietnam Pro" pitchFamily="34" charset="-120"/>
+              </a:rPr>
+              <a:t> một</a:t>
+            </a:r>
+            <a:r>
+              <a:rPr lang="en-US" sz="2100" b="1" dirty="0" spc="2" kern="0">
+                <a:solidFill>
+                  <a:srgbClr val="7C93FF"/>
+                </a:solidFill>
+                <a:latin typeface="Be Vietnam Pro" pitchFamily="34" charset="0"/>
+                <a:ea typeface="Be Vietnam Pro" pitchFamily="34" charset="-122"/>
+                <a:cs typeface="Be Vietnam Pro" pitchFamily="34" charset="-120"/>
+              </a:rPr>
+              <a:t> nơi</a:t>
             </a:r>
             <a:r>
               <a:rPr lang="en-US" sz="2100" b="1" dirty="0" spc="-1" kern="0">
@@ -8949,10 +8976,10 @@
                 <a:ea typeface="Be Vietnam Pro" pitchFamily="34" charset="-122"/>
                 <a:cs typeface="Be Vietnam Pro" pitchFamily="34" charset="-120"/>
               </a:rPr>
-              <a:t> MS</a:t>
-            </a:r>
-            <a:r>
-              <a:rPr lang="en-US" sz="2100" b="1" dirty="0" spc="-33" kern="0">
+              <a:t> thảo</a:t>
+            </a:r>
+            <a:r>
+              <a:rPr lang="en-US" sz="2100" b="1" dirty="0" spc="2" kern="0">
                 <a:solidFill>
                   <a:srgbClr val="7C93FF"/>
                 </a:solidFill>
@@ -8960,18 +8987,7 @@
                 <a:ea typeface="Be Vietnam Pro" pitchFamily="34" charset="-122"/>
                 <a:cs typeface="Be Vietnam Pro" pitchFamily="34" charset="-120"/>
               </a:rPr>
-              <a:t> Teams,</a:t>
-            </a:r>
-            <a:r>
-              <a:rPr lang="en-US" sz="2100" b="1" dirty="0" spc="-8" kern="0">
-                <a:solidFill>
-                  <a:srgbClr val="7C93FF"/>
-                </a:solidFill>
-                <a:latin typeface="Be Vietnam Pro" pitchFamily="34" charset="0"/>
-                <a:ea typeface="Be Vietnam Pro" pitchFamily="34" charset="-122"/>
-                <a:cs typeface="Be Vietnam Pro" pitchFamily="34" charset="-120"/>
-              </a:rPr>
-              <a:t> Zoom</a:t>
+              <a:t> luận</a:t>
             </a:r>
             <a:endParaRPr lang="en-US" sz="2100" dirty="0"/>
           </a:p>
@@ -9142,6 +9158,17 @@
               <a:buNone/>
             </a:pPr>
             <a:r>
+              <a:rPr lang="en-US" sz="2250" dirty="0" spc="-8" kern="0">
+                <a:solidFill>
+                  <a:srgbClr val="C4C8D6"/>
+                </a:solidFill>
+                <a:latin typeface="Be Vietnam Pro" pitchFamily="34" charset="0"/>
+                <a:ea typeface="Be Vietnam Pro" pitchFamily="34" charset="-122"/>
+                <a:cs typeface="Be Vietnam Pro" pitchFamily="34" charset="-120"/>
+              </a:rPr>
+              <a:t>Viết</a:t>
+            </a:r>
+            <a:r>
               <a:rPr lang="en-US" sz="2250" dirty="0" spc="-1" kern="0">
                 <a:solidFill>
                   <a:srgbClr val="C4C8D6"/>
@@ -9150,10 +9177,10 @@
                 <a:ea typeface="Be Vietnam Pro" pitchFamily="34" charset="-122"/>
                 <a:cs typeface="Be Vietnam Pro" pitchFamily="34" charset="-120"/>
               </a:rPr>
-              <a:t>Thành thạo</a:t>
-            </a:r>
-            <a:r>
-              <a:rPr lang="en-US" sz="2250" dirty="0" spc="-4" kern="0">
+              <a:t> hàm</a:t>
+            </a:r>
+            <a:r>
+              <a:rPr lang="en-US" sz="2250" dirty="0" spc="0" kern="0">
                 <a:solidFill>
                   <a:srgbClr val="C4C8D6"/>
                 </a:solidFill>
@@ -9161,10 +9188,10 @@
                 <a:ea typeface="Be Vietnam Pro" pitchFamily="34" charset="-122"/>
                 <a:cs typeface="Be Vietnam Pro" pitchFamily="34" charset="-120"/>
               </a:rPr>
-              <a:t> một</a:t>
-            </a:r>
-            <a:r>
-              <a:rPr lang="en-US" sz="2250" dirty="0" spc="-3" kern="0">
+              <a:t> tính</a:t>
+            </a:r>
+            <a:r>
+              <a:rPr lang="en-US" sz="2250" dirty="0" spc="2" kern="0">
                 <a:solidFill>
                   <a:srgbClr val="C4C8D6"/>
                 </a:solidFill>
@@ -9172,7 +9199,29 @@
                 <a:ea typeface="Be Vietnam Pro" pitchFamily="34" charset="-122"/>
                 <a:cs typeface="Be Vietnam Pro" pitchFamily="34" charset="-120"/>
               </a:rPr>
-              <a:t> hoặc</a:t>
+              <a:t> phí</a:t>
+            </a:r>
+            <a:r>
+              <a:rPr lang="en-US" sz="2250" dirty="0" spc="-24" kern="0">
+                <a:solidFill>
+                  <a:srgbClr val="C4C8D6"/>
+                </a:solidFill>
+                <a:latin typeface="Be Vietnam Pro" pitchFamily="34" charset="0"/>
+                <a:ea typeface="Be Vietnam Pro" pitchFamily="34" charset="-122"/>
+                <a:cs typeface="Be Vietnam Pro" pitchFamily="34" charset="-120"/>
+              </a:rPr>
+              <a:t> trả</a:t>
+            </a:r>
+            <a:r>
+              <a:rPr lang="en-US" sz="2250" dirty="0" spc="1" kern="0">
+                <a:solidFill>
+                  <a:srgbClr val="C4C8D6"/>
+                </a:solidFill>
+                <a:latin typeface="Be Vietnam Pro" pitchFamily="34" charset="0"/>
+                <a:ea typeface="Be Vietnam Pro" pitchFamily="34" charset="-122"/>
+                <a:cs typeface="Be Vietnam Pro" pitchFamily="34" charset="-120"/>
+              </a:rPr>
+              <a:t> muộn</a:t>
             </a:r>
             <a:r>
               <a:rPr lang="en-US" sz="2250" dirty="0" spc="-2" kern="0">
@@ -9183,10 +9232,10 @@
                 <a:ea typeface="Be Vietnam Pro" pitchFamily="34" charset="-122"/>
                 <a:cs typeface="Be Vietnam Pro" pitchFamily="34" charset="-120"/>
               </a:rPr>
-              <a:t> hai</a:t>
-            </a:r>
-            <a:r>
-              <a:rPr lang="en-US" sz="2250" dirty="0" spc="-7" kern="0">
+              <a:t> bằng</a:t>
+            </a:r>
+            <a:r>
+              <a:rPr lang="en-US" sz="2250" dirty="0" spc="6" kern="0">
                 <a:solidFill>
                   <a:srgbClr val="C4C8D6"/>
                 </a:solidFill>
@@ -9194,18 +9243,7 @@
                 <a:ea typeface="Be Vietnam Pro" pitchFamily="34" charset="-122"/>
                 <a:cs typeface="Be Vietnam Pro" pitchFamily="34" charset="-120"/>
               </a:rPr>
-              <a:t> ngôn</a:t>
-            </a:r>
-            <a:r>
-              <a:rPr lang="en-US" sz="2250" dirty="0" spc="3" kern="0">
-                <a:solidFill>
-                  <a:srgbClr val="C4C8D6"/>
-                </a:solidFill>
-                <a:latin typeface="Be Vietnam Pro" pitchFamily="34" charset="0"/>
-                <a:ea typeface="Be Vietnam Pro" pitchFamily="34" charset="-122"/>
-                <a:cs typeface="Be Vietnam Pro" pitchFamily="34" charset="-120"/>
-              </a:rPr>
-              <a:t> ngữ.</a:t>
+              <a:t> Python.</a:t>
             </a:r>
             <a:endParaRPr lang="en-US" sz="2250" dirty="0"/>
           </a:p>
@@ -9236,7 +9274,7 @@
               <a:buNone/>
             </a:pPr>
             <a:r>
-              <a:rPr lang="en-US" sz="2100" b="1" dirty="0" spc="-21" kern="0">
+              <a:rPr lang="en-US" sz="2100" b="1" dirty="0" spc="-7" kern="0">
                 <a:solidFill>
                   <a:srgbClr val="7C93FF"/>
                 </a:solidFill>
@@ -9244,10 +9282,10 @@
                 <a:ea typeface="Be Vietnam Pro" pitchFamily="34" charset="-122"/>
                 <a:cs typeface="Be Vietnam Pro" pitchFamily="34" charset="-120"/>
               </a:rPr>
-              <a:t>Java,</a:t>
-            </a:r>
-            <a:r>
-              <a:rPr lang="en-US" sz="2100" b="1" dirty="0" spc="1" kern="0">
+              <a:t>Viết</a:t>
+            </a:r>
+            <a:r>
+              <a:rPr lang="en-US" sz="2100" b="1" dirty="0" spc="-2" kern="0">
                 <a:solidFill>
                   <a:srgbClr val="7C93FF"/>
                 </a:solidFill>
@@ -9255,10 +9293,10 @@
                 <a:ea typeface="Be Vietnam Pro" pitchFamily="34" charset="-122"/>
                 <a:cs typeface="Be Vietnam Pro" pitchFamily="34" charset="-120"/>
               </a:rPr>
-              <a:t> Python,</a:t>
-            </a:r>
-            <a:r>
-              <a:rPr lang="en-US" sz="2100" b="1" dirty="0" spc="-9" kern="0">
+              <a:t> lại</a:t>
+            </a:r>
+            <a:r>
+              <a:rPr lang="en-US" sz="2100" b="1" dirty="0" spc="18" kern="0">
                 <a:solidFill>
                   <a:srgbClr val="7C93FF"/>
                 </a:solidFill>
@@ -9266,7 +9304,40 @@
                 <a:ea typeface="Be Vietnam Pro" pitchFamily="34" charset="-122"/>
                 <a:cs typeface="Be Vietnam Pro" pitchFamily="34" charset="-120"/>
               </a:rPr>
-              <a:t> JavaScript,</a:t>
+              <a:t> từng</a:t>
+            </a:r>
+            <a:r>
+              <a:rPr lang="en-US" sz="2100" b="1" dirty="0" spc="8" kern="0">
+                <a:solidFill>
+                  <a:srgbClr val="7C93FF"/>
+                </a:solidFill>
+                <a:latin typeface="Be Vietnam Pro" pitchFamily="34" charset="0"/>
+                <a:ea typeface="Be Vietnam Pro" pitchFamily="34" charset="-122"/>
+                <a:cs typeface="Be Vietnam Pro" pitchFamily="34" charset="-120"/>
+              </a:rPr>
+              <a:t> bước</a:t>
+            </a:r>
+            <a:r>
+              <a:rPr lang="en-US" sz="2100" b="1" dirty="0" spc="-6" kern="0">
+                <a:solidFill>
+                  <a:srgbClr val="7C93FF"/>
+                </a:solidFill>
+                <a:latin typeface="Be Vietnam Pro" pitchFamily="34" charset="0"/>
+                <a:ea typeface="Be Vietnam Pro" pitchFamily="34" charset="-122"/>
+                <a:cs typeface="Be Vietnam Pro" pitchFamily="34" charset="-120"/>
+              </a:rPr>
+              <a:t> ở</a:t>
+            </a:r>
+            <a:r>
+              <a:rPr lang="en-US" sz="2100" b="1" dirty="0" spc="-1" kern="0">
+                <a:solidFill>
+                  <a:srgbClr val="7C93FF"/>
+                </a:solidFill>
+                <a:latin typeface="Be Vietnam Pro" pitchFamily="34" charset="0"/>
+                <a:ea typeface="Be Vietnam Pro" pitchFamily="34" charset="-122"/>
+                <a:cs typeface="Be Vietnam Pro" pitchFamily="34" charset="-120"/>
+              </a:rPr>
+              <a:t> bài</a:t>
             </a:r>
             <a:r>
               <a:rPr lang="en-US" sz="2100" b="1" dirty="0" spc="-2" kern="0">
@@ -9277,18 +9348,7 @@
                 <a:ea typeface="Be Vietnam Pro" pitchFamily="34" charset="-122"/>
                 <a:cs typeface="Be Vietnam Pro" pitchFamily="34" charset="-120"/>
               </a:rPr>
-              <a:t> C#,</a:t>
-            </a:r>
-            <a:r>
-              <a:rPr lang="en-US" sz="2100" b="1" dirty="0" spc="-4" kern="0">
-                <a:solidFill>
-                  <a:srgbClr val="7C93FF"/>
-                </a:solidFill>
-                <a:latin typeface="Be Vietnam Pro" pitchFamily="34" charset="0"/>
-                <a:ea typeface="Be Vietnam Pro" pitchFamily="34" charset="-122"/>
-                <a:cs typeface="Be Vietnam Pro" pitchFamily="34" charset="-120"/>
-              </a:rPr>
-              <a:t> Go</a:t>
+              <a:t> 28</a:t>
             </a:r>
             <a:endParaRPr lang="en-US" sz="2100" dirty="0"/>
           </a:p>
@@ -9448,7 +9508,7 @@
               <a:buNone/>
             </a:pPr>
             <a:r>
-              <a:rPr lang="en-US" sz="2250" dirty="0" spc="-2" kern="0">
+              <a:rPr lang="en-US" sz="2250" dirty="0" spc="-17" kern="0">
                 <a:solidFill>
                   <a:srgbClr val="C4C8D6"/>
                 </a:solidFill>
@@ -9456,7 +9516,51 @@
                 <a:ea typeface="Be Vietnam Pro" pitchFamily="34" charset="-122"/>
                 <a:cs typeface="Be Vietnam Pro" pitchFamily="34" charset="-120"/>
               </a:rPr>
-              <a:t>Học</a:t>
+              <a:t>Đặt</a:t>
+            </a:r>
+            <a:r>
+              <a:rPr lang="en-US" sz="2250" dirty="0" spc="-11" kern="0">
+                <a:solidFill>
+                  <a:srgbClr val="C4C8D6"/>
+                </a:solidFill>
+                <a:latin typeface="Be Vietnam Pro" pitchFamily="34" charset="0"/>
+                <a:ea typeface="Be Vietnam Pro" pitchFamily="34" charset="-122"/>
+                <a:cs typeface="Be Vietnam Pro" pitchFamily="34" charset="-120"/>
+              </a:rPr>
+              <a:t> tên</a:t>
+            </a:r>
+            <a:r>
+              <a:rPr lang="en-US" sz="2250" dirty="0" spc="-17" kern="0">
+                <a:solidFill>
+                  <a:srgbClr val="C4C8D6"/>
+                </a:solidFill>
+                <a:latin typeface="Be Vietnam Pro" pitchFamily="34" charset="0"/>
+                <a:ea typeface="Be Vietnam Pro" pitchFamily="34" charset="-122"/>
+                <a:cs typeface="Be Vietnam Pro" pitchFamily="34" charset="-120"/>
+              </a:rPr>
+              <a:t> và</a:t>
+            </a:r>
+            <a:r>
+              <a:rPr lang="en-US" sz="2250" dirty="0" spc="-3" kern="0">
+                <a:solidFill>
+                  <a:srgbClr val="C4C8D6"/>
+                </a:solidFill>
+                <a:latin typeface="Be Vietnam Pro" pitchFamily="34" charset="0"/>
+                <a:ea typeface="Be Vietnam Pro" pitchFamily="34" charset="-122"/>
+                <a:cs typeface="Be Vietnam Pro" pitchFamily="34" charset="-120"/>
+              </a:rPr>
+              <a:t> giao</a:t>
+            </a:r>
+            <a:r>
+              <a:rPr lang="en-US" sz="2250" dirty="0" spc="0" kern="0">
+                <a:solidFill>
+                  <a:srgbClr val="C4C8D6"/>
+                </a:solidFill>
+                <a:latin typeface="Be Vietnam Pro" pitchFamily="34" charset="0"/>
+                <a:ea typeface="Be Vietnam Pro" pitchFamily="34" charset="-122"/>
+                <a:cs typeface="Be Vietnam Pro" pitchFamily="34" charset="-120"/>
+              </a:rPr>
+              <a:t> diện</a:t>
             </a:r>
             <a:r>
               <a:rPr lang="en-US" sz="2250" dirty="0" spc="1" kern="0">
@@ -9467,10 +9571,10 @@
                 <a:ea typeface="Be Vietnam Pro" pitchFamily="34" charset="-122"/>
                 <a:cs typeface="Be Vietnam Pro" pitchFamily="34" charset="-120"/>
               </a:rPr>
-              <a:t> kỹ</a:t>
-            </a:r>
-            <a:r>
-              <a:rPr lang="en-US" sz="2250" dirty="0" spc="2" kern="0">
+              <a:t> cho</a:t>
+            </a:r>
+            <a:r>
+              <a:rPr lang="en-US" sz="2250" dirty="0" spc="-1" kern="0">
                 <a:solidFill>
                   <a:srgbClr val="C4C8D6"/>
                 </a:solidFill>
@@ -9478,10 +9582,10 @@
                 <a:ea typeface="Be Vietnam Pro" pitchFamily="34" charset="-122"/>
                 <a:cs typeface="Be Vietnam Pro" pitchFamily="34" charset="-120"/>
               </a:rPr>
-              <a:t> các</a:t>
-            </a:r>
-            <a:r>
-              <a:rPr lang="en-US" sz="2250" dirty="0" spc="1" kern="0">
+              <a:t> thao</a:t>
+            </a:r>
+            <a:r>
+              <a:rPr lang="en-US" sz="2250" dirty="0" spc="-10" kern="0">
                 <a:solidFill>
                   <a:srgbClr val="C4C8D6"/>
                 </a:solidFill>
@@ -9489,10 +9593,10 @@
                 <a:ea typeface="Be Vietnam Pro" pitchFamily="34" charset="-122"/>
                 <a:cs typeface="Be Vietnam Pro" pitchFamily="34" charset="-120"/>
               </a:rPr>
-              <a:t> cách</a:t>
-            </a:r>
-            <a:r>
-              <a:rPr lang="en-US" sz="2250" dirty="0" spc="-1" kern="0">
+              <a:t> tác</a:t>
+            </a:r>
+            <a:r>
+              <a:rPr lang="en-US" sz="2250" dirty="0" spc="7" kern="0">
                 <a:solidFill>
                   <a:srgbClr val="C4C8D6"/>
                 </a:solidFill>
@@ -9500,18 +9604,7 @@
                 <a:ea typeface="Be Vietnam Pro" pitchFamily="34" charset="-122"/>
                 <a:cs typeface="Be Vietnam Pro" pitchFamily="34" charset="-120"/>
               </a:rPr>
-              <a:t> làm</a:t>
-            </a:r>
-            <a:r>
-              <a:rPr lang="en-US" sz="2250" dirty="0" spc="4" kern="0">
-                <a:solidFill>
-                  <a:srgbClr val="C4C8D6"/>
-                </a:solidFill>
-                <a:latin typeface="Be Vietnam Pro" pitchFamily="34" charset="0"/>
-                <a:ea typeface="Be Vietnam Pro" pitchFamily="34" charset="-122"/>
-                <a:cs typeface="Be Vietnam Pro" pitchFamily="34" charset="-120"/>
-              </a:rPr>
-              <a:t> API.</a:t>
+              <a:t> mượn.</a:t>
             </a:r>
             <a:endParaRPr lang="en-US" sz="2250" dirty="0"/>
           </a:p>
@@ -9542,7 +9635,7 @@
               <a:buNone/>
             </a:pPr>
             <a:r>
-              <a:rPr lang="en-US" sz="2100" b="1" dirty="0" spc="-56" kern="0">
+              <a:rPr lang="en-US" sz="2100" b="1" dirty="0" spc="-1" kern="0">
                 <a:solidFill>
                   <a:srgbClr val="7C93FF"/>
                 </a:solidFill>
@@ -9550,10 +9643,10 @@
                 <a:ea typeface="Be Vietnam Pro" pitchFamily="34" charset="-122"/>
                 <a:cs typeface="Be Vietnam Pro" pitchFamily="34" charset="-120"/>
               </a:rPr>
-              <a:t>REST,</a:t>
-            </a:r>
-            <a:r>
-              <a:rPr lang="en-US" sz="2100" b="1" dirty="0" spc="-7" kern="0">
+              <a:t>gRPC: dịch</a:t>
+            </a:r>
+            <a:r>
+              <a:rPr lang="en-US" sz="2100" b="1" dirty="0" spc="-3" kern="0">
                 <a:solidFill>
                   <a:srgbClr val="7C93FF"/>
                 </a:solidFill>
@@ -9561,10 +9654,10 @@
                 <a:ea typeface="Be Vietnam Pro" pitchFamily="34" charset="-122"/>
                 <a:cs typeface="Be Vietnam Pro" pitchFamily="34" charset="-120"/>
               </a:rPr>
-              <a:t> GraphQL,</a:t>
-            </a:r>
-            <a:r>
-              <a:rPr lang="en-US" sz="2100" b="1" dirty="0" spc="-2" kern="0">
+              <a:t> vụ</a:t>
+            </a:r>
+            <a:r>
+              <a:rPr lang="en-US" sz="2100" b="1" dirty="0" spc="-19" kern="0">
                 <a:solidFill>
                   <a:srgbClr val="7C93FF"/>
                 </a:solidFill>
@@ -9572,7 +9665,62 @@
                 <a:ea typeface="Be Vietnam Pro" pitchFamily="34" charset="-122"/>
                 <a:cs typeface="Be Vietnam Pro" pitchFamily="34" charset="-120"/>
               </a:rPr>
-              <a:t> gRPC</a:t>
+              <a:t> và</a:t>
+            </a:r>
+            <a:r>
+              <a:rPr lang="en-US" sz="2100" b="1" dirty="0" spc="5" kern="0">
+                <a:solidFill>
+                  <a:srgbClr val="7C93FF"/>
+                </a:solidFill>
+                <a:latin typeface="Be Vietnam Pro" pitchFamily="34" charset="0"/>
+                <a:ea typeface="Be Vietnam Pro" pitchFamily="34" charset="-122"/>
+                <a:cs typeface="Be Vietnam Pro" pitchFamily="34" charset="-120"/>
+              </a:rPr>
+              <a:t> phương</a:t>
+            </a:r>
+            <a:r>
+              <a:rPr lang="en-US" sz="2100" b="1" dirty="0" spc="6" kern="0">
+                <a:solidFill>
+                  <a:srgbClr val="7C93FF"/>
+                </a:solidFill>
+                <a:latin typeface="Be Vietnam Pro" pitchFamily="34" charset="0"/>
+                <a:ea typeface="Be Vietnam Pro" pitchFamily="34" charset="-122"/>
+                <a:cs typeface="Be Vietnam Pro" pitchFamily="34" charset="-120"/>
+              </a:rPr>
+              <a:t> thức</a:t>
+            </a:r>
+            <a:r>
+              <a:rPr lang="en-US" sz="2100" b="1" dirty="0" spc="-9" kern="0">
+                <a:solidFill>
+                  <a:srgbClr val="7C93FF"/>
+                </a:solidFill>
+                <a:latin typeface="Be Vietnam Pro" pitchFamily="34" charset="0"/>
+                <a:ea typeface="Be Vietnam Pro" pitchFamily="34" charset="-122"/>
+                <a:cs typeface="Be Vietnam Pro" pitchFamily="34" charset="-120"/>
+              </a:rPr>
+              <a:t> gọi</a:t>
+            </a:r>
+            <a:r>
+              <a:rPr lang="en-US" sz="2100" b="1" dirty="0" spc="-3" kern="0">
+                <a:solidFill>
+                  <a:srgbClr val="7C93FF"/>
+                </a:solidFill>
+                <a:latin typeface="Be Vietnam Pro" pitchFamily="34" charset="0"/>
+                <a:ea typeface="Be Vietnam Pro" pitchFamily="34" charset="-122"/>
+                <a:cs typeface="Be Vietnam Pro" pitchFamily="34" charset="-120"/>
+              </a:rPr>
+              <a:t> từ</a:t>
+            </a:r>
+            <a:r>
+              <a:rPr lang="en-US" sz="2100" b="1" dirty="0" spc="-28" kern="0">
+                <a:solidFill>
+                  <a:srgbClr val="7C93FF"/>
+                </a:solidFill>
+                <a:latin typeface="Be Vietnam Pro" pitchFamily="34" charset="0"/>
+                <a:ea typeface="Be Vietnam Pro" pitchFamily="34" charset="-122"/>
+                <a:cs typeface="Be Vietnam Pro" pitchFamily="34" charset="-120"/>
+              </a:rPr>
+              <a:t> xa</a:t>
             </a:r>
             <a:endParaRPr lang="en-US" sz="2100" dirty="0"/>
           </a:p>
@@ -10259,7 +10407,7 @@
               <a:t> chủ,</a:t>
             </a:r>
             <a:r>
-              <a:rPr lang="en-US" sz="3300" b="1" dirty="0" spc="0" kern="0">
+              <a:rPr lang="en-US" sz="3300" b="1" dirty="0" spc="1" kern="0">
                 <a:solidFill>
                   <a:srgbClr val="B45309"/>
                 </a:solidFill>
@@ -10267,10 +10415,10 @@
                 <a:ea typeface="Be Vietnam Pro" pitchFamily="34" charset="-122"/>
                 <a:cs typeface="Be Vietnam Pro" pitchFamily="34" charset="-120"/>
               </a:rPr>
-              <a:t> bảo</a:t>
-            </a:r>
-            <a:r>
-              <a:rPr lang="en-US" sz="3300" b="1" dirty="0" spc="-22" kern="0">
+              <a:t> đăng</a:t>
+            </a:r>
+            <a:r>
+              <a:rPr lang="en-US" sz="3300" b="1" dirty="0" spc="-2" kern="0">
                 <a:solidFill>
                   <a:srgbClr val="B45309"/>
                 </a:solidFill>
@@ -10278,7 +10426,7 @@
                 <a:ea typeface="Be Vietnam Pro" pitchFamily="34" charset="-122"/>
                 <a:cs typeface="Be Vietnam Pro" pitchFamily="34" charset="-120"/>
               </a:rPr>
-              <a:t> vệ,</a:t>
+              <a:t> nhập,</a:t>
             </a:r>
             <a:r>
               <a:rPr lang="en-US" sz="3300" b="1" dirty="0" spc="-9" kern="0">
@@ -10292,7 +10440,7 @@
               <a:t> cơ</a:t>
             </a:r>
             <a:r>
-              <a:rPr lang="en-US" sz="3300" b="1" dirty="0" spc="-7" kern="0">
+              <a:rPr lang="en-US" sz="3300" b="1" dirty="0" spc="-8" kern="0">
                 <a:solidFill>
                   <a:srgbClr val="B45309"/>
                 </a:solidFill>
@@ -10303,7 +10451,7 @@
               <a:t> sở</a:t>
             </a:r>
             <a:r>
-              <a:rPr lang="en-US" sz="3300" b="1" dirty="0" spc="-2" kern="0">
+              <a:rPr lang="en-US" sz="3300" b="1" dirty="0" spc="-1" kern="0">
                 <a:solidFill>
                   <a:srgbClr val="B45309"/>
                 </a:solidFill>
@@ -10400,37 +10548,37 @@
               <a:t> tiếp</a:t>
             </a:r>
             <a:r>
-              <a:rPr lang="en-US" sz="2850" dirty="0" spc="1" kern="0">
-                <a:solidFill>
-                  <a:srgbClr val="14161C"/>
-                </a:solidFill>
-                <a:latin typeface="Be Vietnam Pro" pitchFamily="34" charset="0"/>
-                <a:ea typeface="Be Vietnam Pro" pitchFamily="34" charset="-122"/>
-                <a:cs typeface="Be Vietnam Pro" pitchFamily="34" charset="-120"/>
-              </a:rPr>
-              <a:t> của</a:t>
-            </a:r>
-            <a:r>
-              <a:rPr lang="en-US" sz="2850" dirty="0" spc="2" kern="0">
-                <a:solidFill>
-                  <a:srgbClr val="14161C"/>
-                </a:solidFill>
-                <a:latin typeface="Be Vietnam Pro" pitchFamily="34" charset="0"/>
-                <a:ea typeface="Be Vietnam Pro" pitchFamily="34" charset="-122"/>
-                <a:cs typeface="Be Vietnam Pro" pitchFamily="34" charset="-120"/>
-              </a:rPr>
-              <a:t> lộ</a:t>
-            </a:r>
-            <a:r>
-              <a:rPr lang="en-US" sz="2850" dirty="0" spc="8" kern="0">
-                <a:solidFill>
-                  <a:srgbClr val="14161C"/>
-                </a:solidFill>
-                <a:latin typeface="Be Vietnam Pro" pitchFamily="34" charset="0"/>
-                <a:ea typeface="Be Vietnam Pro" pitchFamily="34" charset="-122"/>
-                <a:cs typeface="Be Vietnam Pro" pitchFamily="34" charset="-120"/>
-              </a:rPr>
-              <a:t> trình.</a:t>
+              <a:rPr lang="en-US" sz="2850" dirty="0" spc="-12" kern="0">
+                <a:solidFill>
+                  <a:srgbClr val="14161C"/>
+                </a:solidFill>
+                <a:latin typeface="Be Vietnam Pro" pitchFamily="34" charset="0"/>
+                <a:ea typeface="Be Vietnam Pro" pitchFamily="34" charset="-122"/>
+                <a:cs typeface="Be Vietnam Pro" pitchFamily="34" charset="-120"/>
+              </a:rPr>
+              <a:t> với</a:t>
+            </a:r>
+            <a:r>
+              <a:rPr lang="en-US" sz="2850" dirty="0" spc="-1" kern="0">
+                <a:solidFill>
+                  <a:srgbClr val="14161C"/>
+                </a:solidFill>
+                <a:latin typeface="Be Vietnam Pro" pitchFamily="34" charset="0"/>
+                <a:ea typeface="Be Vietnam Pro" pitchFamily="34" charset="-122"/>
+                <a:cs typeface="Be Vietnam Pro" pitchFamily="34" charset="-120"/>
+              </a:rPr>
+              <a:t> dịch</a:t>
+            </a:r>
+            <a:r>
+              <a:rPr lang="en-US" sz="2850" dirty="0" spc="3" kern="0">
+                <a:solidFill>
+                  <a:srgbClr val="14161C"/>
+                </a:solidFill>
+                <a:latin typeface="Be Vietnam Pro" pitchFamily="34" charset="0"/>
+                <a:ea typeface="Be Vietnam Pro" pitchFamily="34" charset="-122"/>
+                <a:cs typeface="Be Vietnam Pro" pitchFamily="34" charset="-120"/>
+              </a:rPr>
+              <a:t> vụ.</a:t>
             </a:r>
             <a:endParaRPr lang="en-US" sz="2850" dirty="0"/>
           </a:p>
@@ -11023,26 +11171,37 @@
               <a:buNone/>
             </a:pPr>
             <a:r>
-              <a:rPr lang="en-US" sz="2250" dirty="0" spc="-7" kern="0">
-                <a:solidFill>
-                  <a:srgbClr val="14161C"/>
-                </a:solidFill>
-                <a:latin typeface="Be Vietnam Pro" pitchFamily="34" charset="0"/>
-                <a:ea typeface="Be Vietnam Pro" pitchFamily="34" charset="-122"/>
-                <a:cs typeface="Be Vietnam Pro" pitchFamily="34" charset="-120"/>
-              </a:rPr>
-              <a:t>Biết</a:t>
-            </a:r>
-            <a:r>
-              <a:rPr lang="en-US" sz="2250" dirty="0" spc="-10" kern="0">
-                <a:solidFill>
-                  <a:srgbClr val="14161C"/>
-                </a:solidFill>
-                <a:latin typeface="Be Vietnam Pro" pitchFamily="34" charset="0"/>
-                <a:ea typeface="Be Vietnam Pro" pitchFamily="34" charset="-122"/>
-                <a:cs typeface="Be Vietnam Pro" pitchFamily="34" charset="-120"/>
-              </a:rPr>
-              <a:t> máy</a:t>
+              <a:rPr lang="en-US" sz="2250" dirty="0" spc="-12" kern="0">
+                <a:solidFill>
+                  <a:srgbClr val="14161C"/>
+                </a:solidFill>
+                <a:latin typeface="Be Vietnam Pro" pitchFamily="34" charset="0"/>
+                <a:ea typeface="Be Vietnam Pro" pitchFamily="34" charset="-122"/>
+                <a:cs typeface="Be Vietnam Pro" pitchFamily="34" charset="-120"/>
+              </a:rPr>
+              <a:t>Chạy</a:t>
+            </a:r>
+            <a:r>
+              <a:rPr lang="en-US" sz="2250" dirty="0" spc="2" kern="0">
+                <a:solidFill>
+                  <a:srgbClr val="14161C"/>
+                </a:solidFill>
+                <a:latin typeface="Be Vietnam Pro" pitchFamily="34" charset="0"/>
+                <a:ea typeface="Be Vietnam Pro" pitchFamily="34" charset="-122"/>
+                <a:cs typeface="Be Vietnam Pro" pitchFamily="34" charset="-120"/>
+              </a:rPr>
+              <a:t> dịch vụ</a:t>
+            </a:r>
+            <a:r>
+              <a:rPr lang="en-US" sz="2250" dirty="0" spc="-1" kern="0">
+                <a:solidFill>
+                  <a:srgbClr val="14161C"/>
+                </a:solidFill>
+                <a:latin typeface="Be Vietnam Pro" pitchFamily="34" charset="0"/>
+                <a:ea typeface="Be Vietnam Pro" pitchFamily="34" charset="-122"/>
+                <a:cs typeface="Be Vietnam Pro" pitchFamily="34" charset="-120"/>
+              </a:rPr>
+              <a:t> liên</a:t>
             </a:r>
             <a:r>
               <a:rPr lang="en-US" sz="2250" dirty="0" spc="3" kern="0">
@@ -11053,51 +11212,18 @@
                 <a:ea typeface="Be Vietnam Pro" pitchFamily="34" charset="-122"/>
                 <a:cs typeface="Be Vietnam Pro" pitchFamily="34" charset="-120"/>
               </a:rPr>
-              <a:t> chủ</a:t>
-            </a:r>
-            <a:r>
-              <a:rPr lang="en-US" sz="2250" dirty="0" spc="-10" kern="0">
-                <a:solidFill>
-                  <a:srgbClr val="14161C"/>
-                </a:solidFill>
-                <a:latin typeface="Be Vietnam Pro" pitchFamily="34" charset="0"/>
-                <a:ea typeface="Be Vietnam Pro" pitchFamily="34" charset="-122"/>
-                <a:cs typeface="Be Vietnam Pro" pitchFamily="34" charset="-120"/>
-              </a:rPr>
-              <a:t> web</a:t>
-            </a:r>
-            <a:r>
-              <a:rPr lang="en-US" sz="2250" dirty="0" spc="-17" kern="0">
-                <a:solidFill>
-                  <a:srgbClr val="14161C"/>
-                </a:solidFill>
-                <a:latin typeface="Be Vietnam Pro" pitchFamily="34" charset="0"/>
-                <a:ea typeface="Be Vietnam Pro" pitchFamily="34" charset="-122"/>
-                <a:cs typeface="Be Vietnam Pro" pitchFamily="34" charset="-120"/>
-              </a:rPr>
-              <a:t> và</a:t>
-            </a:r>
-            <a:r>
-              <a:rPr lang="en-US" sz="2250" dirty="0" spc="1" kern="0">
-                <a:solidFill>
-                  <a:srgbClr val="14161C"/>
-                </a:solidFill>
-                <a:latin typeface="Be Vietnam Pro" pitchFamily="34" charset="0"/>
-                <a:ea typeface="Be Vietnam Pro" pitchFamily="34" charset="-122"/>
-                <a:cs typeface="Be Vietnam Pro" pitchFamily="34" charset="-120"/>
-              </a:rPr>
-              <a:t> nền</a:t>
-            </a:r>
-            <a:r>
-              <a:rPr lang="en-US" sz="2250" dirty="0" spc="-9" kern="0">
-                <a:solidFill>
-                  <a:srgbClr val="14161C"/>
-                </a:solidFill>
-                <a:latin typeface="Be Vietnam Pro" pitchFamily="34" charset="0"/>
-                <a:ea typeface="Be Vietnam Pro" pitchFamily="34" charset="-122"/>
-                <a:cs typeface="Be Vietnam Pro" pitchFamily="34" charset="-120"/>
-              </a:rPr>
-              <a:t> tảng</a:t>
+              <a:t> tục</a:t>
+            </a:r>
+            <a:r>
+              <a:rPr lang="en-US" sz="2250" dirty="0" spc="-18" kern="0">
+                <a:solidFill>
+                  <a:srgbClr val="14161C"/>
+                </a:solidFill>
+                <a:latin typeface="Be Vietnam Pro" pitchFamily="34" charset="0"/>
+                <a:ea typeface="Be Vietnam Pro" pitchFamily="34" charset="-122"/>
+                <a:cs typeface="Be Vietnam Pro" pitchFamily="34" charset="-120"/>
+              </a:rPr>
+              <a:t> trên</a:t>
             </a:r>
             <a:r>
               <a:rPr lang="en-US" sz="2250" dirty="0" spc="10" kern="0">
@@ -11150,7 +11276,7 @@
               <a:buNone/>
             </a:pPr>
             <a:r>
-              <a:rPr lang="en-US" sz="2100" b="1" dirty="0" spc="-45" kern="0">
+              <a:rPr lang="en-US" sz="2100" b="1" dirty="0" spc="-15" kern="0">
                 <a:solidFill>
                   <a:srgbClr val="B45309"/>
                 </a:solidFill>
@@ -11158,10 +11284,10 @@
                 <a:ea typeface="Be Vietnam Pro" pitchFamily="34" charset="-122"/>
                 <a:cs typeface="Be Vietnam Pro" pitchFamily="34" charset="-120"/>
               </a:rPr>
-              <a:t>AWS,</a:t>
-            </a:r>
-            <a:r>
-              <a:rPr lang="en-US" sz="2100" b="1" dirty="0" spc="-8" kern="0">
+              <a:t>Kubernetes:</a:t>
+            </a:r>
+            <a:r>
+              <a:rPr lang="en-US" sz="2100" b="1" dirty="0" spc="-6" kern="0">
                 <a:solidFill>
                   <a:srgbClr val="B45309"/>
                 </a:solidFill>
@@ -11169,10 +11295,10 @@
                 <a:ea typeface="Be Vietnam Pro" pitchFamily="34" charset="-122"/>
                 <a:cs typeface="Be Vietnam Pro" pitchFamily="34" charset="-120"/>
               </a:rPr>
-              <a:t> Azure,</a:t>
-            </a:r>
-            <a:r>
-              <a:rPr lang="en-US" sz="2100" b="1" dirty="0" spc="-1" kern="0">
+              <a:t> chạy</a:t>
+            </a:r>
+            <a:r>
+              <a:rPr lang="en-US" sz="2100" b="1" dirty="0" spc="-9" kern="0">
                 <a:solidFill>
                   <a:srgbClr val="B45309"/>
                 </a:solidFill>
@@ -11180,10 +11306,10 @@
                 <a:ea typeface="Be Vietnam Pro" pitchFamily="34" charset="-122"/>
                 <a:cs typeface="Be Vietnam Pro" pitchFamily="34" charset="-120"/>
               </a:rPr>
-              <a:t> GCP,</a:t>
-            </a:r>
-            <a:r>
-              <a:rPr lang="en-US" sz="2100" b="1" dirty="0" spc="-15" kern="0">
+              <a:t> container</a:t>
+            </a:r>
+            <a:r>
+              <a:rPr lang="en-US" sz="2100" b="1" dirty="0" spc="0" kern="0">
                 <a:solidFill>
                   <a:srgbClr val="B45309"/>
                 </a:solidFill>
@@ -11191,7 +11317,29 @@
                 <a:ea typeface="Be Vietnam Pro" pitchFamily="34" charset="-122"/>
                 <a:cs typeface="Be Vietnam Pro" pitchFamily="34" charset="-120"/>
               </a:rPr>
-              <a:t> Kubernetes</a:t>
+              <a:t> khác</a:t>
+            </a:r>
+            <a:r>
+              <a:rPr lang="en-US" sz="2100" b="1" dirty="0" spc="-3" kern="0">
+                <a:solidFill>
+                  <a:srgbClr val="B45309"/>
+                </a:solidFill>
+                <a:latin typeface="Be Vietnam Pro" pitchFamily="34" charset="0"/>
+                <a:ea typeface="Be Vietnam Pro" pitchFamily="34" charset="-122"/>
+                <a:cs typeface="Be Vietnam Pro" pitchFamily="34" charset="-120"/>
+              </a:rPr>
+              <a:t> khi</a:t>
+            </a:r>
+            <a:r>
+              <a:rPr lang="en-US" sz="2100" b="1" dirty="0" spc="-9" kern="0">
+                <a:solidFill>
+                  <a:srgbClr val="B45309"/>
+                </a:solidFill>
+                <a:latin typeface="Be Vietnam Pro" pitchFamily="34" charset="0"/>
+                <a:ea typeface="Be Vietnam Pro" pitchFamily="34" charset="-122"/>
+                <a:cs typeface="Be Vietnam Pro" pitchFamily="34" charset="-120"/>
+              </a:rPr>
+              <a:t> hỏng</a:t>
             </a:r>
             <a:endParaRPr lang="en-US" sz="2100" dirty="0"/>
           </a:p>
@@ -11381,7 +11529,40 @@
                 <a:ea typeface="Be Vietnam Pro" pitchFamily="34" charset="-122"/>
                 <a:cs typeface="Be Vietnam Pro" pitchFamily="34" charset="-120"/>
               </a:rPr>
-              <a:t>Bảo</a:t>
+              <a:t>Đăng</a:t>
+            </a:r>
+            <a:r>
+              <a:rPr lang="en-US" sz="2250" dirty="0" spc="1" kern="0">
+                <a:solidFill>
+                  <a:srgbClr val="14161C"/>
+                </a:solidFill>
+                <a:latin typeface="Be Vietnam Pro" pitchFamily="34" charset="0"/>
+                <a:ea typeface="Be Vietnam Pro" pitchFamily="34" charset="-122"/>
+                <a:cs typeface="Be Vietnam Pro" pitchFamily="34" charset="-120"/>
+              </a:rPr>
+              <a:t> nhập</a:t>
+            </a:r>
+            <a:r>
+              <a:rPr lang="en-US" sz="2250" dirty="0" spc="0" kern="0">
+                <a:solidFill>
+                  <a:srgbClr val="14161C"/>
+                </a:solidFill>
+                <a:latin typeface="Be Vietnam Pro" pitchFamily="34" charset="0"/>
+                <a:ea typeface="Be Vietnam Pro" pitchFamily="34" charset="-122"/>
+                <a:cs typeface="Be Vietnam Pro" pitchFamily="34" charset="-120"/>
+              </a:rPr>
+              <a:t> an</a:t>
+            </a:r>
+            <a:r>
+              <a:rPr lang="en-US" sz="2250" dirty="0" spc="-12" kern="0">
+                <a:solidFill>
+                  <a:srgbClr val="14161C"/>
+                </a:solidFill>
+                <a:latin typeface="Be Vietnam Pro" pitchFamily="34" charset="0"/>
+                <a:ea typeface="Be Vietnam Pro" pitchFamily="34" charset="-122"/>
+                <a:cs typeface="Be Vietnam Pro" pitchFamily="34" charset="-120"/>
+              </a:rPr>
+              <a:t> toàn</a:t>
             </a:r>
             <a:r>
               <a:rPr lang="en-US" sz="2250" dirty="0" spc="-17" kern="0">
@@ -11392,62 +11573,7 @@
                 <a:ea typeface="Be Vietnam Pro" pitchFamily="34" charset="-122"/>
                 <a:cs typeface="Be Vietnam Pro" pitchFamily="34" charset="-120"/>
               </a:rPr>
-              <a:t> vệ</a:t>
-            </a:r>
-            <a:r>
-              <a:rPr lang="en-US" sz="2250" dirty="0" spc="25" kern="0">
-                <a:solidFill>
-                  <a:srgbClr val="14161C"/>
-                </a:solidFill>
-                <a:latin typeface="Be Vietnam Pro" pitchFamily="34" charset="0"/>
-                <a:ea typeface="Be Vietnam Pro" pitchFamily="34" charset="-122"/>
-                <a:cs typeface="Be Vietnam Pro" pitchFamily="34" charset="-120"/>
-              </a:rPr>
-              <a:t> ứng</a:t>
-            </a:r>
-            <a:r>
-              <a:rPr lang="en-US" sz="2250" dirty="0" spc="2" kern="0">
-                <a:solidFill>
-                  <a:srgbClr val="14161C"/>
-                </a:solidFill>
-                <a:latin typeface="Be Vietnam Pro" pitchFamily="34" charset="0"/>
-                <a:ea typeface="Be Vietnam Pro" pitchFamily="34" charset="-122"/>
-                <a:cs typeface="Be Vietnam Pro" pitchFamily="34" charset="-120"/>
-              </a:rPr>
-              <a:t> dụng</a:t>
-            </a:r>
-            <a:r>
-              <a:rPr lang="en-US" sz="2250" dirty="0" spc="-16" kern="0">
-                <a:solidFill>
-                  <a:srgbClr val="14161C"/>
-                </a:solidFill>
-                <a:latin typeface="Be Vietnam Pro" pitchFamily="34" charset="0"/>
-                <a:ea typeface="Be Vietnam Pro" pitchFamily="34" charset="-122"/>
-                <a:cs typeface="Be Vietnam Pro" pitchFamily="34" charset="-120"/>
-              </a:rPr>
               <a:t> và</a:t>
-            </a:r>
-            <a:r>
-              <a:rPr lang="en-US" sz="2250" dirty="0" spc="0" kern="0">
-                <a:solidFill>
-                  <a:srgbClr val="14161C"/>
-                </a:solidFill>
-                <a:latin typeface="Be Vietnam Pro" pitchFamily="34" charset="0"/>
-                <a:ea typeface="Be Vietnam Pro" pitchFamily="34" charset="-122"/>
-                <a:cs typeface="Be Vietnam Pro" pitchFamily="34" charset="-120"/>
-              </a:rPr>
-              <a:t> thành</a:t>
-            </a:r>
-            <a:r>
-              <a:rPr lang="en-US" sz="2250" dirty="0" spc="-1" kern="0">
-                <a:solidFill>
-                  <a:srgbClr val="14161C"/>
-                </a:solidFill>
-                <a:latin typeface="Be Vietnam Pro" pitchFamily="34" charset="0"/>
-                <a:ea typeface="Be Vietnam Pro" pitchFamily="34" charset="-122"/>
-                <a:cs typeface="Be Vietnam Pro" pitchFamily="34" charset="-120"/>
-              </a:rPr>
-              <a:t> thạo</a:t>
             </a:r>
             <a:r>
               <a:rPr lang="en-US" sz="2250" dirty="0" spc="-2" kern="0">
@@ -11500,7 +11626,7 @@
               <a:buNone/>
             </a:pPr>
             <a:r>
-              <a:rPr lang="en-US" sz="2100" b="1" dirty="0" spc="-51" kern="0">
+              <a:rPr lang="en-US" sz="2100" b="1" dirty="0" spc="-20" kern="0">
                 <a:solidFill>
                   <a:srgbClr val="B45309"/>
                 </a:solidFill>
@@ -11508,10 +11634,10 @@
                 <a:ea typeface="Be Vietnam Pro" pitchFamily="34" charset="-122"/>
                 <a:cs typeface="Be Vietnam Pro" pitchFamily="34" charset="-120"/>
               </a:rPr>
-              <a:t>JWT,</a:t>
-            </a:r>
-            <a:r>
-              <a:rPr lang="en-US" sz="2100" b="1" dirty="0" spc="-16" kern="0">
+              <a:t>OAuth2</a:t>
+            </a:r>
+            <a:r>
+              <a:rPr lang="en-US" sz="2100" b="1" dirty="0" spc="-13" kern="0">
                 <a:solidFill>
                   <a:srgbClr val="B45309"/>
                 </a:solidFill>
@@ -11519,10 +11645,10 @@
                 <a:ea typeface="Be Vietnam Pro" pitchFamily="34" charset="-122"/>
                 <a:cs typeface="Be Vietnam Pro" pitchFamily="34" charset="-120"/>
               </a:rPr>
-              <a:t> OAuth2,</a:t>
-            </a:r>
-            <a:r>
-              <a:rPr lang="en-US" sz="2100" b="1" dirty="0" spc="0" kern="0">
+              <a:t> với</a:t>
+            </a:r>
+            <a:r>
+              <a:rPr lang="en-US" sz="2100" b="1" dirty="0" spc="-21" kern="0">
                 <a:solidFill>
                   <a:srgbClr val="B45309"/>
                 </a:solidFill>
@@ -11530,7 +11656,7 @@
                 <a:ea typeface="Be Vietnam Pro" pitchFamily="34" charset="-122"/>
                 <a:cs typeface="Be Vietnam Pro" pitchFamily="34" charset="-120"/>
               </a:rPr>
-              <a:t> TDD,</a:t>
+              <a:t> PKCE;</a:t>
             </a:r>
             <a:r>
               <a:rPr lang="en-US" sz="2100" b="1" dirty="0" spc="-7" kern="0">
@@ -11541,40 +11667,7 @@
                 <a:ea typeface="Be Vietnam Pro" pitchFamily="34" charset="-122"/>
                 <a:cs typeface="Be Vietnam Pro" pitchFamily="34" charset="-120"/>
               </a:rPr>
-              <a:t> kiểm</a:t>
-            </a:r>
-            <a:r>
-              <a:rPr lang="en-US" sz="2100" b="1" dirty="0" spc="-2" kern="0">
-                <a:solidFill>
-                  <a:srgbClr val="B45309"/>
-                </a:solidFill>
-                <a:latin typeface="Be Vietnam Pro" pitchFamily="34" charset="0"/>
-                <a:ea typeface="Be Vietnam Pro" pitchFamily="34" charset="-122"/>
-                <a:cs typeface="Be Vietnam Pro" pitchFamily="34" charset="-120"/>
-              </a:rPr>
-              <a:t> thử</a:t>
-            </a:r>
-            <a:r>
-              <a:rPr lang="en-US" sz="2100" b="1" dirty="0" spc="7" kern="0">
-                <a:solidFill>
-                  <a:srgbClr val="B45309"/>
-                </a:solidFill>
-                <a:latin typeface="Be Vietnam Pro" pitchFamily="34" charset="0"/>
-                <a:ea typeface="Be Vietnam Pro" pitchFamily="34" charset="-122"/>
-                <a:cs typeface="Be Vietnam Pro" pitchFamily="34" charset="-120"/>
-              </a:rPr>
-              <a:t> đầu</a:t>
-            </a:r>
-            <a:r>
-              <a:rPr lang="en-US" sz="2100" b="1" dirty="0" spc="-4" kern="0">
-                <a:solidFill>
-                  <a:srgbClr val="B45309"/>
-                </a:solidFill>
-                <a:latin typeface="Be Vietnam Pro" pitchFamily="34" charset="0"/>
-                <a:ea typeface="Be Vietnam Pro" pitchFamily="34" charset="-122"/>
-                <a:cs typeface="Be Vietnam Pro" pitchFamily="34" charset="-120"/>
-              </a:rPr>
-              <a:t> cuối</a:t>
+              <a:t> unittest</a:t>
             </a:r>
             <a:endParaRPr lang="en-US" sz="2100" dirty="0"/>
           </a:p>
@@ -11745,26 +11838,48 @@
               <a:buNone/>
             </a:pPr>
             <a:r>
-              <a:rPr lang="en-US" sz="2250" dirty="0" spc="-6" kern="0">
-                <a:solidFill>
-                  <a:srgbClr val="14161C"/>
-                </a:solidFill>
-                <a:latin typeface="Be Vietnam Pro" pitchFamily="34" charset="0"/>
-                <a:ea typeface="Be Vietnam Pro" pitchFamily="34" charset="-122"/>
-                <a:cs typeface="Be Vietnam Pro" pitchFamily="34" charset="-120"/>
-              </a:rPr>
-              <a:t>Cả</a:t>
-            </a:r>
-            <a:r>
-              <a:rPr lang="en-US" sz="2250" dirty="0" spc="1" kern="0">
-                <a:solidFill>
-                  <a:srgbClr val="14161C"/>
-                </a:solidFill>
-                <a:latin typeface="Be Vietnam Pro" pitchFamily="34" charset="0"/>
-                <a:ea typeface="Be Vietnam Pro" pitchFamily="34" charset="-122"/>
-                <a:cs typeface="Be Vietnam Pro" pitchFamily="34" charset="-120"/>
-              </a:rPr>
-              <a:t> quan</a:t>
+              <a:rPr lang="en-US" sz="2250" dirty="0" spc="-3" kern="0">
+                <a:solidFill>
+                  <a:srgbClr val="14161C"/>
+                </a:solidFill>
+                <a:latin typeface="Be Vietnam Pro" pitchFamily="34" charset="0"/>
+                <a:ea typeface="Be Vietnam Pro" pitchFamily="34" charset="-122"/>
+                <a:cs typeface="Be Vietnam Pro" pitchFamily="34" charset="-120"/>
+              </a:rPr>
+              <a:t>Phiếu</a:t>
+            </a:r>
+            <a:r>
+              <a:rPr lang="en-US" sz="2250" dirty="0" spc="8" kern="0">
+                <a:solidFill>
+                  <a:srgbClr val="14161C"/>
+                </a:solidFill>
+                <a:latin typeface="Be Vietnam Pro" pitchFamily="34" charset="0"/>
+                <a:ea typeface="Be Vietnam Pro" pitchFamily="34" charset="-122"/>
+                <a:cs typeface="Be Vietnam Pro" pitchFamily="34" charset="-120"/>
+              </a:rPr>
+              <a:t> mượn</a:t>
+            </a:r>
+            <a:r>
+              <a:rPr lang="en-US" sz="2250" dirty="0" spc="-1" kern="0">
+                <a:solidFill>
+                  <a:srgbClr val="14161C"/>
+                </a:solidFill>
+                <a:latin typeface="Be Vietnam Pro" pitchFamily="34" charset="0"/>
+                <a:ea typeface="Be Vietnam Pro" pitchFamily="34" charset="-122"/>
+                <a:cs typeface="Be Vietnam Pro" pitchFamily="34" charset="-120"/>
+              </a:rPr>
+              <a:t> phải</a:t>
+            </a:r>
+            <a:r>
+              <a:rPr lang="en-US" sz="2250" dirty="0" spc="-2" kern="0">
+                <a:solidFill>
+                  <a:srgbClr val="14161C"/>
+                </a:solidFill>
+                <a:latin typeface="Be Vietnam Pro" pitchFamily="34" charset="0"/>
+                <a:ea typeface="Be Vietnam Pro" pitchFamily="34" charset="-122"/>
+                <a:cs typeface="Be Vietnam Pro" pitchFamily="34" charset="-120"/>
+              </a:rPr>
+              <a:t> sống</a:t>
             </a:r>
             <a:r>
               <a:rPr lang="en-US" sz="2250" dirty="0" spc="0" kern="0">
@@ -11775,18 +11890,29 @@
                 <a:ea typeface="Be Vietnam Pro" pitchFamily="34" charset="-122"/>
                 <a:cs typeface="Be Vietnam Pro" pitchFamily="34" charset="-120"/>
               </a:rPr>
-              <a:t> hệ lẫn phi</a:t>
-            </a:r>
-            <a:r>
-              <a:rPr lang="en-US" sz="2250" dirty="0" spc="1" kern="0">
-                <a:solidFill>
-                  <a:srgbClr val="14161C"/>
-                </a:solidFill>
-                <a:latin typeface="Be Vietnam Pro" pitchFamily="34" charset="0"/>
-                <a:ea typeface="Be Vietnam Pro" pitchFamily="34" charset="-122"/>
-                <a:cs typeface="Be Vietnam Pro" pitchFamily="34" charset="-120"/>
-              </a:rPr>
-              <a:t> quan hệ.</a:t>
+              <a:t> lâu hơn</a:t>
+            </a:r>
+            <a:r>
+              <a:rPr lang="en-US" sz="2250" dirty="0" spc="4" kern="0">
+                <a:solidFill>
+                  <a:srgbClr val="14161C"/>
+                </a:solidFill>
+                <a:latin typeface="Be Vietnam Pro" pitchFamily="34" charset="0"/>
+                <a:ea typeface="Be Vietnam Pro" pitchFamily="34" charset="-122"/>
+                <a:cs typeface="Be Vietnam Pro" pitchFamily="34" charset="-120"/>
+              </a:rPr>
+              <a:t> chương</a:t>
+            </a:r>
+            <a:r>
+              <a:rPr lang="en-US" sz="2250" dirty="0" spc="7" kern="0">
+                <a:solidFill>
+                  <a:srgbClr val="14161C"/>
+                </a:solidFill>
+                <a:latin typeface="Be Vietnam Pro" pitchFamily="34" charset="0"/>
+                <a:ea typeface="Be Vietnam Pro" pitchFamily="34" charset="-122"/>
+                <a:cs typeface="Be Vietnam Pro" pitchFamily="34" charset="-120"/>
+              </a:rPr>
+              <a:t> trình.</a:t>
             </a:r>
             <a:endParaRPr lang="en-US" sz="2250" dirty="0"/>
           </a:p>
@@ -11817,7 +11943,7 @@
               <a:buNone/>
             </a:pPr>
             <a:r>
-              <a:rPr lang="en-US" sz="2100" b="1" dirty="0" spc="-16" kern="0">
+              <a:rPr lang="en-US" sz="2100" b="1" dirty="0" spc="-1" kern="0">
                 <a:solidFill>
                   <a:srgbClr val="B45309"/>
                 </a:solidFill>
@@ -11825,7 +11951,7 @@
                 <a:ea typeface="Be Vietnam Pro" pitchFamily="34" charset="-122"/>
                 <a:cs typeface="Be Vietnam Pro" pitchFamily="34" charset="-120"/>
               </a:rPr>
-              <a:t>Postgres,</a:t>
+              <a:t>SQLite</a:t>
             </a:r>
             <a:r>
               <a:rPr lang="en-US" sz="2100" b="1" dirty="0" spc="3" kern="0">
@@ -11836,10 +11962,10 @@
                 <a:ea typeface="Be Vietnam Pro" pitchFamily="34" charset="-122"/>
                 <a:cs typeface="Be Vietnam Pro" pitchFamily="34" charset="-120"/>
               </a:rPr>
-              <a:t> MySQL,</a:t>
-            </a:r>
-            <a:r>
-              <a:rPr lang="en-US" sz="2100" b="1" dirty="0" spc="-7" kern="0">
+              <a:t> để</a:t>
+            </a:r>
+            <a:r>
+              <a:rPr lang="en-US" sz="2100" b="1" dirty="0" spc="-1" kern="0">
                 <a:solidFill>
                   <a:srgbClr val="B45309"/>
                 </a:solidFill>
@@ -11847,10 +11973,10 @@
                 <a:ea typeface="Be Vietnam Pro" pitchFamily="34" charset="-122"/>
                 <a:cs typeface="Be Vietnam Pro" pitchFamily="34" charset="-120"/>
               </a:rPr>
-              <a:t> MongoDB,</a:t>
-            </a:r>
-            <a:r>
-              <a:rPr lang="en-US" sz="2100" b="1" dirty="0" spc="-20" kern="0">
+              <a:t> thử;</a:t>
+            </a:r>
+            <a:r>
+              <a:rPr lang="en-US" sz="2100" b="1" dirty="0" spc="-21" kern="0">
                 <a:solidFill>
                   <a:srgbClr val="B45309"/>
                 </a:solidFill>
@@ -11859,6 +11985,50 @@
                 <a:cs typeface="Be Vietnam Pro" pitchFamily="34" charset="-120"/>
               </a:rPr>
               <a:t> Redis</a:t>
+            </a:r>
+            <a:r>
+              <a:rPr lang="en-US" sz="2100" b="1" dirty="0" spc="-2" kern="0">
+                <a:solidFill>
+                  <a:srgbClr val="B45309"/>
+                </a:solidFill>
+                <a:latin typeface="Be Vietnam Pro" pitchFamily="34" charset="0"/>
+                <a:ea typeface="Be Vietnam Pro" pitchFamily="34" charset="-122"/>
+                <a:cs typeface="Be Vietnam Pro" pitchFamily="34" charset="-120"/>
+              </a:rPr>
+              <a:t> làm</a:t>
+            </a:r>
+            <a:r>
+              <a:rPr lang="en-US" sz="2100" b="1" dirty="0" spc="-6" kern="0">
+                <a:solidFill>
+                  <a:srgbClr val="B45309"/>
+                </a:solidFill>
+                <a:latin typeface="Be Vietnam Pro" pitchFamily="34" charset="0"/>
+                <a:ea typeface="Be Vietnam Pro" pitchFamily="34" charset="-122"/>
+                <a:cs typeface="Be Vietnam Pro" pitchFamily="34" charset="-120"/>
+              </a:rPr>
+              <a:t> bộ</a:t>
+            </a:r>
+            <a:r>
+              <a:rPr lang="en-US" sz="2100" b="1" dirty="0" spc="-4" kern="0">
+                <a:solidFill>
+                  <a:srgbClr val="B45309"/>
+                </a:solidFill>
+                <a:latin typeface="Be Vietnam Pro" pitchFamily="34" charset="0"/>
+                <a:ea typeface="Be Vietnam Pro" pitchFamily="34" charset="-122"/>
+                <a:cs typeface="Be Vietnam Pro" pitchFamily="34" charset="-120"/>
+              </a:rPr>
+              <a:t> nhớ</a:t>
+            </a:r>
+            <a:r>
+              <a:rPr lang="en-US" sz="2100" b="1" dirty="0" spc="-2" kern="0">
+                <a:solidFill>
+                  <a:srgbClr val="B45309"/>
+                </a:solidFill>
+                <a:latin typeface="Be Vietnam Pro" pitchFamily="34" charset="0"/>
+                <a:ea typeface="Be Vietnam Pro" pitchFamily="34" charset="-122"/>
+                <a:cs typeface="Be Vietnam Pro" pitchFamily="34" charset="-120"/>
+              </a:rPr>
+              <a:t> đệm</a:t>
             </a:r>
             <a:endParaRPr lang="en-US" sz="2100" dirty="0"/>
           </a:p>
@@ -12567,7 +12737,7 @@
               <a:t> và</a:t>
             </a:r>
             <a:r>
-              <a:rPr lang="en-US" sz="3300" b="1" dirty="0" spc="-22" kern="0">
+              <a:rPr lang="en-US" sz="3300" b="1" dirty="0" spc="0" kern="0">
                 <a:solidFill>
                   <a:srgbClr val="3DD6A0"/>
                 </a:solidFill>
@@ -12575,7 +12745,40 @@
                 <a:ea typeface="Be Vietnam Pro" pitchFamily="34" charset="-122"/>
                 <a:cs typeface="Be Vietnam Pro" pitchFamily="34" charset="-120"/>
               </a:rPr>
-              <a:t> DSA</a:t>
+              <a:t> cấu</a:t>
+            </a:r>
+            <a:r>
+              <a:rPr lang="en-US" sz="3300" b="1" dirty="0" spc="-1" kern="0">
+                <a:solidFill>
+                  <a:srgbClr val="3DD6A0"/>
+                </a:solidFill>
+                <a:latin typeface="Be Vietnam Pro" pitchFamily="34" charset="0"/>
+                <a:ea typeface="Be Vietnam Pro" pitchFamily="34" charset="-122"/>
+                <a:cs typeface="Be Vietnam Pro" pitchFamily="34" charset="-120"/>
+              </a:rPr>
+              <a:t> trúc</a:t>
+            </a:r>
+            <a:r>
+              <a:rPr lang="en-US" sz="3300" b="1" dirty="0" spc="-2" kern="0">
+                <a:solidFill>
+                  <a:srgbClr val="3DD6A0"/>
+                </a:solidFill>
+                <a:latin typeface="Be Vietnam Pro" pitchFamily="34" charset="0"/>
+                <a:ea typeface="Be Vietnam Pro" pitchFamily="34" charset="-122"/>
+                <a:cs typeface="Be Vietnam Pro" pitchFamily="34" charset="-120"/>
+              </a:rPr>
+              <a:t> dữ</a:t>
+            </a:r>
+            <a:r>
+              <a:rPr lang="en-US" sz="3300" b="1" dirty="0" spc="1" kern="0">
+                <a:solidFill>
+                  <a:srgbClr val="3DD6A0"/>
+                </a:solidFill>
+                <a:latin typeface="Be Vietnam Pro" pitchFamily="34" charset="0"/>
+                <a:ea typeface="Be Vietnam Pro" pitchFamily="34" charset="-122"/>
+                <a:cs typeface="Be Vietnam Pro" pitchFamily="34" charset="-120"/>
+              </a:rPr>
+              <a:t> liệu</a:t>
             </a:r>
             <a:endParaRPr lang="en-US" sz="3300" dirty="0"/>
           </a:p>
@@ -12653,7 +12856,7 @@
               <a:t> tiếp</a:t>
             </a:r>
             <a:r>
-              <a:rPr lang="en-US" sz="2850" dirty="0" spc="1" kern="0">
+              <a:rPr lang="en-US" sz="2850" dirty="0" spc="-12" kern="0">
                 <a:solidFill>
                   <a:srgbClr val="F3EEE3"/>
                 </a:solidFill>
@@ -12661,10 +12864,10 @@
                 <a:ea typeface="Be Vietnam Pro" pitchFamily="34" charset="-122"/>
                 <a:cs typeface="Be Vietnam Pro" pitchFamily="34" charset="-120"/>
               </a:rPr>
-              <a:t> của lộ</a:t>
-            </a:r>
-            <a:r>
-              <a:rPr lang="en-US" sz="2850" dirty="0" spc="8" kern="0">
+              <a:t> với</a:t>
+            </a:r>
+            <a:r>
+              <a:rPr lang="en-US" sz="2850" dirty="0" spc="-1" kern="0">
                 <a:solidFill>
                   <a:srgbClr val="F3EEE3"/>
                 </a:solidFill>
@@ -12672,7 +12875,18 @@
                 <a:ea typeface="Be Vietnam Pro" pitchFamily="34" charset="-122"/>
                 <a:cs typeface="Be Vietnam Pro" pitchFamily="34" charset="-120"/>
               </a:rPr>
-              <a:t> trình.</a:t>
+              <a:t> dịch</a:t>
+            </a:r>
+            <a:r>
+              <a:rPr lang="en-US" sz="2850" dirty="0" spc="3" kern="0">
+                <a:solidFill>
+                  <a:srgbClr val="F3EEE3"/>
+                </a:solidFill>
+                <a:latin typeface="Be Vietnam Pro" pitchFamily="34" charset="0"/>
+                <a:ea typeface="Be Vietnam Pro" pitchFamily="34" charset="-122"/>
+                <a:cs typeface="Be Vietnam Pro" pitchFamily="34" charset="-120"/>
+              </a:rPr>
+              <a:t> vụ.</a:t>
             </a:r>
             <a:endParaRPr lang="en-US" sz="2850" dirty="0"/>
           </a:p>
@@ -12891,7 +13105,7 @@
               <a:buNone/>
             </a:pPr>
             <a:r>
-              <a:rPr lang="en-US" sz="2700" dirty="0" spc="1" kern="0">
+              <a:rPr lang="en-US" sz="2700" dirty="0" spc="0" kern="0">
                 <a:solidFill>
                   <a:srgbClr val="F3EEE3"/>
                 </a:solidFill>
@@ -12899,10 +13113,10 @@
                 <a:ea typeface="Be Vietnam Pro" pitchFamily="34" charset="-122"/>
                 <a:cs typeface="Be Vietnam Pro" pitchFamily="34" charset="-120"/>
               </a:rPr>
-              <a:t>CI</a:t>
-            </a:r>
-            <a:r>
-              <a:rPr lang="en-US" sz="2700" dirty="0" spc="-1" kern="0">
+              <a:t>Mỗi</a:t>
+            </a:r>
+            <a:r>
+              <a:rPr lang="en-US" sz="2700" dirty="0" spc="-9" kern="0">
                 <a:solidFill>
                   <a:srgbClr val="F3EEE3"/>
                 </a:solidFill>
@@ -12910,10 +13124,32 @@
                 <a:ea typeface="Be Vietnam Pro" pitchFamily="34" charset="-122"/>
                 <a:cs typeface="Be Vietnam Pro" pitchFamily="34" charset="-120"/>
               </a:rPr>
+              <a:t> thay</a:t>
+            </a:r>
+            <a:r>
+              <a:rPr lang="en-US" sz="2700" dirty="0" spc="12" kern="0">
+                <a:solidFill>
+                  <a:srgbClr val="F3EEE3"/>
+                </a:solidFill>
+                <a:latin typeface="Be Vietnam Pro" pitchFamily="34" charset="0"/>
+                <a:ea typeface="Be Vietnam Pro" pitchFamily="34" charset="-122"/>
+                <a:cs typeface="Be Vietnam Pro" pitchFamily="34" charset="-120"/>
+              </a:rPr>
+              <a:t> đổi</a:t>
+            </a:r>
+            <a:r>
+              <a:rPr lang="en-US" sz="2700" dirty="0" spc="0" kern="0">
+                <a:solidFill>
+                  <a:srgbClr val="F3EEE3"/>
+                </a:solidFill>
+                <a:latin typeface="Be Vietnam Pro" pitchFamily="34" charset="0"/>
+                <a:ea typeface="Be Vietnam Pro" pitchFamily="34" charset="-122"/>
+                <a:cs typeface="Be Vietnam Pro" pitchFamily="34" charset="-120"/>
+              </a:rPr>
               <a:t> tự</a:t>
             </a:r>
             <a:r>
-              <a:rPr lang="en-US" sz="2700" dirty="0" spc="9" kern="0">
+              <a:rPr lang="en-US" sz="2700" dirty="0" spc="-8" kern="0">
                 <a:solidFill>
                   <a:srgbClr val="F3EEE3"/>
                 </a:solidFill>
@@ -12921,29 +13157,7 @@
                 <a:ea typeface="Be Vietnam Pro" pitchFamily="34" charset="-122"/>
                 <a:cs typeface="Be Vietnam Pro" pitchFamily="34" charset="-120"/>
               </a:rPr>
-              <a:t> động</a:t>
-            </a:r>
-            <a:r>
-              <a:rPr lang="en-US" sz="2700" dirty="0" spc="-3" kern="0">
-                <a:solidFill>
-                  <a:srgbClr val="F3EEE3"/>
-                </a:solidFill>
-                <a:latin typeface="Be Vietnam Pro" pitchFamily="34" charset="0"/>
-                <a:ea typeface="Be Vietnam Pro" pitchFamily="34" charset="-122"/>
-                <a:cs typeface="Be Vietnam Pro" pitchFamily="34" charset="-120"/>
-              </a:rPr>
-              <a:t> kiểm</a:t>
-            </a:r>
-            <a:r>
-              <a:rPr lang="en-US" sz="2700" dirty="0" spc="-28" kern="0">
-                <a:solidFill>
-                  <a:srgbClr val="F3EEE3"/>
-                </a:solidFill>
-                <a:latin typeface="Be Vietnam Pro" pitchFamily="34" charset="0"/>
-                <a:ea typeface="Be Vietnam Pro" pitchFamily="34" charset="-122"/>
-                <a:cs typeface="Be Vietnam Pro" pitchFamily="34" charset="-120"/>
-              </a:rPr>
-              <a:t> tra</a:t>
+              <a:t> chạy</a:t>
             </a:r>
             <a:endParaRPr lang="en-US" sz="2700" dirty="0"/>
           </a:p>
@@ -12963,10 +13177,10 @@
                 <a:ea typeface="Be Vietnam Pro" pitchFamily="34" charset="-122"/>
                 <a:cs typeface="Be Vietnam Pro" pitchFamily="34" charset="-120"/>
               </a:rPr>
-              <a:t>thay</a:t>
-            </a:r>
-            <a:r>
-              <a:rPr lang="en-US" sz="2700" dirty="0" spc="12" kern="0">
+              <a:t>ba</a:t>
+            </a:r>
+            <a:r>
+              <a:rPr lang="en-US" sz="2700" dirty="0" spc="-1" kern="0">
                 <a:solidFill>
                   <a:srgbClr val="F3EEE3"/>
                 </a:solidFill>
@@ -12974,7 +13188,7 @@
                 <a:ea typeface="Be Vietnam Pro" pitchFamily="34" charset="-122"/>
                 <a:cs typeface="Be Vietnam Pro" pitchFamily="34" charset="-120"/>
               </a:rPr>
-              <a:t> đổi</a:t>
+              <a:t> ca</a:t>
             </a:r>
             <a:r>
               <a:rPr lang="en-US" sz="2700" dirty="0" spc="-2" kern="0">
@@ -12985,7 +13199,7 @@
                 <a:ea typeface="Be Vietnam Pro" pitchFamily="34" charset="-122"/>
                 <a:cs typeface="Be Vietnam Pro" pitchFamily="34" charset="-120"/>
               </a:rPr>
-              <a:t> mã.</a:t>
+              <a:t> kiểm thử.</a:t>
             </a:r>
             <a:endParaRPr lang="en-US" sz="2700" dirty="0"/>
           </a:p>
@@ -13158,7 +13372,7 @@
                 <a:ea typeface="Be Vietnam Pro" pitchFamily="34" charset="-122"/>
                 <a:cs typeface="Be Vietnam Pro" pitchFamily="34" charset="-120"/>
               </a:rPr>
-              <a:t>Học</a:t>
+              <a:t>Mỗi</a:t>
             </a:r>
             <a:r>
               <a:rPr lang="en-US" sz="2250" dirty="0" spc="1" kern="0">
@@ -13169,7 +13383,18 @@
                 <a:ea typeface="Be Vietnam Pro" pitchFamily="34" charset="-122"/>
                 <a:cs typeface="Be Vietnam Pro" pitchFamily="34" charset="-120"/>
               </a:rPr>
-              <a:t> tích</a:t>
+              <a:t> pull</a:t>
+            </a:r>
+            <a:r>
+              <a:rPr lang="en-US" sz="2250" dirty="0" spc="-15" kern="0">
+                <a:solidFill>
+                  <a:srgbClr val="C4C8D6"/>
+                </a:solidFill>
+                <a:latin typeface="Be Vietnam Pro" pitchFamily="34" charset="0"/>
+                <a:ea typeface="Be Vietnam Pro" pitchFamily="34" charset="-122"/>
+                <a:cs typeface="Be Vietnam Pro" pitchFamily="34" charset="-120"/>
+              </a:rPr>
+              <a:t> request</a:t>
             </a:r>
             <a:r>
               <a:rPr lang="en-US" sz="2250" dirty="0" spc="3" kern="0">
@@ -13180,10 +13405,10 @@
                 <a:ea typeface="Be Vietnam Pro" pitchFamily="34" charset="-122"/>
                 <a:cs typeface="Be Vietnam Pro" pitchFamily="34" charset="-120"/>
               </a:rPr>
-              <a:t> hợp</a:t>
-            </a:r>
-            <a:r>
-              <a:rPr lang="en-US" sz="2250" dirty="0" spc="-1" kern="0">
+              <a:t> tự</a:t>
+            </a:r>
+            <a:r>
+              <a:rPr lang="en-US" sz="2250" dirty="0" spc="-27" kern="0">
                 <a:solidFill>
                   <a:srgbClr val="C4C8D6"/>
                 </a:solidFill>
@@ -13191,10 +13416,10 @@
                 <a:ea typeface="Be Vietnam Pro" pitchFamily="34" charset="-122"/>
                 <a:cs typeface="Be Vietnam Pro" pitchFamily="34" charset="-120"/>
               </a:rPr>
-              <a:t> liên</a:t>
-            </a:r>
-            <a:r>
-              <a:rPr lang="en-US" sz="2250" dirty="0" spc="4" kern="0">
+              <a:t> xây</a:t>
+            </a:r>
+            <a:r>
+              <a:rPr lang="en-US" sz="2250" dirty="0" spc="21" kern="0">
                 <a:solidFill>
                   <a:srgbClr val="C4C8D6"/>
                 </a:solidFill>
@@ -13202,7 +13427,7 @@
                 <a:ea typeface="Be Vietnam Pro" pitchFamily="34" charset="-122"/>
                 <a:cs typeface="Be Vietnam Pro" pitchFamily="34" charset="-120"/>
               </a:rPr>
-              <a:t> tục</a:t>
+              <a:t> dựng</a:t>
             </a:r>
             <a:r>
               <a:rPr lang="en-US" sz="2250" dirty="0" spc="-17" kern="0">
@@ -13216,7 +13441,7 @@
               <a:t> và</a:t>
             </a:r>
             <a:r>
-              <a:rPr lang="en-US" sz="2250" dirty="0" spc="1" kern="0">
+              <a:rPr lang="en-US" sz="2250" dirty="0" spc="-2" kern="0">
                 <a:solidFill>
                   <a:srgbClr val="C4C8D6"/>
                 </a:solidFill>
@@ -13224,10 +13449,10 @@
                 <a:ea typeface="Be Vietnam Pro" pitchFamily="34" charset="-122"/>
                 <a:cs typeface="Be Vietnam Pro" pitchFamily="34" charset="-120"/>
               </a:rPr>
-              <a:t> phân phối</a:t>
-            </a:r>
-            <a:r>
-              <a:rPr lang="en-US" sz="2250" dirty="0" spc="-1" kern="0">
+              <a:t> kiểm</a:t>
+            </a:r>
+            <a:r>
+              <a:rPr lang="en-US" sz="2250" dirty="0" spc="3" kern="0">
                 <a:solidFill>
                   <a:srgbClr val="C4C8D6"/>
                 </a:solidFill>
@@ -13235,18 +13460,7 @@
                 <a:ea typeface="Be Vietnam Pro" pitchFamily="34" charset="-122"/>
                 <a:cs typeface="Be Vietnam Pro" pitchFamily="34" charset="-120"/>
               </a:rPr>
-              <a:t> liên</a:t>
-            </a:r>
-            <a:r>
-              <a:rPr lang="en-US" sz="2250" dirty="0" spc="4" kern="0">
-                <a:solidFill>
-                  <a:srgbClr val="C4C8D6"/>
-                </a:solidFill>
-                <a:latin typeface="Be Vietnam Pro" pitchFamily="34" charset="0"/>
-                <a:ea typeface="Be Vietnam Pro" pitchFamily="34" charset="-122"/>
-                <a:cs typeface="Be Vietnam Pro" pitchFamily="34" charset="-120"/>
-              </a:rPr>
-              <a:t> tục.</a:t>
+              <a:t> thử.</a:t>
             </a:r>
             <a:endParaRPr lang="en-US" sz="2250" dirty="0"/>
           </a:p>
@@ -13607,10 +13821,10 @@
                 <a:ea typeface="Be Vietnam Pro" pitchFamily="34" charset="-122"/>
                 <a:cs typeface="Be Vietnam Pro" pitchFamily="34" charset="-120"/>
               </a:rPr>
-              <a:t> Actions,</a:t>
-            </a:r>
-            <a:r>
-              <a:rPr lang="en-US" sz="2100" b="1" dirty="0" spc="0" kern="0">
+              <a:t> Actions:</a:t>
+            </a:r>
+            <a:r>
+              <a:rPr lang="en-US" sz="2100" b="1" dirty="0" spc="-17" kern="0">
                 <a:solidFill>
                   <a:srgbClr val="3DD6A0"/>
                 </a:solidFill>
@@ -13618,7 +13832,29 @@
                 <a:ea typeface="Be Vietnam Pro" pitchFamily="34" charset="-122"/>
                 <a:cs typeface="Be Vietnam Pro" pitchFamily="34" charset="-120"/>
               </a:rPr>
-              <a:t> Jenkins,</a:t>
+              <a:t> workflow</a:t>
+            </a:r>
+            <a:r>
+              <a:rPr lang="en-US" sz="2100" b="1" dirty="0" spc="-6" kern="0">
+                <a:solidFill>
+                  <a:srgbClr val="3DD6A0"/>
+                </a:solidFill>
+                <a:latin typeface="Be Vietnam Pro" pitchFamily="34" charset="0"/>
+                <a:ea typeface="Be Vietnam Pro" pitchFamily="34" charset="-122"/>
+                <a:cs typeface="Be Vietnam Pro" pitchFamily="34" charset="-120"/>
+              </a:rPr>
+              <a:t> chạy</a:t>
+            </a:r>
+            <a:r>
+              <a:rPr lang="en-US" sz="2100" b="1" dirty="0" spc="-3" kern="0">
+                <a:solidFill>
+                  <a:srgbClr val="3DD6A0"/>
+                </a:solidFill>
+                <a:latin typeface="Be Vietnam Pro" pitchFamily="34" charset="0"/>
+                <a:ea typeface="Be Vietnam Pro" pitchFamily="34" charset="-122"/>
+                <a:cs typeface="Be Vietnam Pro" pitchFamily="34" charset="-120"/>
+              </a:rPr>
+              <a:t> khi</a:t>
             </a:r>
             <a:r>
               <a:rPr lang="en-US" sz="2100" b="1" dirty="0" spc="-9" kern="0">
@@ -13629,7 +13865,29 @@
                 <a:ea typeface="Be Vietnam Pro" pitchFamily="34" charset="-122"/>
                 <a:cs typeface="Be Vietnam Pro" pitchFamily="34" charset="-120"/>
               </a:rPr>
-              <a:t> CircleCI</a:t>
+              <a:t> có</a:t>
+            </a:r>
+            <a:r>
+              <a:rPr lang="en-US" sz="2100" b="1" dirty="0" spc="-1" kern="0">
+                <a:solidFill>
+                  <a:srgbClr val="3DD6A0"/>
+                </a:solidFill>
+                <a:latin typeface="Be Vietnam Pro" pitchFamily="34" charset="0"/>
+                <a:ea typeface="Be Vietnam Pro" pitchFamily="34" charset="-122"/>
+                <a:cs typeface="Be Vietnam Pro" pitchFamily="34" charset="-120"/>
+              </a:rPr>
+              <a:t> sự</a:t>
+            </a:r>
+            <a:r>
+              <a:rPr lang="en-US" sz="2100" b="1" dirty="0" spc="-4" kern="0">
+                <a:solidFill>
+                  <a:srgbClr val="3DD6A0"/>
+                </a:solidFill>
+                <a:latin typeface="Be Vietnam Pro" pitchFamily="34" charset="0"/>
+                <a:ea typeface="Be Vietnam Pro" pitchFamily="34" charset="-122"/>
+                <a:cs typeface="Be Vietnam Pro" pitchFamily="34" charset="-120"/>
+              </a:rPr>
+              <a:t> kiện</a:t>
             </a:r>
             <a:endParaRPr lang="en-US" sz="2100" dirty="0"/>
           </a:p>
@@ -13833,6 +14091,39 @@
               <a:buNone/>
             </a:pPr>
             <a:r>
+              <a:rPr lang="en-US" sz="2250" dirty="0" spc="-2" kern="0">
+                <a:solidFill>
+                  <a:srgbClr val="C4C8D6"/>
+                </a:solidFill>
+                <a:latin typeface="Be Vietnam Pro" pitchFamily="34" charset="0"/>
+                <a:ea typeface="Be Vietnam Pro" pitchFamily="34" charset="-122"/>
+                <a:cs typeface="Be Vietnam Pro" pitchFamily="34" charset="-120"/>
+              </a:rPr>
+              <a:t>Tìm mã</a:t>
+            </a:r>
+            <a:r>
+              <a:rPr lang="en-US" sz="2250" dirty="0" spc="-3" kern="0">
+                <a:solidFill>
+                  <a:srgbClr val="C4C8D6"/>
+                </a:solidFill>
+                <a:latin typeface="Be Vietnam Pro" pitchFamily="34" charset="0"/>
+                <a:ea typeface="Be Vietnam Pro" pitchFamily="34" charset="-122"/>
+                <a:cs typeface="Be Vietnam Pro" pitchFamily="34" charset="-120"/>
+              </a:rPr>
+              <a:t> sách</a:t>
+            </a:r>
+            <a:r>
+              <a:rPr lang="en-US" sz="2250" dirty="0" spc="-16" kern="0">
+                <a:solidFill>
+                  <a:srgbClr val="C4C8D6"/>
+                </a:solidFill>
+                <a:latin typeface="Be Vietnam Pro" pitchFamily="34" charset="0"/>
+                <a:ea typeface="Be Vietnam Pro" pitchFamily="34" charset="-122"/>
+                <a:cs typeface="Be Vietnam Pro" pitchFamily="34" charset="-120"/>
+              </a:rPr>
+              <a:t> trong</a:t>
+            </a:r>
+            <a:r>
               <a:rPr lang="en-US" sz="2250" dirty="0" spc="-4" kern="0">
                 <a:solidFill>
                   <a:srgbClr val="C4C8D6"/>
@@ -13841,10 +14132,10 @@
                 <a:ea typeface="Be Vietnam Pro" pitchFamily="34" charset="-122"/>
                 <a:cs typeface="Be Vietnam Pro" pitchFamily="34" charset="-120"/>
               </a:rPr>
-              <a:t>Nắm</a:t>
-            </a:r>
-            <a:r>
-              <a:rPr lang="en-US" sz="2250" dirty="0" spc="19" kern="0">
+              <a:t> một</a:t>
+            </a:r>
+            <a:r>
+              <a:rPr lang="en-US" sz="2250" dirty="0" spc="6" kern="0">
                 <a:solidFill>
                   <a:srgbClr val="C4C8D6"/>
                 </a:solidFill>
@@ -13852,10 +14143,10 @@
                 <a:ea typeface="Be Vietnam Pro" pitchFamily="34" charset="-122"/>
                 <a:cs typeface="Be Vietnam Pro" pitchFamily="34" charset="-120"/>
               </a:rPr>
-              <a:t> vững</a:t>
-            </a:r>
-            <a:r>
-              <a:rPr lang="en-US" sz="2250" dirty="0" spc="1" kern="0">
+              <a:t> triệu</a:t>
+            </a:r>
+            <a:r>
+              <a:rPr lang="en-US" sz="2250" dirty="0" spc="0" kern="0">
                 <a:solidFill>
                   <a:srgbClr val="C4C8D6"/>
                 </a:solidFill>
@@ -13863,40 +14154,7 @@
                 <a:ea typeface="Be Vietnam Pro" pitchFamily="34" charset="-122"/>
                 <a:cs typeface="Be Vietnam Pro" pitchFamily="34" charset="-120"/>
               </a:rPr>
-              <a:t> nền</a:t>
-            </a:r>
-            <a:r>
-              <a:rPr lang="en-US" sz="2250" dirty="0" spc="-10" kern="0">
-                <a:solidFill>
-                  <a:srgbClr val="C4C8D6"/>
-                </a:solidFill>
-                <a:latin typeface="Be Vietnam Pro" pitchFamily="34" charset="0"/>
-                <a:ea typeface="Be Vietnam Pro" pitchFamily="34" charset="-122"/>
-                <a:cs typeface="Be Vietnam Pro" pitchFamily="34" charset="-120"/>
-              </a:rPr>
-              <a:t> tảng</a:t>
-            </a:r>
-            <a:r>
-              <a:rPr lang="en-US" sz="2250" dirty="0" spc="3" kern="0">
-                <a:solidFill>
-                  <a:srgbClr val="C4C8D6"/>
-                </a:solidFill>
-                <a:latin typeface="Be Vietnam Pro" pitchFamily="34" charset="0"/>
-                <a:ea typeface="Be Vietnam Pro" pitchFamily="34" charset="-122"/>
-                <a:cs typeface="Be Vietnam Pro" pitchFamily="34" charset="-120"/>
-              </a:rPr>
-              <a:t> của</a:t>
-            </a:r>
-            <a:r>
-              <a:rPr lang="en-US" sz="2250" dirty="0" spc="-5" kern="0">
-                <a:solidFill>
-                  <a:srgbClr val="C4C8D6"/>
-                </a:solidFill>
-                <a:latin typeface="Be Vietnam Pro" pitchFamily="34" charset="0"/>
-                <a:ea typeface="Be Vietnam Pro" pitchFamily="34" charset="-122"/>
-                <a:cs typeface="Be Vietnam Pro" pitchFamily="34" charset="-120"/>
-              </a:rPr>
-              <a:t> DSA.</a:t>
+              <a:t> mã.</a:t>
             </a:r>
             <a:endParaRPr lang="en-US" sz="2250" dirty="0"/>
           </a:p>
@@ -13931,26 +14189,15 @@
               <a:buNone/>
             </a:pPr>
             <a:r>
-              <a:rPr lang="en-US" sz="2100" b="1" dirty="0" spc="-2" kern="0">
-                <a:solidFill>
-                  <a:srgbClr val="14161C"/>
-                </a:solidFill>
-                <a:latin typeface="Be Vietnam Pro" pitchFamily="34" charset="0"/>
-                <a:ea typeface="Be Vietnam Pro" pitchFamily="34" charset="-122"/>
-                <a:cs typeface="Be Vietnam Pro" pitchFamily="34" charset="-120"/>
-              </a:rPr>
-              <a:t>Big</a:t>
-            </a:r>
-            <a:r>
-              <a:rPr lang="en-US" sz="2100" b="1" dirty="0" spc="-1" kern="0">
-                <a:solidFill>
-                  <a:srgbClr val="14161C"/>
-                </a:solidFill>
-                <a:latin typeface="Be Vietnam Pro" pitchFamily="34" charset="0"/>
-                <a:ea typeface="Be Vietnam Pro" pitchFamily="34" charset="-122"/>
-                <a:cs typeface="Be Vietnam Pro" pitchFamily="34" charset="-120"/>
-              </a:rPr>
-              <a:t> O</a:t>
+              <a:rPr lang="en-US" sz="2100" b="1" dirty="0" spc="-5" kern="0">
+                <a:solidFill>
+                  <a:srgbClr val="14161C"/>
+                </a:solidFill>
+                <a:latin typeface="Be Vietnam Pro" pitchFamily="34" charset="0"/>
+                <a:ea typeface="Be Vietnam Pro" pitchFamily="34" charset="-122"/>
+                <a:cs typeface="Be Vietnam Pro" pitchFamily="34" charset="-120"/>
+              </a:rPr>
+              <a:t>20</a:t>
             </a:r>
             <a:endParaRPr lang="en-US" sz="2100" dirty="0"/>
           </a:p>
@@ -13985,26 +14232,15 @@
               <a:buNone/>
             </a:pPr>
             <a:r>
-              <a:rPr lang="en-US" sz="2100" b="1" dirty="0" spc="4" kern="0">
-                <a:solidFill>
-                  <a:srgbClr val="14161C"/>
-                </a:solidFill>
-                <a:latin typeface="Be Vietnam Pro" pitchFamily="34" charset="0"/>
-                <a:ea typeface="Be Vietnam Pro" pitchFamily="34" charset="-122"/>
-                <a:cs typeface="Be Vietnam Pro" pitchFamily="34" charset="-120"/>
-              </a:rPr>
-              <a:t>Sắp</a:t>
-            </a:r>
-            <a:r>
-              <a:rPr lang="en-US" sz="2100" b="1" dirty="0" spc="-22" kern="0">
-                <a:solidFill>
-                  <a:srgbClr val="14161C"/>
-                </a:solidFill>
-                <a:latin typeface="Be Vietnam Pro" pitchFamily="34" charset="0"/>
-                <a:ea typeface="Be Vietnam Pro" pitchFamily="34" charset="-122"/>
-                <a:cs typeface="Be Vietnam Pro" pitchFamily="34" charset="-120"/>
-              </a:rPr>
-              <a:t> xếp</a:t>
+              <a:rPr lang="en-US" sz="2100" b="1" dirty="0" spc="-5" kern="0">
+                <a:solidFill>
+                  <a:srgbClr val="14161C"/>
+                </a:solidFill>
+                <a:latin typeface="Be Vietnam Pro" pitchFamily="34" charset="0"/>
+                <a:ea typeface="Be Vietnam Pro" pitchFamily="34" charset="-122"/>
+                <a:cs typeface="Be Vietnam Pro" pitchFamily="34" charset="-120"/>
+              </a:rPr>
+              <a:t>bisect</a:t>
             </a:r>
             <a:endParaRPr lang="en-US" sz="2100" dirty="0"/>
           </a:p>
@@ -14039,15 +14275,26 @@
               <a:buNone/>
             </a:pPr>
             <a:r>
-              <a:rPr lang="en-US" sz="2100" b="1" dirty="0" spc="-5" kern="0">
-                <a:solidFill>
-                  <a:srgbClr val="14161C"/>
-                </a:solidFill>
-                <a:latin typeface="Be Vietnam Pro" pitchFamily="34" charset="0"/>
-                <a:ea typeface="Be Vietnam Pro" pitchFamily="34" charset="-122"/>
-                <a:cs typeface="Be Vietnam Pro" pitchFamily="34" charset="-120"/>
-              </a:rPr>
-              <a:t>Cây</a:t>
+              <a:rPr lang="en-US" sz="2100" b="1" dirty="0" spc="5" kern="0">
+                <a:solidFill>
+                  <a:srgbClr val="14161C"/>
+                </a:solidFill>
+                <a:latin typeface="Be Vietnam Pro" pitchFamily="34" charset="0"/>
+                <a:ea typeface="Be Vietnam Pro" pitchFamily="34" charset="-122"/>
+                <a:cs typeface="Be Vietnam Pro" pitchFamily="34" charset="-120"/>
+              </a:rPr>
+              <a:t>1</a:t>
+            </a:r>
+            <a:r>
+              <a:rPr lang="en-US" sz="2100" b="1" dirty="0" spc="2" kern="0">
+                <a:solidFill>
+                  <a:srgbClr val="14161C"/>
+                </a:solidFill>
+                <a:latin typeface="Be Vietnam Pro" pitchFamily="34" charset="0"/>
+                <a:ea typeface="Be Vietnam Pro" pitchFamily="34" charset="-122"/>
+                <a:cs typeface="Be Vietnam Pro" pitchFamily="34" charset="-120"/>
+              </a:rPr>
+              <a:t> triệu</a:t>
             </a:r>
             <a:endParaRPr lang="en-US" sz="2100" dirty="0"/>
           </a:p>
@@ -14082,15 +14329,15 @@
               <a:buNone/>
             </a:pPr>
             <a:r>
-              <a:rPr lang="en-US" sz="2100" b="1" dirty="0" spc="-5" kern="0">
-                <a:solidFill>
-                  <a:srgbClr val="14161C"/>
-                </a:solidFill>
-                <a:latin typeface="Be Vietnam Pro" pitchFamily="34" charset="0"/>
-                <a:ea typeface="Be Vietnam Pro" pitchFamily="34" charset="-122"/>
-                <a:cs typeface="Be Vietnam Pro" pitchFamily="34" charset="-120"/>
-              </a:rPr>
-              <a:t>Đồ</a:t>
+              <a:rPr lang="en-US" sz="2100" b="1" dirty="0" spc="2" kern="0">
+                <a:solidFill>
+                  <a:srgbClr val="14161C"/>
+                </a:solidFill>
+                <a:latin typeface="Be Vietnam Pro" pitchFamily="34" charset="0"/>
+                <a:ea typeface="Be Vietnam Pro" pitchFamily="34" charset="-122"/>
+                <a:cs typeface="Be Vietnam Pro" pitchFamily="34" charset="-120"/>
+              </a:rPr>
+              <a:t>tuần</a:t>
             </a:r>
             <a:r>
               <a:rPr lang="en-US" sz="2100" b="1" dirty="0" spc="-3" kern="0">
@@ -14101,7 +14348,7 @@
                 <a:ea typeface="Be Vietnam Pro" pitchFamily="34" charset="-122"/>
                 <a:cs typeface="Be Vietnam Pro" pitchFamily="34" charset="-120"/>
               </a:rPr>
-              <a:t> thị</a:t>
+              <a:t> tự</a:t>
             </a:r>
             <a:endParaRPr lang="en-US" sz="2100" dirty="0"/>
           </a:p>
@@ -14862,15 +15109,37 @@
               <a:t> cuối</a:t>
             </a:r>
             <a:r>
-              <a:rPr lang="en-US" sz="2850" dirty="0" spc="1" kern="0">
-                <a:solidFill>
-                  <a:srgbClr val="14161C"/>
-                </a:solidFill>
-                <a:latin typeface="Be Vietnam Pro" pitchFamily="34" charset="0"/>
-                <a:ea typeface="Be Vietnam Pro" pitchFamily="34" charset="-122"/>
-                <a:cs typeface="Be Vietnam Pro" pitchFamily="34" charset="-120"/>
-              </a:rPr>
-              <a:t> của lộ</a:t>
+              <a:rPr lang="en-US" sz="2850" dirty="0" spc="-12" kern="0">
+                <a:solidFill>
+                  <a:srgbClr val="14161C"/>
+                </a:solidFill>
+                <a:latin typeface="Be Vietnam Pro" pitchFamily="34" charset="0"/>
+                <a:ea typeface="Be Vietnam Pro" pitchFamily="34" charset="-122"/>
+                <a:cs typeface="Be Vietnam Pro" pitchFamily="34" charset="-120"/>
+              </a:rPr>
+              <a:t> với</a:t>
+            </a:r>
+            <a:r>
+              <a:rPr lang="en-US" sz="2850" dirty="0" spc="-1" kern="0">
+                <a:solidFill>
+                  <a:srgbClr val="14161C"/>
+                </a:solidFill>
+                <a:latin typeface="Be Vietnam Pro" pitchFamily="34" charset="0"/>
+                <a:ea typeface="Be Vietnam Pro" pitchFamily="34" charset="-122"/>
+                <a:cs typeface="Be Vietnam Pro" pitchFamily="34" charset="-120"/>
+              </a:rPr>
+              <a:t> dịch</a:t>
+            </a:r>
+            <a:r>
+              <a:rPr lang="en-US" sz="2850" dirty="0" spc="2" kern="0">
+                <a:solidFill>
+                  <a:srgbClr val="14161C"/>
+                </a:solidFill>
+                <a:latin typeface="Be Vietnam Pro" pitchFamily="34" charset="0"/>
+                <a:ea typeface="Be Vietnam Pro" pitchFamily="34" charset="-122"/>
+                <a:cs typeface="Be Vietnam Pro" pitchFamily="34" charset="-120"/>
+              </a:rPr>
+              <a:t> vụ</a:t>
             </a:r>
             <a:r>
               <a:rPr lang="en-US" sz="2850" dirty="0" spc="8" kern="0">
@@ -14881,7 +15150,18 @@
                 <a:ea typeface="Be Vietnam Pro" pitchFamily="34" charset="-122"/>
                 <a:cs typeface="Be Vietnam Pro" pitchFamily="34" charset="-120"/>
               </a:rPr>
-              <a:t> trình.</a:t>
+              <a:t> mượn</a:t>
+            </a:r>
+            <a:r>
+              <a:rPr lang="en-US" sz="2850" dirty="0" spc="-5" kern="0">
+                <a:solidFill>
+                  <a:srgbClr val="14161C"/>
+                </a:solidFill>
+                <a:latin typeface="Be Vietnam Pro" pitchFamily="34" charset="0"/>
+                <a:ea typeface="Be Vietnam Pro" pitchFamily="34" charset="-122"/>
+                <a:cs typeface="Be Vietnam Pro" pitchFamily="34" charset="-120"/>
+              </a:rPr>
+              <a:t> sách.</a:t>
             </a:r>
             <a:endParaRPr lang="en-US" sz="2850" dirty="0"/>
           </a:p>
@@ -15160,6 +15440,39 @@
               <a:t>Bước</a:t>
             </a:r>
             <a:r>
+              <a:rPr lang="en-US" sz="2700" dirty="0" spc="-1" kern="0">
+                <a:solidFill>
+                  <a:srgbClr val="14161C"/>
+                </a:solidFill>
+                <a:latin typeface="Be Vietnam Pro" pitchFamily="34" charset="0"/>
+                <a:ea typeface="Be Vietnam Pro" pitchFamily="34" charset="-122"/>
+                <a:cs typeface="Be Vietnam Pro" pitchFamily="34" charset="-120"/>
+              </a:rPr>
+              <a:t> 11:</a:t>
+            </a:r>
+            <a:r>
+              <a:rPr lang="en-US" sz="2700" dirty="0" spc="10" kern="0">
+                <a:solidFill>
+                  <a:srgbClr val="14161C"/>
+                </a:solidFill>
+                <a:latin typeface="Be Vietnam Pro" pitchFamily="34" charset="0"/>
+                <a:ea typeface="Be Vietnam Pro" pitchFamily="34" charset="-122"/>
+                <a:cs typeface="Be Vietnam Pro" pitchFamily="34" charset="-120"/>
+              </a:rPr>
+              <a:t> đọc</a:t>
+            </a:r>
+            <a:r>
+              <a:rPr lang="en-US" sz="2700" dirty="0" spc="-15" kern="0">
+                <a:solidFill>
+                  <a:srgbClr val="14161C"/>
+                </a:solidFill>
+                <a:latin typeface="Be Vietnam Pro" pitchFamily="34" charset="0"/>
+                <a:ea typeface="Be Vietnam Pro" pitchFamily="34" charset="-122"/>
+                <a:cs typeface="Be Vietnam Pro" pitchFamily="34" charset="-120"/>
+              </a:rPr>
+              <a:t> gợi</a:t>
+            </a:r>
+            <a:r>
               <a:rPr lang="en-US" sz="2700" dirty="0" spc="-3" kern="0">
                 <a:solidFill>
                   <a:srgbClr val="14161C"/>
@@ -15168,29 +15481,7 @@
                 <a:ea typeface="Be Vietnam Pro" pitchFamily="34" charset="-122"/>
                 <a:cs typeface="Be Vietnam Pro" pitchFamily="34" charset="-120"/>
               </a:rPr>
-              <a:t> 9</a:t>
-            </a:r>
-            <a:r>
-              <a:rPr lang="en-US" sz="2700" dirty="0" spc="-16" kern="0">
-                <a:solidFill>
-                  <a:srgbClr val="14161C"/>
-                </a:solidFill>
-                <a:latin typeface="Be Vietnam Pro" pitchFamily="34" charset="0"/>
-                <a:ea typeface="Be Vietnam Pro" pitchFamily="34" charset="-122"/>
-                <a:cs typeface="Be Vietnam Pro" pitchFamily="34" charset="-120"/>
-              </a:rPr>
-              <a:t> gộp</a:t>
-            </a:r>
-            <a:r>
-              <a:rPr lang="en-US" sz="2700" dirty="0" spc="-41" kern="0">
-                <a:solidFill>
-                  <a:srgbClr val="14161C"/>
-                </a:solidFill>
-                <a:latin typeface="Be Vietnam Pro" pitchFamily="34" charset="0"/>
-                <a:ea typeface="Be Vietnam Pro" pitchFamily="34" charset="-122"/>
-                <a:cs typeface="Be Vietnam Pro" pitchFamily="34" charset="-120"/>
-              </a:rPr>
-              <a:t> rất</a:t>
+              <a:t> ý</a:t>
             </a:r>
             <a:r>
               <a:rPr lang="en-US" sz="2700" dirty="0" spc="-2" kern="0">
@@ -15201,29 +15492,18 @@
                 <a:ea typeface="Be Vietnam Pro" pitchFamily="34" charset="-122"/>
                 <a:cs typeface="Be Vietnam Pro" pitchFamily="34" charset="-120"/>
               </a:rPr>
-              <a:t> nhiều</a:t>
-            </a:r>
-            <a:r>
-              <a:rPr lang="en-US" sz="2700" dirty="0" spc="0" kern="0">
-                <a:solidFill>
-                  <a:srgbClr val="14161C"/>
-                </a:solidFill>
-                <a:latin typeface="Be Vietnam Pro" pitchFamily="34" charset="0"/>
-                <a:ea typeface="Be Vietnam Pro" pitchFamily="34" charset="-122"/>
-                <a:cs typeface="Be Vietnam Pro" pitchFamily="34" charset="-120"/>
-              </a:rPr>
-              <a:t> chủ</a:t>
-            </a:r>
-            <a:r>
-              <a:rPr lang="en-US" sz="2700" dirty="0" spc="14" kern="0">
-                <a:solidFill>
-                  <a:srgbClr val="14161C"/>
-                </a:solidFill>
-                <a:latin typeface="Be Vietnam Pro" pitchFamily="34" charset="0"/>
-                <a:ea typeface="Be Vietnam Pro" pitchFamily="34" charset="-122"/>
-                <a:cs typeface="Be Vietnam Pro" pitchFamily="34" charset="-120"/>
-              </a:rPr>
-              <a:t> đề</a:t>
+              <a:t> của</a:t>
+            </a:r>
+            <a:r>
+              <a:rPr lang="en-US" sz="2700" dirty="0" spc="-1" kern="0">
+                <a:solidFill>
+                  <a:srgbClr val="14161C"/>
+                </a:solidFill>
+                <a:latin typeface="Be Vietnam Pro" pitchFamily="34" charset="0"/>
+                <a:ea typeface="Be Vietnam Pro" pitchFamily="34" charset="-122"/>
+                <a:cs typeface="Be Vietnam Pro" pitchFamily="34" charset="-120"/>
+              </a:rPr>
+              <a:t> công cụ</a:t>
             </a:r>
             <a:endParaRPr lang="en-US" sz="2700" dirty="0"/>
           </a:p>
@@ -15235,6 +15515,17 @@
               <a:buNone/>
             </a:pPr>
             <a:r>
+              <a:rPr lang="en-US" sz="2700" dirty="0" spc="0" kern="0">
+                <a:solidFill>
+                  <a:srgbClr val="14161C"/>
+                </a:solidFill>
+                <a:latin typeface="Be Vietnam Pro" pitchFamily="34" charset="0"/>
+                <a:ea typeface="Be Vietnam Pro" pitchFamily="34" charset="-122"/>
+                <a:cs typeface="Be Vietnam Pro" pitchFamily="34" charset="-120"/>
+              </a:rPr>
+              <a:t>như</a:t>
+            </a:r>
+            <a:r>
               <a:rPr lang="en-US" sz="2700" dirty="0" spc="-1" kern="0">
                 <a:solidFill>
                   <a:srgbClr val="14161C"/>
@@ -15243,40 +15534,29 @@
                 <a:ea typeface="Be Vietnam Pro" pitchFamily="34" charset="-122"/>
                 <a:cs typeface="Be Vietnam Pro" pitchFamily="34" charset="-120"/>
               </a:rPr>
-              <a:t>của</a:t>
-            </a:r>
-            <a:r>
-              <a:rPr lang="en-US" sz="2700" dirty="0" spc="-4" kern="0">
-                <a:solidFill>
-                  <a:srgbClr val="14161C"/>
-                </a:solidFill>
-                <a:latin typeface="Be Vietnam Pro" pitchFamily="34" charset="0"/>
-                <a:ea typeface="Be Vietnam Pro" pitchFamily="34" charset="-122"/>
-                <a:cs typeface="Be Vietnam Pro" pitchFamily="34" charset="-120"/>
-              </a:rPr>
-              <a:t> thiết</a:t>
-            </a:r>
-            <a:r>
-              <a:rPr lang="en-US" sz="2700" dirty="0" spc="-45" kern="0">
-                <a:solidFill>
-                  <a:srgbClr val="14161C"/>
-                </a:solidFill>
-                <a:latin typeface="Be Vietnam Pro" pitchFamily="34" charset="0"/>
-                <a:ea typeface="Be Vietnam Pro" pitchFamily="34" charset="-122"/>
-                <a:cs typeface="Be Vietnam Pro" pitchFamily="34" charset="-120"/>
-              </a:rPr>
-              <a:t> kế</a:t>
-            </a:r>
-            <a:r>
-              <a:rPr lang="en-US" sz="2700" dirty="0" spc="-4" kern="0">
-                <a:solidFill>
-                  <a:srgbClr val="14161C"/>
-                </a:solidFill>
-                <a:latin typeface="Be Vietnam Pro" pitchFamily="34" charset="0"/>
-                <a:ea typeface="Be Vietnam Pro" pitchFamily="34" charset="-122"/>
-                <a:cs typeface="Be Vietnam Pro" pitchFamily="34" charset="-120"/>
-              </a:rPr>
-              <a:t> hệ</a:t>
+              <a:t> mã</a:t>
+            </a:r>
+            <a:r>
+              <a:rPr lang="en-US" sz="2700" dirty="0" spc="-2" kern="0">
+                <a:solidFill>
+                  <a:srgbClr val="14161C"/>
+                </a:solidFill>
+                <a:latin typeface="Be Vietnam Pro" pitchFamily="34" charset="0"/>
+                <a:ea typeface="Be Vietnam Pro" pitchFamily="34" charset="-122"/>
+                <a:cs typeface="Be Vietnam Pro" pitchFamily="34" charset="-120"/>
+              </a:rPr>
+              <a:t> của</a:t>
+            </a:r>
+            <a:r>
+              <a:rPr lang="en-US" sz="2700" dirty="0" spc="6" kern="0">
+                <a:solidFill>
+                  <a:srgbClr val="14161C"/>
+                </a:solidFill>
+                <a:latin typeface="Be Vietnam Pro" pitchFamily="34" charset="0"/>
+                <a:ea typeface="Be Vietnam Pro" pitchFamily="34" charset="-122"/>
+                <a:cs typeface="Be Vietnam Pro" pitchFamily="34" charset="-120"/>
+              </a:rPr>
+              <a:t> người</a:t>
             </a:r>
             <a:r>
               <a:rPr lang="en-US" sz="2700" dirty="0" spc="-1" kern="0">
@@ -15287,7 +15567,7 @@
                 <a:ea typeface="Be Vietnam Pro" pitchFamily="34" charset="-122"/>
                 <a:cs typeface="Be Vietnam Pro" pitchFamily="34" charset="-120"/>
               </a:rPr>
-              <a:t> thống.</a:t>
+              <a:t> lạ.</a:t>
             </a:r>
             <a:endParaRPr lang="en-US" sz="2700" dirty="0"/>
           </a:p>
@@ -15485,48 +15765,114 @@
               <a:buNone/>
             </a:pPr>
             <a:r>
-              <a:rPr lang="en-US" sz="2250" dirty="0" spc="-2" kern="0">
-                <a:solidFill>
-                  <a:srgbClr val="14161C"/>
-                </a:solidFill>
-                <a:latin typeface="Be Vietnam Pro" pitchFamily="34" charset="0"/>
-                <a:ea typeface="Be Vietnam Pro" pitchFamily="34" charset="-122"/>
-                <a:cs typeface="Be Vietnam Pro" pitchFamily="34" charset="-120"/>
-              </a:rPr>
-              <a:t>Học</a:t>
-            </a:r>
-            <a:r>
-              <a:rPr lang="en-US" sz="2250" dirty="0" spc="2" kern="0">
-                <a:solidFill>
-                  <a:srgbClr val="14161C"/>
-                </a:solidFill>
-                <a:latin typeface="Be Vietnam Pro" pitchFamily="34" charset="0"/>
-                <a:ea typeface="Be Vietnam Pro" pitchFamily="34" charset="-122"/>
-                <a:cs typeface="Be Vietnam Pro" pitchFamily="34" charset="-120"/>
-              </a:rPr>
-              <a:t> các</a:t>
-            </a:r>
-            <a:r>
-              <a:rPr lang="en-US" sz="2250" dirty="0" spc="-2" kern="0">
-                <a:solidFill>
-                  <a:srgbClr val="14161C"/>
-                </a:solidFill>
-                <a:latin typeface="Be Vietnam Pro" pitchFamily="34" charset="0"/>
-                <a:ea typeface="Be Vietnam Pro" pitchFamily="34" charset="-122"/>
-                <a:cs typeface="Be Vietnam Pro" pitchFamily="34" charset="-120"/>
-              </a:rPr>
-              <a:t> khái niệm</a:t>
-            </a:r>
-            <a:r>
-              <a:rPr lang="en-US" sz="2250" dirty="0" spc="2" kern="0">
-                <a:solidFill>
-                  <a:srgbClr val="14161C"/>
-                </a:solidFill>
-                <a:latin typeface="Be Vietnam Pro" pitchFamily="34" charset="0"/>
-                <a:ea typeface="Be Vietnam Pro" pitchFamily="34" charset="-122"/>
-                <a:cs typeface="Be Vietnam Pro" pitchFamily="34" charset="-120"/>
-              </a:rPr>
-              <a:t> như:</a:t>
+              <a:rPr lang="en-US" sz="2250" dirty="0" spc="-23" kern="0">
+                <a:solidFill>
+                  <a:srgbClr val="14161C"/>
+                </a:solidFill>
+                <a:latin typeface="Be Vietnam Pro" pitchFamily="34" charset="0"/>
+                <a:ea typeface="Be Vietnam Pro" pitchFamily="34" charset="-122"/>
+                <a:cs typeface="Be Vietnam Pro" pitchFamily="34" charset="-120"/>
+              </a:rPr>
+              <a:t>Ngày</a:t>
+            </a:r>
+            <a:r>
+              <a:rPr lang="en-US" sz="2250" dirty="0" spc="1" kern="0">
+                <a:solidFill>
+                  <a:srgbClr val="14161C"/>
+                </a:solidFill>
+                <a:latin typeface="Be Vietnam Pro" pitchFamily="34" charset="0"/>
+                <a:ea typeface="Be Vietnam Pro" pitchFamily="34" charset="-122"/>
+                <a:cs typeface="Be Vietnam Pro" pitchFamily="34" charset="-120"/>
+              </a:rPr>
+              <a:t> hội</a:t>
+            </a:r>
+            <a:r>
+              <a:rPr lang="en-US" sz="2250" dirty="0" spc="7" kern="0">
+                <a:solidFill>
+                  <a:srgbClr val="14161C"/>
+                </a:solidFill>
+                <a:latin typeface="Be Vietnam Pro" pitchFamily="34" charset="0"/>
+                <a:ea typeface="Be Vietnam Pro" pitchFamily="34" charset="-122"/>
+                <a:cs typeface="Be Vietnam Pro" pitchFamily="34" charset="-120"/>
+              </a:rPr>
+              <a:t> mượn</a:t>
+            </a:r>
+            <a:r>
+              <a:rPr lang="en-US" sz="2250" dirty="0" spc="-3" kern="0">
+                <a:solidFill>
+                  <a:srgbClr val="14161C"/>
+                </a:solidFill>
+                <a:latin typeface="Be Vietnam Pro" pitchFamily="34" charset="0"/>
+                <a:ea typeface="Be Vietnam Pro" pitchFamily="34" charset="-122"/>
+                <a:cs typeface="Be Vietnam Pro" pitchFamily="34" charset="-120"/>
+              </a:rPr>
+              <a:t> sách,</a:t>
+            </a:r>
+            <a:r>
+              <a:rPr lang="en-US" sz="2250" dirty="0" spc="-1" kern="0">
+                <a:solidFill>
+                  <a:srgbClr val="14161C"/>
+                </a:solidFill>
+                <a:latin typeface="Be Vietnam Pro" pitchFamily="34" charset="0"/>
+                <a:ea typeface="Be Vietnam Pro" pitchFamily="34" charset="-122"/>
+                <a:cs typeface="Be Vietnam Pro" pitchFamily="34" charset="-120"/>
+              </a:rPr>
+              <a:t> nhiều</a:t>
+            </a:r>
+            <a:r>
+              <a:rPr lang="en-US" sz="2250" dirty="0" spc="5" kern="0">
+                <a:solidFill>
+                  <a:srgbClr val="14161C"/>
+                </a:solidFill>
+                <a:latin typeface="Be Vietnam Pro" pitchFamily="34" charset="0"/>
+                <a:ea typeface="Be Vietnam Pro" pitchFamily="34" charset="-122"/>
+                <a:cs typeface="Be Vietnam Pro" pitchFamily="34" charset="-120"/>
+              </a:rPr>
+              <a:t> người</a:t>
+            </a:r>
+            <a:r>
+              <a:rPr lang="en-US" sz="2250" dirty="0" spc="-18" kern="0">
+                <a:solidFill>
+                  <a:srgbClr val="14161C"/>
+                </a:solidFill>
+                <a:latin typeface="Be Vietnam Pro" pitchFamily="34" charset="0"/>
+                <a:ea typeface="Be Vietnam Pro" pitchFamily="34" charset="-122"/>
+                <a:cs typeface="Be Vietnam Pro" pitchFamily="34" charset="-120"/>
+              </a:rPr>
+              <a:t> xem</a:t>
+            </a:r>
+            <a:r>
+              <a:rPr lang="en-US" sz="2250" dirty="0" spc="-4" kern="0">
+                <a:solidFill>
+                  <a:srgbClr val="14161C"/>
+                </a:solidFill>
+                <a:latin typeface="Be Vietnam Pro" pitchFamily="34" charset="0"/>
+                <a:ea typeface="Be Vietnam Pro" pitchFamily="34" charset="-122"/>
+                <a:cs typeface="Be Vietnam Pro" pitchFamily="34" charset="-120"/>
+              </a:rPr>
+              <a:t> một</a:t>
+            </a:r>
+            <a:r>
+              <a:rPr lang="en-US" sz="2250" dirty="0" spc="1" kern="0">
+                <a:solidFill>
+                  <a:srgbClr val="14161C"/>
+                </a:solidFill>
+                <a:latin typeface="Be Vietnam Pro" pitchFamily="34" charset="0"/>
+                <a:ea typeface="Be Vietnam Pro" pitchFamily="34" charset="-122"/>
+                <a:cs typeface="Be Vietnam Pro" pitchFamily="34" charset="-120"/>
+              </a:rPr>
+              <a:t> danh</a:t>
+            </a:r>
+            <a:r>
+              <a:rPr lang="en-US" sz="2250" dirty="0" spc="-1" kern="0">
+                <a:solidFill>
+                  <a:srgbClr val="14161C"/>
+                </a:solidFill>
+                <a:latin typeface="Be Vietnam Pro" pitchFamily="34" charset="0"/>
+                <a:ea typeface="Be Vietnam Pro" pitchFamily="34" charset="-122"/>
+                <a:cs typeface="Be Vietnam Pro" pitchFamily="34" charset="-120"/>
+              </a:rPr>
+              <a:t> sách.</a:t>
             </a:r>
             <a:endParaRPr lang="en-US" sz="2250" dirty="0"/>
           </a:p>
@@ -15557,7 +15903,7 @@
               <a:buNone/>
             </a:pPr>
             <a:r>
-              <a:rPr lang="en-US" sz="2100" b="1" dirty="0" spc="-3" kern="0">
+              <a:rPr lang="en-US" sz="2100" b="1" dirty="0" spc="-7" kern="0">
                 <a:solidFill>
                   <a:srgbClr val="6D28D9"/>
                 </a:solidFill>
@@ -15565,10 +15911,10 @@
                 <a:ea typeface="Be Vietnam Pro" pitchFamily="34" charset="-122"/>
                 <a:cs typeface="Be Vietnam Pro" pitchFamily="34" charset="-120"/>
               </a:rPr>
-              <a:t>mạng,</a:t>
-            </a:r>
-            <a:r>
-              <a:rPr lang="en-US" sz="2100" b="1" dirty="0" spc="-6" kern="0">
+              <a:t>bộ</a:t>
+            </a:r>
+            <a:r>
+              <a:rPr lang="en-US" sz="2100" b="1" dirty="0" spc="-4" kern="0">
                 <a:solidFill>
                   <a:srgbClr val="6D28D9"/>
                 </a:solidFill>
@@ -15576,10 +15922,10 @@
                 <a:ea typeface="Be Vietnam Pro" pitchFamily="34" charset="-122"/>
                 <a:cs typeface="Be Vietnam Pro" pitchFamily="34" charset="-120"/>
               </a:rPr>
-              <a:t> bộ</a:t>
-            </a:r>
-            <a:r>
-              <a:rPr lang="en-US" sz="2100" b="1" dirty="0" spc="-4" kern="0">
+              <a:t> nhớ</a:t>
+            </a:r>
+            <a:r>
+              <a:rPr lang="en-US" sz="2100" b="1" dirty="0" spc="-2" kern="0">
                 <a:solidFill>
                   <a:srgbClr val="6D28D9"/>
                 </a:solidFill>
@@ -15587,10 +15933,10 @@
                 <a:ea typeface="Be Vietnam Pro" pitchFamily="34" charset="-122"/>
                 <a:cs typeface="Be Vietnam Pro" pitchFamily="34" charset="-120"/>
               </a:rPr>
-              <a:t> nhớ</a:t>
-            </a:r>
-            <a:r>
-              <a:rPr lang="en-US" sz="2100" b="1" dirty="0" spc="-2" kern="0">
+              <a:t> đệm</a:t>
+            </a:r>
+            <a:r>
+              <a:rPr lang="en-US" sz="2100" b="1" dirty="0" spc="-19" kern="0">
                 <a:solidFill>
                   <a:srgbClr val="6D28D9"/>
                 </a:solidFill>
@@ -15598,18 +15944,7 @@
                 <a:ea typeface="Be Vietnam Pro" pitchFamily="34" charset="-122"/>
                 <a:cs typeface="Be Vietnam Pro" pitchFamily="34" charset="-120"/>
               </a:rPr>
-              <a:t> đệm,</a:t>
-            </a:r>
-            <a:r>
-              <a:rPr lang="en-US" sz="2100" b="1" dirty="0" spc="0" kern="0">
-                <a:solidFill>
-                  <a:srgbClr val="6D28D9"/>
-                </a:solidFill>
-                <a:latin typeface="Be Vietnam Pro" pitchFamily="34" charset="0"/>
-                <a:ea typeface="Be Vietnam Pro" pitchFamily="34" charset="-122"/>
-                <a:cs typeface="Be Vietnam Pro" pitchFamily="34" charset="-120"/>
-              </a:rPr>
-              <a:t> CDN,</a:t>
+              <a:t> và</a:t>
             </a:r>
             <a:r>
               <a:rPr lang="en-US" sz="2100" b="1" dirty="0" spc="-1" kern="0">
@@ -15802,48 +16137,59 @@
               <a:buNone/>
             </a:pPr>
             <a:r>
-              <a:rPr lang="en-US" sz="2250" dirty="0" spc="-1" kern="0">
-                <a:solidFill>
-                  <a:srgbClr val="14161C"/>
-                </a:solidFill>
-                <a:latin typeface="Be Vietnam Pro" pitchFamily="34" charset="0"/>
-                <a:ea typeface="Be Vietnam Pro" pitchFamily="34" charset="-122"/>
-                <a:cs typeface="Be Vietnam Pro" pitchFamily="34" charset="-120"/>
-              </a:rPr>
-              <a:t>Thành thạo</a:t>
-            </a:r>
-            <a:r>
-              <a:rPr lang="en-US" sz="2250" dirty="0" spc="1" kern="0">
-                <a:solidFill>
-                  <a:srgbClr val="14161C"/>
-                </a:solidFill>
-                <a:latin typeface="Be Vietnam Pro" pitchFamily="34" charset="0"/>
-                <a:ea typeface="Be Vietnam Pro" pitchFamily="34" charset="-122"/>
-                <a:cs typeface="Be Vietnam Pro" pitchFamily="34" charset="-120"/>
-              </a:rPr>
-              <a:t> cách áp</a:t>
-            </a:r>
-            <a:r>
-              <a:rPr lang="en-US" sz="2250" dirty="0" spc="3" kern="0">
-                <a:solidFill>
-                  <a:srgbClr val="14161C"/>
-                </a:solidFill>
-                <a:latin typeface="Be Vietnam Pro" pitchFamily="34" charset="0"/>
-                <a:ea typeface="Be Vietnam Pro" pitchFamily="34" charset="-122"/>
-                <a:cs typeface="Be Vietnam Pro" pitchFamily="34" charset="-120"/>
-              </a:rPr>
-              <a:t> dụng</a:t>
-            </a:r>
-            <a:r>
-              <a:rPr lang="en-US" sz="2250" dirty="0" spc="2" kern="0">
-                <a:solidFill>
-                  <a:srgbClr val="14161C"/>
-                </a:solidFill>
-                <a:latin typeface="Be Vietnam Pro" pitchFamily="34" charset="0"/>
-                <a:ea typeface="Be Vietnam Pro" pitchFamily="34" charset="-122"/>
-                <a:cs typeface="Be Vietnam Pro" pitchFamily="34" charset="-120"/>
-              </a:rPr>
-              <a:t> các</a:t>
+              <a:rPr lang="en-US" sz="2250" dirty="0" spc="-41" kern="0">
+                <a:solidFill>
+                  <a:srgbClr val="14161C"/>
+                </a:solidFill>
+                <a:latin typeface="Be Vietnam Pro" pitchFamily="34" charset="0"/>
+                <a:ea typeface="Be Vietnam Pro" pitchFamily="34" charset="-122"/>
+                <a:cs typeface="Be Vietnam Pro" pitchFamily="34" charset="-120"/>
+              </a:rPr>
+              <a:t>Truyền</a:t>
+            </a:r>
+            <a:r>
+              <a:rPr lang="en-US" sz="2250" dirty="0" spc="-2" kern="0">
+                <a:solidFill>
+                  <a:srgbClr val="14161C"/>
+                </a:solidFill>
+                <a:latin typeface="Be Vietnam Pro" pitchFamily="34" charset="0"/>
+                <a:ea typeface="Be Vietnam Pro" pitchFamily="34" charset="-122"/>
+                <a:cs typeface="Be Vietnam Pro" pitchFamily="34" charset="-120"/>
+              </a:rPr>
+              <a:t> bảng</a:t>
+            </a:r>
+            <a:r>
+              <a:rPr lang="en-US" sz="2250" dirty="0" spc="-3" kern="0">
+                <a:solidFill>
+                  <a:srgbClr val="14161C"/>
+                </a:solidFill>
+                <a:latin typeface="Be Vietnam Pro" pitchFamily="34" charset="0"/>
+                <a:ea typeface="Be Vietnam Pro" pitchFamily="34" charset="-122"/>
+                <a:cs typeface="Be Vietnam Pro" pitchFamily="34" charset="-120"/>
+              </a:rPr>
+              <a:t> giảm</a:t>
+            </a:r>
+            <a:r>
+              <a:rPr lang="en-US" sz="2250" dirty="0" spc="-2" kern="0">
+                <a:solidFill>
+                  <a:srgbClr val="14161C"/>
+                </a:solidFill>
+                <a:latin typeface="Be Vietnam Pro" pitchFamily="34" charset="0"/>
+                <a:ea typeface="Be Vietnam Pro" pitchFamily="34" charset="-122"/>
+                <a:cs typeface="Be Vietnam Pro" pitchFamily="34" charset="-120"/>
+              </a:rPr>
+              <a:t> giá</a:t>
+            </a:r>
+            <a:r>
+              <a:rPr lang="en-US" sz="2250" dirty="0" spc="-14" kern="0">
+                <a:solidFill>
+                  <a:srgbClr val="14161C"/>
+                </a:solidFill>
+                <a:latin typeface="Be Vietnam Pro" pitchFamily="34" charset="0"/>
+                <a:ea typeface="Be Vietnam Pro" pitchFamily="34" charset="-122"/>
+                <a:cs typeface="Be Vietnam Pro" pitchFamily="34" charset="-120"/>
+              </a:rPr>
+              <a:t> vào</a:t>
             </a:r>
             <a:r>
               <a:rPr lang="en-US" sz="2250" dirty="0" spc="0" kern="0">
@@ -15854,7 +16200,7 @@
                 <a:ea typeface="Be Vietnam Pro" pitchFamily="34" charset="-122"/>
                 <a:cs typeface="Be Vietnam Pro" pitchFamily="34" charset="-120"/>
               </a:rPr>
-              <a:t> mẫu.</a:t>
+              <a:t> hàm.</a:t>
             </a:r>
             <a:endParaRPr lang="en-US" sz="2250" dirty="0"/>
           </a:p>
@@ -15896,7 +16242,7 @@
               <a:t>dependency</a:t>
             </a:r>
             <a:r>
-              <a:rPr lang="en-US" sz="2100" b="1" dirty="0" spc="-6" kern="0">
+              <a:rPr lang="en-US" sz="2100" b="1" dirty="0" spc="-7" kern="0">
                 <a:solidFill>
                   <a:srgbClr val="6D28D9"/>
                 </a:solidFill>
@@ -15904,18 +16250,7 @@
                 <a:ea typeface="Be Vietnam Pro" pitchFamily="34" charset="-122"/>
                 <a:cs typeface="Be Vietnam Pro" pitchFamily="34" charset="-120"/>
               </a:rPr>
-              <a:t> injection, factory,</a:t>
-            </a:r>
-            <a:r>
-              <a:rPr lang="en-US" sz="2100" b="1" dirty="0" spc="-18" kern="0">
-                <a:solidFill>
-                  <a:srgbClr val="6D28D9"/>
-                </a:solidFill>
-                <a:latin typeface="Be Vietnam Pro" pitchFamily="34" charset="0"/>
-                <a:ea typeface="Be Vietnam Pro" pitchFamily="34" charset="-122"/>
-                <a:cs typeface="Be Vietnam Pro" pitchFamily="34" charset="-120"/>
-              </a:rPr>
-              <a:t> proxy</a:t>
+              <a:t> injection</a:t>
             </a:r>
             <a:endParaRPr lang="en-US" sz="2100" dirty="0"/>
           </a:p>
@@ -16075,26 +16410,48 @@
               <a:buNone/>
             </a:pPr>
             <a:r>
-              <a:rPr lang="en-US" sz="2250" dirty="0" spc="-3" kern="0">
-                <a:solidFill>
-                  <a:srgbClr val="14161C"/>
-                </a:solidFill>
-                <a:latin typeface="Be Vietnam Pro" pitchFamily="34" charset="0"/>
-                <a:ea typeface="Be Vietnam Pro" pitchFamily="34" charset="-122"/>
-                <a:cs typeface="Be Vietnam Pro" pitchFamily="34" charset="-120"/>
-              </a:rPr>
-              <a:t>Để</a:t>
-            </a:r>
-            <a:r>
-              <a:rPr lang="en-US" sz="2250" dirty="0" spc="-1" kern="0">
-                <a:solidFill>
-                  <a:srgbClr val="14161C"/>
-                </a:solidFill>
-                <a:latin typeface="Be Vietnam Pro" pitchFamily="34" charset="0"/>
-                <a:ea typeface="Be Vietnam Pro" pitchFamily="34" charset="-122"/>
-                <a:cs typeface="Be Vietnam Pro" pitchFamily="34" charset="-120"/>
-              </a:rPr>
-              <a:t> nghề</a:t>
+              <a:rPr lang="en-US" sz="2250" dirty="0" spc="-4" kern="0">
+                <a:solidFill>
+                  <a:srgbClr val="14161C"/>
+                </a:solidFill>
+                <a:latin typeface="Be Vietnam Pro" pitchFamily="34" charset="0"/>
+                <a:ea typeface="Be Vietnam Pro" pitchFamily="34" charset="-122"/>
+                <a:cs typeface="Be Vietnam Pro" pitchFamily="34" charset="-120"/>
+              </a:rPr>
+              <a:t>Hiểu</a:t>
+            </a:r>
+            <a:r>
+              <a:rPr lang="en-US" sz="2250" dirty="0" spc="-11" kern="0">
+                <a:solidFill>
+                  <a:srgbClr val="14161C"/>
+                </a:solidFill>
+                <a:latin typeface="Be Vietnam Pro" pitchFamily="34" charset="0"/>
+                <a:ea typeface="Be Vietnam Pro" pitchFamily="34" charset="-122"/>
+                <a:cs typeface="Be Vietnam Pro" pitchFamily="34" charset="-120"/>
+              </a:rPr>
+              <a:t> gợi</a:t>
+            </a:r>
+            <a:r>
+              <a:rPr lang="en-US" sz="2250" dirty="0" spc="1" kern="0">
+                <a:solidFill>
+                  <a:srgbClr val="14161C"/>
+                </a:solidFill>
+                <a:latin typeface="Be Vietnam Pro" pitchFamily="34" charset="0"/>
+                <a:ea typeface="Be Vietnam Pro" pitchFamily="34" charset="-122"/>
+                <a:cs typeface="Be Vietnam Pro" pitchFamily="34" charset="-120"/>
+              </a:rPr>
+              <a:t> ý</a:t>
+            </a:r>
+            <a:r>
+              <a:rPr lang="en-US" sz="2250" dirty="0" spc="-23" kern="0">
+                <a:solidFill>
+                  <a:srgbClr val="14161C"/>
+                </a:solidFill>
+                <a:latin typeface="Be Vietnam Pro" pitchFamily="34" charset="0"/>
+                <a:ea typeface="Be Vietnam Pro" pitchFamily="34" charset="-122"/>
+                <a:cs typeface="Be Vietnam Pro" pitchFamily="34" charset="-120"/>
+              </a:rPr>
+              <a:t> rồi</a:t>
             </a:r>
             <a:r>
               <a:rPr lang="en-US" sz="2250" dirty="0" spc="0" kern="0">
@@ -16105,51 +16462,18 @@
                 <a:ea typeface="Be Vietnam Pro" pitchFamily="34" charset="-122"/>
                 <a:cs typeface="Be Vietnam Pro" pitchFamily="34" charset="-120"/>
               </a:rPr>
-              <a:t> nghiệp</a:t>
-            </a:r>
-            <a:r>
-              <a:rPr lang="en-US" sz="2250" dirty="0" spc="-2" kern="0">
-                <a:solidFill>
-                  <a:srgbClr val="14161C"/>
-                </a:solidFill>
-                <a:latin typeface="Be Vietnam Pro" pitchFamily="34" charset="0"/>
-                <a:ea typeface="Be Vietnam Pro" pitchFamily="34" charset="-122"/>
-                <a:cs typeface="Be Vietnam Pro" pitchFamily="34" charset="-120"/>
-              </a:rPr>
-              <a:t> bền</a:t>
-            </a:r>
-            <a:r>
-              <a:rPr lang="en-US" sz="2250" dirty="0" spc="-11" kern="0">
-                <a:solidFill>
-                  <a:srgbClr val="14161C"/>
-                </a:solidFill>
-                <a:latin typeface="Be Vietnam Pro" pitchFamily="34" charset="0"/>
-                <a:ea typeface="Be Vietnam Pro" pitchFamily="34" charset="-122"/>
-                <a:cs typeface="Be Vietnam Pro" pitchFamily="34" charset="-120"/>
-              </a:rPr>
-              <a:t> với</a:t>
-            </a:r>
-            <a:r>
-              <a:rPr lang="en-US" sz="2250" dirty="0" spc="5" kern="0">
-                <a:solidFill>
-                  <a:srgbClr val="14161C"/>
-                </a:solidFill>
-                <a:latin typeface="Be Vietnam Pro" pitchFamily="34" charset="0"/>
-                <a:ea typeface="Be Vietnam Pro" pitchFamily="34" charset="-122"/>
-                <a:cs typeface="Be Vietnam Pro" pitchFamily="34" charset="-120"/>
-              </a:rPr>
-              <a:t> tương</a:t>
-            </a:r>
-            <a:r>
-              <a:rPr lang="en-US" sz="2250" dirty="0" spc="-1" kern="0">
-                <a:solidFill>
-                  <a:srgbClr val="14161C"/>
-                </a:solidFill>
-                <a:latin typeface="Be Vietnam Pro" pitchFamily="34" charset="0"/>
-                <a:ea typeface="Be Vietnam Pro" pitchFamily="34" charset="-122"/>
-                <a:cs typeface="Be Vietnam Pro" pitchFamily="34" charset="-120"/>
-              </a:rPr>
-              <a:t> lai.</a:t>
+              <a:t> mới</a:t>
+            </a:r>
+            <a:r>
+              <a:rPr lang="en-US" sz="2250" dirty="0" spc="1" kern="0">
+                <a:solidFill>
+                  <a:srgbClr val="14161C"/>
+                </a:solidFill>
+                <a:latin typeface="Be Vietnam Pro" pitchFamily="34" charset="0"/>
+                <a:ea typeface="Be Vietnam Pro" pitchFamily="34" charset="-122"/>
+                <a:cs typeface="Be Vietnam Pro" pitchFamily="34" charset="-120"/>
+              </a:rPr>
+              <a:t> nhận.</a:t>
             </a:r>
             <a:endParaRPr lang="en-US" sz="2250" dirty="0"/>
           </a:p>
@@ -16180,6 +16504,50 @@
               <a:buNone/>
             </a:pPr>
             <a:r>
+              <a:rPr lang="en-US" sz="2100" b="1" dirty="0" spc="-7" kern="0">
+                <a:solidFill>
+                  <a:srgbClr val="6D28D9"/>
+                </a:solidFill>
+                <a:latin typeface="Be Vietnam Pro" pitchFamily="34" charset="0"/>
+                <a:ea typeface="Be Vietnam Pro" pitchFamily="34" charset="-122"/>
+                <a:cs typeface="Be Vietnam Pro" pitchFamily="34" charset="-120"/>
+              </a:rPr>
+              <a:t>kiểm</a:t>
+            </a:r>
+            <a:r>
+              <a:rPr lang="en-US" sz="2100" b="1" dirty="0" spc="-1" kern="0">
+                <a:solidFill>
+                  <a:srgbClr val="6D28D9"/>
+                </a:solidFill>
+                <a:latin typeface="Be Vietnam Pro" pitchFamily="34" charset="0"/>
+                <a:ea typeface="Be Vietnam Pro" pitchFamily="34" charset="-122"/>
+                <a:cs typeface="Be Vietnam Pro" pitchFamily="34" charset="-120"/>
+              </a:rPr>
+              <a:t> lại</a:t>
+            </a:r>
+            <a:r>
+              <a:rPr lang="en-US" sz="2100" b="1" dirty="0" spc="-3" kern="0">
+                <a:solidFill>
+                  <a:srgbClr val="6D28D9"/>
+                </a:solidFill>
+                <a:latin typeface="Be Vietnam Pro" pitchFamily="34" charset="0"/>
+                <a:ea typeface="Be Vietnam Pro" pitchFamily="34" charset="-122"/>
+                <a:cs typeface="Be Vietnam Pro" pitchFamily="34" charset="-120"/>
+              </a:rPr>
+              <a:t> bằng</a:t>
+            </a:r>
+            <a:r>
+              <a:rPr lang="en-US" sz="2100" b="1" dirty="0" spc="-6" kern="0">
+                <a:solidFill>
+                  <a:srgbClr val="6D28D9"/>
+                </a:solidFill>
+                <a:latin typeface="Be Vietnam Pro" pitchFamily="34" charset="0"/>
+                <a:ea typeface="Be Vietnam Pro" pitchFamily="34" charset="-122"/>
+                <a:cs typeface="Be Vietnam Pro" pitchFamily="34" charset="-120"/>
+              </a:rPr>
+              <a:t> kiểm</a:t>
+            </a:r>
+            <a:r>
               <a:rPr lang="en-US" sz="2100" b="1" dirty="0" spc="-2" kern="0">
                 <a:solidFill>
                   <a:srgbClr val="6D28D9"/>
@@ -16188,10 +16556,10 @@
                 <a:ea typeface="Be Vietnam Pro" pitchFamily="34" charset="-122"/>
                 <a:cs typeface="Be Vietnam Pro" pitchFamily="34" charset="-120"/>
               </a:rPr>
-              <a:t>GitHub</a:t>
-            </a:r>
-            <a:r>
-              <a:rPr lang="en-US" sz="2100" b="1" dirty="0" spc="-7" kern="0">
+              <a:t> thử</a:t>
+            </a:r>
+            <a:r>
+              <a:rPr lang="en-US" sz="2100" b="1" dirty="0" spc="-4" kern="0">
                 <a:solidFill>
                   <a:srgbClr val="6D28D9"/>
                 </a:solidFill>
@@ -16199,10 +16567,10 @@
                 <a:ea typeface="Be Vietnam Pro" pitchFamily="34" charset="-122"/>
                 <a:cs typeface="Be Vietnam Pro" pitchFamily="34" charset="-120"/>
               </a:rPr>
-              <a:t> Copilot,</a:t>
-            </a:r>
-            <a:r>
-              <a:rPr lang="en-US" sz="2100" b="1" dirty="0" spc="-35" kern="0">
+              <a:t> tự</a:t>
+            </a:r>
+            <a:r>
+              <a:rPr lang="en-US" sz="2100" b="1" dirty="0" spc="-3" kern="0">
                 <a:solidFill>
                   <a:srgbClr val="6D28D9"/>
                 </a:solidFill>
@@ -16210,18 +16578,7 @@
                 <a:ea typeface="Be Vietnam Pro" pitchFamily="34" charset="-122"/>
                 <a:cs typeface="Be Vietnam Pro" pitchFamily="34" charset="-120"/>
               </a:rPr>
-              <a:t> ChatGPT,</a:t>
-            </a:r>
-            <a:r>
-              <a:rPr lang="en-US" sz="2100" b="1" dirty="0" spc="-10" kern="0">
-                <a:solidFill>
-                  <a:srgbClr val="6D28D9"/>
-                </a:solidFill>
-                <a:latin typeface="Be Vietnam Pro" pitchFamily="34" charset="0"/>
-                <a:ea typeface="Be Vietnam Pro" pitchFamily="34" charset="-122"/>
-                <a:cs typeface="Be Vietnam Pro" pitchFamily="34" charset="-120"/>
-              </a:rPr>
-              <a:t> Langchain</a:t>
+              <a:t> động</a:t>
             </a:r>
             <a:endParaRPr lang="en-US" sz="2100" dirty="0"/>
           </a:p>
@@ -19027,15 +19384,37 @@
               <a:buNone/>
             </a:pPr>
             <a:r>
-              <a:rPr lang="en-US" sz="2100" b="1" dirty="0" spc="2" kern="0">
-                <a:solidFill>
-                  <a:srgbClr val="14161C"/>
-                </a:solidFill>
-                <a:latin typeface="Be Vietnam Pro" pitchFamily="34" charset="0"/>
-                <a:ea typeface="Be Vietnam Pro" pitchFamily="34" charset="-122"/>
-                <a:cs typeface="Be Vietnam Pro" pitchFamily="34" charset="-120"/>
-              </a:rPr>
-              <a:t>Thứ</a:t>
+              <a:rPr lang="en-US" sz="2100" b="1" dirty="0" spc="-73" kern="0">
+                <a:solidFill>
+                  <a:srgbClr val="14161C"/>
+                </a:solidFill>
+                <a:latin typeface="Be Vietnam Pro" pitchFamily="34" charset="0"/>
+                <a:ea typeface="Be Vietnam Pro" pitchFamily="34" charset="-122"/>
+                <a:cs typeface="Be Vietnam Pro" pitchFamily="34" charset="-120"/>
+              </a:rPr>
+              <a:t>Tên</a:t>
+            </a:r>
+            <a:r>
+              <a:rPr lang="en-US" sz="2100" b="1" dirty="0" spc="7" kern="0">
+                <a:solidFill>
+                  <a:srgbClr val="14161C"/>
+                </a:solidFill>
+                <a:latin typeface="Be Vietnam Pro" pitchFamily="34" charset="0"/>
+                <a:ea typeface="Be Vietnam Pro" pitchFamily="34" charset="-122"/>
+                <a:cs typeface="Be Vietnam Pro" pitchFamily="34" charset="-120"/>
+              </a:rPr>
+              <a:t> bước</a:t>
+            </a:r>
+            <a:r>
+              <a:rPr lang="en-US" sz="2100" b="1" dirty="0" spc="-7" kern="0">
+                <a:solidFill>
+                  <a:srgbClr val="14161C"/>
+                </a:solidFill>
+                <a:latin typeface="Be Vietnam Pro" pitchFamily="34" charset="0"/>
+                <a:ea typeface="Be Vietnam Pro" pitchFamily="34" charset="-122"/>
+                <a:cs typeface="Be Vietnam Pro" pitchFamily="34" charset="-120"/>
+              </a:rPr>
+              <a:t> theo</a:t>
             </a:r>
             <a:r>
               <a:rPr lang="en-US" sz="2100" b="1" dirty="0" spc="-4" kern="0">
@@ -19046,73 +19425,51 @@
                 <a:ea typeface="Be Vietnam Pro" pitchFamily="34" charset="-122"/>
                 <a:cs typeface="Be Vietnam Pro" pitchFamily="34" charset="-120"/>
               </a:rPr>
-              <a:t> tự</a:t>
-            </a:r>
-            <a:r>
-              <a:rPr lang="en-US" sz="2100" b="1" dirty="0" spc="-19" kern="0">
-                <a:solidFill>
-                  <a:srgbClr val="14161C"/>
-                </a:solidFill>
-                <a:latin typeface="Be Vietnam Pro" pitchFamily="34" charset="0"/>
-                <a:ea typeface="Be Vietnam Pro" pitchFamily="34" charset="-122"/>
-                <a:cs typeface="Be Vietnam Pro" pitchFamily="34" charset="-120"/>
-              </a:rPr>
-              <a:t> và</a:t>
-            </a:r>
-            <a:r>
-              <a:rPr lang="en-US" sz="2100" b="1" dirty="0" spc="-9" kern="0">
-                <a:solidFill>
-                  <a:srgbClr val="14161C"/>
-                </a:solidFill>
-                <a:latin typeface="Be Vietnam Pro" pitchFamily="34" charset="0"/>
-                <a:ea typeface="Be Vietnam Pro" pitchFamily="34" charset="-122"/>
-                <a:cs typeface="Be Vietnam Pro" pitchFamily="34" charset="-120"/>
-              </a:rPr>
-              <a:t> tên</a:t>
-            </a:r>
-            <a:r>
-              <a:rPr lang="en-US" sz="2100" b="1" dirty="0" spc="8" kern="0">
-                <a:solidFill>
-                  <a:srgbClr val="14161C"/>
-                </a:solidFill>
-                <a:latin typeface="Be Vietnam Pro" pitchFamily="34" charset="0"/>
-                <a:ea typeface="Be Vietnam Pro" pitchFamily="34" charset="-122"/>
-                <a:cs typeface="Be Vietnam Pro" pitchFamily="34" charset="-120"/>
-              </a:rPr>
-              <a:t> bước</a:t>
-            </a:r>
-            <a:r>
-              <a:rPr lang="en-US" sz="2100" b="1" dirty="0" spc="-8" kern="0">
-                <a:solidFill>
-                  <a:srgbClr val="14161C"/>
-                </a:solidFill>
-                <a:latin typeface="Be Vietnam Pro" pitchFamily="34" charset="0"/>
-                <a:ea typeface="Be Vietnam Pro" pitchFamily="34" charset="-122"/>
-                <a:cs typeface="Be Vietnam Pro" pitchFamily="34" charset="-120"/>
-              </a:rPr>
-              <a:t> theo</a:t>
-            </a:r>
-            <a:r>
-              <a:rPr lang="en-US" sz="2100" b="1" dirty="0" spc="-3" kern="0">
-                <a:solidFill>
-                  <a:srgbClr val="14161C"/>
-                </a:solidFill>
-                <a:latin typeface="Be Vietnam Pro" pitchFamily="34" charset="0"/>
-                <a:ea typeface="Be Vietnam Pro" pitchFamily="34" charset="-122"/>
-                <a:cs typeface="Be Vietnam Pro" pitchFamily="34" charset="-120"/>
-              </a:rPr>
-              <a:t> đúng</a:t>
-            </a:r>
-            <a:r>
-              <a:rPr lang="en-US" sz="2100" b="1" dirty="0" spc="-5" kern="0">
-                <a:solidFill>
-                  <a:srgbClr val="14161C"/>
-                </a:solidFill>
-                <a:latin typeface="Be Vietnam Pro" pitchFamily="34" charset="0"/>
-                <a:ea typeface="Be Vietnam Pro" pitchFamily="34" charset="-122"/>
-                <a:cs typeface="Be Vietnam Pro" pitchFamily="34" charset="-120"/>
-              </a:rPr>
-              <a:t> nguồn</a:t>
+              <a:t> nguồn;</a:t>
+            </a:r>
+            <a:r>
+              <a:rPr lang="en-US" sz="2100" b="1" dirty="0" spc="-6" kern="0">
+                <a:solidFill>
+                  <a:srgbClr val="14161C"/>
+                </a:solidFill>
+                <a:latin typeface="Be Vietnam Pro" pitchFamily="34" charset="0"/>
+                <a:ea typeface="Be Vietnam Pro" pitchFamily="34" charset="-122"/>
+                <a:cs typeface="Be Vietnam Pro" pitchFamily="34" charset="-120"/>
+              </a:rPr>
+              <a:t> việc</a:t>
+            </a:r>
+            <a:r>
+              <a:rPr lang="en-US" sz="2100" b="1" dirty="0" spc="-2" kern="0">
+                <a:solidFill>
+                  <a:srgbClr val="14161C"/>
+                </a:solidFill>
+                <a:latin typeface="Be Vietnam Pro" pitchFamily="34" charset="0"/>
+                <a:ea typeface="Be Vietnam Pro" pitchFamily="34" charset="-122"/>
+                <a:cs typeface="Be Vietnam Pro" pitchFamily="34" charset="-120"/>
+              </a:rPr>
+              <a:t> làm là</a:t>
+            </a:r>
+            <a:r>
+              <a:rPr lang="en-US" sz="2100" b="1" dirty="0" spc="-4" kern="0">
+                <a:solidFill>
+                  <a:srgbClr val="14161C"/>
+                </a:solidFill>
+                <a:latin typeface="Be Vietnam Pro" pitchFamily="34" charset="0"/>
+                <a:ea typeface="Be Vietnam Pro" pitchFamily="34" charset="-122"/>
+                <a:cs typeface="Be Vietnam Pro" pitchFamily="34" charset="-120"/>
+              </a:rPr>
+              <a:t> của</a:t>
+            </a:r>
+            <a:r>
+              <a:rPr lang="en-US" sz="2100" b="1" dirty="0" spc="-1" kern="0">
+                <a:solidFill>
+                  <a:srgbClr val="14161C"/>
+                </a:solidFill>
+                <a:latin typeface="Be Vietnam Pro" pitchFamily="34" charset="0"/>
+                <a:ea typeface="Be Vietnam Pro" pitchFamily="34" charset="-122"/>
+                <a:cs typeface="Be Vietnam Pro" pitchFamily="34" charset="-120"/>
+              </a:rPr>
+              <a:t> bài</a:t>
             </a:r>
             <a:endParaRPr lang="en-US" sz="2100" dirty="0"/>
           </a:p>
@@ -20417,7 +20774,7 @@
               <a:buNone/>
             </a:pPr>
             <a:r>
-              <a:rPr lang="en-US" sz="2250" dirty="0" spc="-14" kern="0">
+              <a:rPr lang="en-US" sz="2250" dirty="0" spc="-8" kern="0">
                 <a:solidFill>
                   <a:srgbClr val="C4C8D6"/>
                 </a:solidFill>
@@ -20425,7 +20782,51 @@
                 <a:ea typeface="Be Vietnam Pro" pitchFamily="34" charset="-122"/>
                 <a:cs typeface="Be Vietnam Pro" pitchFamily="34" charset="-120"/>
               </a:rPr>
-              <a:t>Đây</a:t>
+              <a:t>Một</a:t>
+            </a:r>
+            <a:r>
+              <a:rPr lang="en-US" sz="2250" dirty="0" spc="5" kern="0">
+                <a:solidFill>
+                  <a:srgbClr val="C4C8D6"/>
+                </a:solidFill>
+                <a:latin typeface="Be Vietnam Pro" pitchFamily="34" charset="0"/>
+                <a:ea typeface="Be Vietnam Pro" pitchFamily="34" charset="-122"/>
+                <a:cs typeface="Be Vietnam Pro" pitchFamily="34" charset="-120"/>
+              </a:rPr>
+              <a:t> dự</a:t>
+            </a:r>
+            <a:r>
+              <a:rPr lang="en-US" sz="2250" dirty="0" spc="0" kern="0">
+                <a:solidFill>
+                  <a:srgbClr val="C4C8D6"/>
+                </a:solidFill>
+                <a:latin typeface="Be Vietnam Pro" pitchFamily="34" charset="0"/>
+                <a:ea typeface="Be Vietnam Pro" pitchFamily="34" charset="-122"/>
+                <a:cs typeface="Be Vietnam Pro" pitchFamily="34" charset="-120"/>
+              </a:rPr>
+              <a:t> án minh</a:t>
+            </a:r>
+            <a:r>
+              <a:rPr lang="en-US" sz="2250" dirty="0" spc="-3" kern="0">
+                <a:solidFill>
+                  <a:srgbClr val="C4C8D6"/>
+                </a:solidFill>
+                <a:latin typeface="Be Vietnam Pro" pitchFamily="34" charset="0"/>
+                <a:ea typeface="Be Vietnam Pro" pitchFamily="34" charset="-122"/>
+                <a:cs typeface="Be Vietnam Pro" pitchFamily="34" charset="-120"/>
+              </a:rPr>
+              <a:t> họa,</a:t>
+            </a:r>
+            <a:r>
+              <a:rPr lang="en-US" sz="2250" dirty="0" spc="1" kern="0">
+                <a:solidFill>
+                  <a:srgbClr val="C4C8D6"/>
+                </a:solidFill>
+                <a:latin typeface="Be Vietnam Pro" pitchFamily="34" charset="0"/>
+                <a:ea typeface="Be Vietnam Pro" pitchFamily="34" charset="-122"/>
+                <a:cs typeface="Be Vietnam Pro" pitchFamily="34" charset="-120"/>
+              </a:rPr>
+              <a:t> không</a:t>
             </a:r>
             <a:r>
               <a:rPr lang="en-US" sz="2250" dirty="0" spc="-1" kern="0">
@@ -20436,7 +20837,7 @@
                 <a:ea typeface="Be Vietnam Pro" pitchFamily="34" charset="-122"/>
                 <a:cs typeface="Be Vietnam Pro" pitchFamily="34" charset="-120"/>
               </a:rPr>
-              <a:t> là</a:t>
+              <a:t> phải</a:t>
             </a:r>
             <a:r>
               <a:rPr lang="en-US" sz="2250" dirty="0" spc="3" kern="0">
@@ -20461,7 +20862,7 @@
               <a:t> trình</a:t>
             </a:r>
             <a:r>
-              <a:rPr lang="en-US" sz="2250" dirty="0" spc="-3" kern="0">
+              <a:rPr lang="en-US" sz="2250" dirty="0" spc="-13" kern="0">
                 <a:solidFill>
                   <a:srgbClr val="C4C8D6"/>
                 </a:solidFill>
@@ -20469,7 +20870,7 @@
                 <a:ea typeface="Be Vietnam Pro" pitchFamily="34" charset="-122"/>
                 <a:cs typeface="Be Vietnam Pro" pitchFamily="34" charset="-120"/>
               </a:rPr>
-              <a:t> theo</a:t>
+              <a:t> bắt</a:t>
             </a:r>
             <a:r>
               <a:rPr lang="en-US" sz="2250" dirty="0" spc="2" kern="0">
@@ -20480,40 +20881,7 @@
                 <a:ea typeface="Be Vietnam Pro" pitchFamily="34" charset="-122"/>
                 <a:cs typeface="Be Vietnam Pro" pitchFamily="34" charset="-120"/>
               </a:rPr>
-              <a:t> ý</a:t>
-            </a:r>
-            <a:r>
-              <a:rPr lang="en-US" sz="2250" dirty="0" spc="-10" kern="0">
-                <a:solidFill>
-                  <a:srgbClr val="C4C8D6"/>
-                </a:solidFill>
-                <a:latin typeface="Be Vietnam Pro" pitchFamily="34" charset="0"/>
-                <a:ea typeface="Be Vietnam Pro" pitchFamily="34" charset="-122"/>
-                <a:cs typeface="Be Vietnam Pro" pitchFamily="34" charset="-120"/>
-              </a:rPr>
-              <a:t> tác</a:t>
-            </a:r>
-            <a:r>
-              <a:rPr lang="en-US" sz="2250" dirty="0" spc="-3" kern="0">
-                <a:solidFill>
-                  <a:srgbClr val="C4C8D6"/>
-                </a:solidFill>
-                <a:latin typeface="Be Vietnam Pro" pitchFamily="34" charset="0"/>
-                <a:ea typeface="Be Vietnam Pro" pitchFamily="34" charset="-122"/>
-                <a:cs typeface="Be Vietnam Pro" pitchFamily="34" charset="-120"/>
-              </a:rPr>
-              <a:t> giả</a:t>
-            </a:r>
-            <a:r>
-              <a:rPr lang="en-US" sz="2250" dirty="0" spc="2" kern="0">
-                <a:solidFill>
-                  <a:srgbClr val="C4C8D6"/>
-                </a:solidFill>
-                <a:latin typeface="Be Vietnam Pro" pitchFamily="34" charset="0"/>
-                <a:ea typeface="Be Vietnam Pro" pitchFamily="34" charset="-122"/>
-                <a:cs typeface="Be Vietnam Pro" pitchFamily="34" charset="-120"/>
-              </a:rPr>
-              <a:t> nguồn.</a:t>
+              <a:t> buộc.</a:t>
             </a:r>
             <a:endParaRPr lang="en-US" sz="2250" dirty="0"/>
           </a:p>
@@ -20684,6 +21052,61 @@
               <a:buNone/>
             </a:pPr>
             <a:r>
+              <a:rPr lang="en-US" sz="2250" dirty="0" spc="-3" kern="0">
+                <a:solidFill>
+                  <a:srgbClr val="C4C8D6"/>
+                </a:solidFill>
+                <a:latin typeface="Be Vietnam Pro" pitchFamily="34" charset="0"/>
+                <a:ea typeface="Be Vietnam Pro" pitchFamily="34" charset="-122"/>
+                <a:cs typeface="Be Vietnam Pro" pitchFamily="34" charset="-120"/>
+              </a:rPr>
+              <a:t>Bài</a:t>
+            </a:r>
+            <a:r>
+              <a:rPr lang="en-US" sz="2250" dirty="0" spc="1" kern="0">
+                <a:solidFill>
+                  <a:srgbClr val="C4C8D6"/>
+                </a:solidFill>
+                <a:latin typeface="Be Vietnam Pro" pitchFamily="34" charset="0"/>
+                <a:ea typeface="Be Vietnam Pro" pitchFamily="34" charset="-122"/>
+                <a:cs typeface="Be Vietnam Pro" pitchFamily="34" charset="-120"/>
+              </a:rPr>
+              <a:t> không</a:t>
+            </a:r>
+            <a:r>
+              <a:rPr lang="en-US" sz="2250" dirty="0" spc="2" kern="0">
+                <a:solidFill>
+                  <a:srgbClr val="C4C8D6"/>
+                </a:solidFill>
+                <a:latin typeface="Be Vietnam Pro" pitchFamily="34" charset="0"/>
+                <a:ea typeface="Be Vietnam Pro" pitchFamily="34" charset="-122"/>
+                <a:cs typeface="Be Vietnam Pro" pitchFamily="34" charset="-120"/>
+              </a:rPr>
+              <a:t> nói thứ</a:t>
+            </a:r>
+            <a:r>
+              <a:rPr lang="en-US" sz="2250" dirty="0" spc="3" kern="0">
+                <a:solidFill>
+                  <a:srgbClr val="C4C8D6"/>
+                </a:solidFill>
+                <a:latin typeface="Be Vietnam Pro" pitchFamily="34" charset="0"/>
+                <a:ea typeface="Be Vietnam Pro" pitchFamily="34" charset="-122"/>
+                <a:cs typeface="Be Vietnam Pro" pitchFamily="34" charset="-120"/>
+              </a:rPr>
+              <a:t> tự</a:t>
+            </a:r>
+            <a:r>
+              <a:rPr lang="en-US" sz="2250" dirty="0" spc="-1" kern="0">
+                <a:solidFill>
+                  <a:srgbClr val="C4C8D6"/>
+                </a:solidFill>
+                <a:latin typeface="Be Vietnam Pro" pitchFamily="34" charset="0"/>
+                <a:ea typeface="Be Vietnam Pro" pitchFamily="34" charset="-122"/>
+                <a:cs typeface="Be Vietnam Pro" pitchFamily="34" charset="-120"/>
+              </a:rPr>
+              <a:t> nào</a:t>
+            </a:r>
+            <a:r>
               <a:rPr lang="en-US" sz="2250" dirty="0" spc="0" kern="0">
                 <a:solidFill>
                   <a:srgbClr val="C4C8D6"/>
@@ -20692,51 +21115,7 @@
                 <a:ea typeface="Be Vietnam Pro" pitchFamily="34" charset="-122"/>
                 <a:cs typeface="Be Vietnam Pro" pitchFamily="34" charset="-120"/>
               </a:rPr>
-              <a:t>Nguồn</a:t>
-            </a:r>
-            <a:r>
-              <a:rPr lang="en-US" sz="2250" dirty="0" spc="1" kern="0">
-                <a:solidFill>
-                  <a:srgbClr val="C4C8D6"/>
-                </a:solidFill>
-                <a:latin typeface="Be Vietnam Pro" pitchFamily="34" charset="0"/>
-                <a:ea typeface="Be Vietnam Pro" pitchFamily="34" charset="-122"/>
-                <a:cs typeface="Be Vietnam Pro" pitchFamily="34" charset="-120"/>
-              </a:rPr>
-              <a:t> không nói</a:t>
-            </a:r>
-            <a:r>
-              <a:rPr lang="en-US" sz="2250" dirty="0" spc="2" kern="0">
-                <a:solidFill>
-                  <a:srgbClr val="C4C8D6"/>
-                </a:solidFill>
-                <a:latin typeface="Be Vietnam Pro" pitchFamily="34" charset="0"/>
-                <a:ea typeface="Be Vietnam Pro" pitchFamily="34" charset="-122"/>
-                <a:cs typeface="Be Vietnam Pro" pitchFamily="34" charset="-120"/>
-              </a:rPr>
-              <a:t> thứ</a:t>
-            </a:r>
-            <a:r>
-              <a:rPr lang="en-US" sz="2250" dirty="0" spc="4" kern="0">
-                <a:solidFill>
-                  <a:srgbClr val="C4C8D6"/>
-                </a:solidFill>
-                <a:latin typeface="Be Vietnam Pro" pitchFamily="34" charset="0"/>
-                <a:ea typeface="Be Vietnam Pro" pitchFamily="34" charset="-122"/>
-                <a:cs typeface="Be Vietnam Pro" pitchFamily="34" charset="-120"/>
-              </a:rPr>
-              <a:t> tự</a:t>
-            </a:r>
-            <a:r>
-              <a:rPr lang="en-US" sz="2250" dirty="0" spc="-1" kern="0">
-                <a:solidFill>
-                  <a:srgbClr val="C4C8D6"/>
-                </a:solidFill>
-                <a:latin typeface="Be Vietnam Pro" pitchFamily="34" charset="0"/>
-                <a:ea typeface="Be Vietnam Pro" pitchFamily="34" charset="-122"/>
-                <a:cs typeface="Be Vietnam Pro" pitchFamily="34" charset="-120"/>
-              </a:rPr>
-              <a:t> nào là</a:t>
+              <a:t> là</a:t>
             </a:r>
             <a:r>
               <a:rPr lang="en-US" sz="2250" dirty="0" spc="-13" kern="0">
@@ -20929,7 +21308,7 @@
               <a:buNone/>
             </a:pPr>
             <a:r>
-              <a:rPr lang="en-US" sz="2250" dirty="0" spc="0" kern="0">
+              <a:rPr lang="en-US" sz="2250" dirty="0" spc="-3" kern="0">
                 <a:solidFill>
                   <a:srgbClr val="C4C8D6"/>
                 </a:solidFill>
@@ -20937,7 +21316,7 @@
                 <a:ea typeface="Be Vietnam Pro" pitchFamily="34" charset="-122"/>
                 <a:cs typeface="Be Vietnam Pro" pitchFamily="34" charset="-120"/>
               </a:rPr>
-              <a:t>Nguồn</a:t>
+              <a:t>Bài</a:t>
             </a:r>
             <a:r>
               <a:rPr lang="en-US" sz="2250" dirty="0" spc="1" kern="0">
@@ -20948,7 +21327,18 @@
                 <a:ea typeface="Be Vietnam Pro" pitchFamily="34" charset="-122"/>
                 <a:cs typeface="Be Vietnam Pro" pitchFamily="34" charset="-120"/>
               </a:rPr>
-              <a:t> không nói</a:t>
+              <a:t> không</a:t>
+            </a:r>
+            <a:r>
+              <a:rPr lang="en-US" sz="2250" dirty="0" spc="2" kern="0">
+                <a:solidFill>
+                  <a:srgbClr val="C4C8D6"/>
+                </a:solidFill>
+                <a:latin typeface="Be Vietnam Pro" pitchFamily="34" charset="0"/>
+                <a:ea typeface="Be Vietnam Pro" pitchFamily="34" charset="-122"/>
+                <a:cs typeface="Be Vietnam Pro" pitchFamily="34" charset="-120"/>
+              </a:rPr>
+              <a:t> nói</a:t>
             </a:r>
             <a:r>
               <a:rPr lang="en-US" sz="2250" dirty="0" spc="11" kern="0">
@@ -21185,7 +21575,7 @@
               <a:buNone/>
             </a:pPr>
             <a:r>
-              <a:rPr lang="en-US" sz="2250" dirty="0" spc="-68" kern="0">
+              <a:rPr lang="en-US" sz="2250" dirty="0" spc="-4" kern="0">
                 <a:solidFill>
                   <a:srgbClr val="C4C8D6"/>
                 </a:solidFill>
@@ -21193,7 +21583,18 @@
                 <a:ea typeface="Be Vietnam Pro" pitchFamily="34" charset="-122"/>
                 <a:cs typeface="Be Vietnam Pro" pitchFamily="34" charset="-120"/>
               </a:rPr>
-              <a:t>Tên</a:t>
+              <a:t>Chỉ</a:t>
+            </a:r>
+            <a:r>
+              <a:rPr lang="en-US" sz="2250" dirty="0" spc="17" kern="0">
+                <a:solidFill>
+                  <a:srgbClr val="C4C8D6"/>
+                </a:solidFill>
+                <a:latin typeface="Be Vietnam Pro" pitchFamily="34" charset="0"/>
+                <a:ea typeface="Be Vietnam Pro" pitchFamily="34" charset="-122"/>
+                <a:cs typeface="Be Vietnam Pro" pitchFamily="34" charset="-120"/>
+              </a:rPr>
+              <a:t> những</a:t>
             </a:r>
             <a:r>
               <a:rPr lang="en-US" sz="2250" dirty="0" spc="2" kern="0">
@@ -21218,7 +21619,7 @@
               <a:t> cụ</a:t>
             </a:r>
             <a:r>
-              <a:rPr lang="en-US" sz="2250" dirty="0" spc="4" kern="0">
+              <a:rPr lang="en-US" sz="2250" dirty="0" spc="15" kern="0">
                 <a:solidFill>
                   <a:srgbClr val="C4C8D6"/>
                 </a:solidFill>
@@ -21226,10 +21627,10 @@
                 <a:ea typeface="Be Vietnam Pro" pitchFamily="34" charset="-122"/>
                 <a:cs typeface="Be Vietnam Pro" pitchFamily="34" charset="-120"/>
               </a:rPr>
-              <a:t> có</a:t>
-            </a:r>
-            <a:r>
-              <a:rPr lang="en-US" sz="2250" dirty="0" spc="0" kern="0">
+              <a:t> đã</a:t>
+            </a:r>
+            <a:r>
+              <a:rPr lang="en-US" sz="2250" dirty="0" spc="13" kern="0">
                 <a:solidFill>
                   <a:srgbClr val="C4C8D6"/>
                 </a:solidFill>
@@ -21237,10 +21638,10 @@
                 <a:ea typeface="Be Vietnam Pro" pitchFamily="34" charset="-122"/>
                 <a:cs typeface="Be Vietnam Pro" pitchFamily="34" charset="-120"/>
               </a:rPr>
-              <a:t> thể</a:t>
-            </a:r>
-            <a:r>
-              <a:rPr lang="en-US" sz="2250" dirty="0" spc="13" kern="0">
+              <a:t> đọc</a:t>
+            </a:r>
+            <a:r>
+              <a:rPr lang="en-US" sz="2250" dirty="0" spc="-13" kern="0">
                 <a:solidFill>
                   <a:srgbClr val="C4C8D6"/>
                 </a:solidFill>
@@ -21248,7 +21649,7 @@
                 <a:ea typeface="Be Vietnam Pro" pitchFamily="34" charset="-122"/>
                 <a:cs typeface="Be Vietnam Pro" pitchFamily="34" charset="-120"/>
               </a:rPr>
-              <a:t> đổi</a:t>
+              <a:t> tài</a:t>
             </a:r>
             <a:r>
               <a:rPr lang="en-US" sz="2250" dirty="0" spc="-3" kern="0">
@@ -21259,10 +21660,10 @@
                 <a:ea typeface="Be Vietnam Pro" pitchFamily="34" charset="-122"/>
                 <a:cs typeface="Be Vietnam Pro" pitchFamily="34" charset="-120"/>
               </a:rPr>
-              <a:t> theo</a:t>
-            </a:r>
-            <a:r>
-              <a:rPr lang="en-US" sz="2250" dirty="0" spc="1" kern="0">
+              <a:t> liệu;</a:t>
+            </a:r>
+            <a:r>
+              <a:rPr lang="en-US" sz="2250" dirty="0" spc="-44" kern="0">
                 <a:solidFill>
                   <a:srgbClr val="C4C8D6"/>
                 </a:solidFill>
@@ -21270,7 +21671,18 @@
                 <a:ea typeface="Be Vietnam Pro" pitchFamily="34" charset="-122"/>
                 <a:cs typeface="Be Vietnam Pro" pitchFamily="34" charset="-120"/>
               </a:rPr>
-              <a:t> thời</a:t>
+              <a:t> REST,</a:t>
+            </a:r>
+            <a:r>
+              <a:rPr lang="en-US" sz="2250" dirty="0" spc="11" kern="0">
+                <a:solidFill>
+                  <a:srgbClr val="C4C8D6"/>
+                </a:solidFill>
+                <a:latin typeface="Be Vietnam Pro" pitchFamily="34" charset="0"/>
+                <a:ea typeface="Be Vietnam Pro" pitchFamily="34" charset="-122"/>
+                <a:cs typeface="Be Vietnam Pro" pitchFamily="34" charset="-120"/>
+              </a:rPr>
+              <a:t> JWT</a:t>
             </a:r>
             <a:r>
               <a:rPr lang="en-US" sz="2250" dirty="0" spc="-1" kern="0">
@@ -21281,7 +21693,29 @@
                 <a:ea typeface="Be Vietnam Pro" pitchFamily="34" charset="-122"/>
                 <a:cs typeface="Be Vietnam Pro" pitchFamily="34" charset="-120"/>
               </a:rPr>
-              <a:t> gian.</a:t>
+              <a:t> là kiến</a:t>
+            </a:r>
+            <a:r>
+              <a:rPr lang="en-US" sz="2250" dirty="0" spc="9" kern="0">
+                <a:solidFill>
+                  <a:srgbClr val="C4C8D6"/>
+                </a:solidFill>
+                <a:latin typeface="Be Vietnam Pro" pitchFamily="34" charset="0"/>
+                <a:ea typeface="Be Vietnam Pro" pitchFamily="34" charset="-122"/>
+                <a:cs typeface="Be Vietnam Pro" pitchFamily="34" charset="-120"/>
+              </a:rPr>
+              <a:t> thức</a:t>
+            </a:r>
+            <a:r>
+              <a:rPr lang="en-US" sz="2250" dirty="0" spc="2" kern="0">
+                <a:solidFill>
+                  <a:srgbClr val="C4C8D6"/>
+                </a:solidFill>
+                <a:latin typeface="Be Vietnam Pro" pitchFamily="34" charset="0"/>
+                <a:ea typeface="Be Vietnam Pro" pitchFamily="34" charset="-122"/>
+                <a:cs typeface="Be Vietnam Pro" pitchFamily="34" charset="-120"/>
+              </a:rPr>
+              <a:t> chung.</a:t>
             </a:r>
             <a:endParaRPr lang="en-US" sz="2250" dirty="0"/>
           </a:p>
@@ -21916,26 +22350,37 @@
               <a:t>Bạn</a:t>
             </a:r>
             <a:r>
-              <a:rPr lang="en-US" sz="2850" dirty="0" spc="20" kern="0">
-                <a:solidFill>
-                  <a:srgbClr val="14161C"/>
-                </a:solidFill>
-                <a:latin typeface="Be Vietnam Pro" pitchFamily="34" charset="0"/>
-                <a:ea typeface="Be Vietnam Pro" pitchFamily="34" charset="-122"/>
-                <a:cs typeface="Be Vietnam Pro" pitchFamily="34" charset="-120"/>
-              </a:rPr>
-              <a:t> đã</a:t>
-            </a:r>
-            <a:r>
-              <a:rPr lang="en-US" sz="2850" dirty="0" spc="-2" kern="0">
-                <a:solidFill>
-                  <a:srgbClr val="14161C"/>
-                </a:solidFill>
-                <a:latin typeface="Be Vietnam Pro" pitchFamily="34" charset="0"/>
-                <a:ea typeface="Be Vietnam Pro" pitchFamily="34" charset="-122"/>
-                <a:cs typeface="Be Vietnam Pro" pitchFamily="34" charset="-120"/>
-              </a:rPr>
-              <a:t> chọn</a:t>
+              <a:rPr lang="en-US" sz="2850" dirty="0" spc="13" kern="0">
+                <a:solidFill>
+                  <a:srgbClr val="14161C"/>
+                </a:solidFill>
+                <a:latin typeface="Be Vietnam Pro" pitchFamily="34" charset="0"/>
+                <a:ea typeface="Be Vietnam Pro" pitchFamily="34" charset="-122"/>
+                <a:cs typeface="Be Vietnam Pro" pitchFamily="34" charset="-120"/>
+              </a:rPr>
+              <a:t> vừa</a:t>
+            </a:r>
+            <a:r>
+              <a:rPr lang="en-US" sz="2850" dirty="0" spc="-15" kern="0">
+                <a:solidFill>
+                  <a:srgbClr val="14161C"/>
+                </a:solidFill>
+                <a:latin typeface="Be Vietnam Pro" pitchFamily="34" charset="0"/>
+                <a:ea typeface="Be Vietnam Pro" pitchFamily="34" charset="-122"/>
+                <a:cs typeface="Be Vietnam Pro" pitchFamily="34" charset="-120"/>
+              </a:rPr>
+              <a:t> chuyển</a:t>
+            </a:r>
+            <a:r>
+              <a:rPr lang="en-US" sz="2850" dirty="0" spc="-4" kern="0">
+                <a:solidFill>
+                  <a:srgbClr val="14161C"/>
+                </a:solidFill>
+                <a:latin typeface="Be Vietnam Pro" pitchFamily="34" charset="0"/>
+                <a:ea typeface="Be Vietnam Pro" pitchFamily="34" charset="-122"/>
+                <a:cs typeface="Be Vietnam Pro" pitchFamily="34" charset="-120"/>
+              </a:rPr>
+              <a:t> bản</a:t>
             </a:r>
             <a:r>
               <a:rPr lang="en-US" sz="2850" dirty="0" spc="-9" kern="0">
@@ -21946,40 +22391,51 @@
                 <a:ea typeface="Be Vietnam Pro" pitchFamily="34" charset="-122"/>
                 <a:cs typeface="Be Vietnam Pro" pitchFamily="34" charset="-120"/>
               </a:rPr>
-              <a:t> một</a:t>
-            </a:r>
-            <a:r>
-              <a:rPr lang="en-US" sz="2850" dirty="0" spc="-14" kern="0">
-                <a:solidFill>
-                  <a:srgbClr val="14161C"/>
-                </a:solidFill>
-                <a:latin typeface="Be Vietnam Pro" pitchFamily="34" charset="0"/>
-                <a:ea typeface="Be Vietnam Pro" pitchFamily="34" charset="-122"/>
-                <a:cs typeface="Be Vietnam Pro" pitchFamily="34" charset="-120"/>
-              </a:rPr>
-              <a:t> ngôn</a:t>
-            </a:r>
-            <a:r>
-              <a:rPr lang="en-US" sz="2850" dirty="0" spc="-2" kern="0">
-                <a:solidFill>
-                  <a:srgbClr val="14161C"/>
-                </a:solidFill>
-                <a:latin typeface="Be Vietnam Pro" pitchFamily="34" charset="0"/>
-                <a:ea typeface="Be Vietnam Pro" pitchFamily="34" charset="-122"/>
-                <a:cs typeface="Be Vietnam Pro" pitchFamily="34" charset="-120"/>
-              </a:rPr>
-              <a:t> ngữ</a:t>
-            </a:r>
-            <a:r>
-              <a:rPr lang="en-US" sz="2850" dirty="0" spc="-16" kern="0">
-                <a:solidFill>
-                  <a:srgbClr val="14161C"/>
-                </a:solidFill>
-                <a:latin typeface="Be Vietnam Pro" pitchFamily="34" charset="0"/>
-                <a:ea typeface="Be Vietnam Pro" pitchFamily="34" charset="-122"/>
-                <a:cs typeface="Be Vietnam Pro" pitchFamily="34" charset="-120"/>
-              </a:rPr>
-              <a:t> và</a:t>
+              <a:t> chạy</a:t>
+            </a:r>
+            <a:r>
+              <a:rPr lang="en-US" sz="2850" dirty="0" spc="-1" kern="0">
+                <a:solidFill>
+                  <a:srgbClr val="14161C"/>
+                </a:solidFill>
+                <a:latin typeface="Be Vietnam Pro" pitchFamily="34" charset="0"/>
+                <a:ea typeface="Be Vietnam Pro" pitchFamily="34" charset="-122"/>
+                <a:cs typeface="Be Vietnam Pro" pitchFamily="34" charset="-120"/>
+              </a:rPr>
+              <a:t> thử</a:t>
+            </a:r>
+            <a:r>
+              <a:rPr lang="en-US" sz="2850" dirty="0" spc="1" kern="0">
+                <a:solidFill>
+                  <a:srgbClr val="14161C"/>
+                </a:solidFill>
+                <a:latin typeface="Be Vietnam Pro" pitchFamily="34" charset="0"/>
+                <a:ea typeface="Be Vietnam Pro" pitchFamily="34" charset="-122"/>
+                <a:cs typeface="Be Vietnam Pro" pitchFamily="34" charset="-120"/>
+              </a:rPr>
+              <a:t> của</a:t>
+            </a:r>
+            <a:r>
+              <a:rPr lang="en-US" sz="2850" dirty="0" spc="-1" kern="0">
+                <a:solidFill>
+                  <a:srgbClr val="14161C"/>
+                </a:solidFill>
+                <a:latin typeface="Be Vietnam Pro" pitchFamily="34" charset="0"/>
+                <a:ea typeface="Be Vietnam Pro" pitchFamily="34" charset="-122"/>
+                <a:cs typeface="Be Vietnam Pro" pitchFamily="34" charset="-120"/>
+              </a:rPr>
+              <a:t> dịch</a:t>
+            </a:r>
+            <a:r>
+              <a:rPr lang="en-US" sz="2850" dirty="0" spc="3" kern="0">
+                <a:solidFill>
+                  <a:srgbClr val="14161C"/>
+                </a:solidFill>
+                <a:latin typeface="Be Vietnam Pro" pitchFamily="34" charset="0"/>
+                <a:ea typeface="Be Vietnam Pro" pitchFamily="34" charset="-122"/>
+                <a:cs typeface="Be Vietnam Pro" pitchFamily="34" charset="-120"/>
+              </a:rPr>
+              <a:t> vụ</a:t>
             </a:r>
             <a:r>
               <a:rPr lang="en-US" sz="2850" dirty="0" spc="-6" kern="0">
@@ -21990,7 +22446,29 @@
                 <a:ea typeface="Be Vietnam Pro" pitchFamily="34" charset="-122"/>
                 <a:cs typeface="Be Vietnam Pro" pitchFamily="34" charset="-120"/>
               </a:rPr>
-              <a:t> biết</a:t>
+              <a:t> sang</a:t>
+            </a:r>
+            <a:r>
+              <a:rPr lang="en-US" sz="2850" dirty="0" spc="2" kern="0">
+                <a:solidFill>
+                  <a:srgbClr val="14161C"/>
+                </a:solidFill>
+                <a:latin typeface="Be Vietnam Pro" pitchFamily="34" charset="0"/>
+                <a:ea typeface="Be Vietnam Pro" pitchFamily="34" charset="-122"/>
+                <a:cs typeface="Be Vietnam Pro" pitchFamily="34" charset="-120"/>
+              </a:rPr>
+              <a:t> cơ</a:t>
+            </a:r>
+            <a:r>
+              <a:rPr lang="en-US" sz="2850" dirty="0" spc="-10" kern="0">
+                <a:solidFill>
+                  <a:srgbClr val="14161C"/>
+                </a:solidFill>
+                <a:latin typeface="Be Vietnam Pro" pitchFamily="34" charset="0"/>
+                <a:ea typeface="Be Vietnam Pro" pitchFamily="34" charset="-122"/>
+                <a:cs typeface="Be Vietnam Pro" pitchFamily="34" charset="-120"/>
+              </a:rPr>
+              <a:t> sở</a:t>
             </a:r>
             <a:r>
               <a:rPr lang="en-US" sz="2850" dirty="0" spc="0" kern="0">
@@ -22001,7 +22479,40 @@
                 <a:ea typeface="Be Vietnam Pro" pitchFamily="34" charset="-122"/>
                 <a:cs typeface="Be Vietnam Pro" pitchFamily="34" charset="-120"/>
               </a:rPr>
-              <a:t> làm API.</a:t>
+              <a:t> dữ</a:t>
+            </a:r>
+            <a:r>
+              <a:rPr lang="en-US" sz="2850" dirty="0" spc="1" kern="0">
+                <a:solidFill>
+                  <a:srgbClr val="14161C"/>
+                </a:solidFill>
+                <a:latin typeface="Be Vietnam Pro" pitchFamily="34" charset="0"/>
+                <a:ea typeface="Be Vietnam Pro" pitchFamily="34" charset="-122"/>
+                <a:cs typeface="Be Vietnam Pro" pitchFamily="34" charset="-120"/>
+              </a:rPr>
+              <a:t> liệu</a:t>
+            </a:r>
+            <a:r>
+              <a:rPr lang="en-US" sz="2850" dirty="0" spc="0" kern="0">
+                <a:solidFill>
+                  <a:srgbClr val="14161C"/>
+                </a:solidFill>
+                <a:latin typeface="Be Vietnam Pro" pitchFamily="34" charset="0"/>
+                <a:ea typeface="Be Vietnam Pro" pitchFamily="34" charset="-122"/>
+                <a:cs typeface="Be Vietnam Pro" pitchFamily="34" charset="-120"/>
+              </a:rPr>
+              <a:t> lớn</a:t>
+            </a:r>
+            <a:r>
+              <a:rPr lang="en-US" sz="2850" dirty="0" spc="2" kern="0">
+                <a:solidFill>
+                  <a:srgbClr val="14161C"/>
+                </a:solidFill>
+                <a:latin typeface="Be Vietnam Pro" pitchFamily="34" charset="0"/>
+                <a:ea typeface="Be Vietnam Pro" pitchFamily="34" charset="-122"/>
+                <a:cs typeface="Be Vietnam Pro" pitchFamily="34" charset="-120"/>
+              </a:rPr>
+              <a:t> hơn.</a:t>
             </a:r>
             <a:endParaRPr lang="en-US" sz="2850" dirty="0"/>
           </a:p>
@@ -22112,15 +22623,15 @@
               <a:buChar char="•"/>
             </a:pPr>
             <a:r>
-              <a:rPr lang="en-US" sz="2550" dirty="0" spc="10" kern="0">
-                <a:solidFill>
-                  <a:srgbClr val="14161C"/>
-                </a:solidFill>
-                <a:latin typeface="Be Vietnam Pro" pitchFamily="34" charset="0"/>
-                <a:ea typeface="Be Vietnam Pro" pitchFamily="34" charset="-122"/>
-                <a:cs typeface="Be Vietnam Pro" pitchFamily="34" charset="-120"/>
-              </a:rPr>
-              <a:t>Bước</a:t>
+              <a:rPr lang="en-US" sz="2550" dirty="0" spc="-2" kern="0">
+                <a:solidFill>
+                  <a:srgbClr val="14161C"/>
+                </a:solidFill>
+                <a:latin typeface="Be Vietnam Pro" pitchFamily="34" charset="0"/>
+                <a:ea typeface="Be Vietnam Pro" pitchFamily="34" charset="-122"/>
+                <a:cs typeface="Be Vietnam Pro" pitchFamily="34" charset="-120"/>
+              </a:rPr>
+              <a:t>SQLite</a:t>
             </a:r>
             <a:r>
               <a:rPr lang="en-US" sz="2550" dirty="0" spc="0" kern="0">
@@ -22131,40 +22642,7 @@
                 <a:ea typeface="Be Vietnam Pro" pitchFamily="34" charset="-122"/>
                 <a:cs typeface="Be Vietnam Pro" pitchFamily="34" charset="-120"/>
               </a:rPr>
-              <a:t> nào</a:t>
-            </a:r>
-            <a:r>
-              <a:rPr lang="en-US" sz="2550" dirty="0" spc="-3" kern="0">
-                <a:solidFill>
-                  <a:srgbClr val="14161C"/>
-                </a:solidFill>
-                <a:latin typeface="Be Vietnam Pro" pitchFamily="34" charset="0"/>
-                <a:ea typeface="Be Vietnam Pro" pitchFamily="34" charset="-122"/>
-                <a:cs typeface="Be Vietnam Pro" pitchFamily="34" charset="-120"/>
-              </a:rPr>
-              <a:t> bảo</a:t>
-            </a:r>
-            <a:r>
-              <a:rPr lang="en-US" sz="2550" dirty="0" spc="-19" kern="0">
-                <a:solidFill>
-                  <a:srgbClr val="14161C"/>
-                </a:solidFill>
-                <a:latin typeface="Be Vietnam Pro" pitchFamily="34" charset="0"/>
-                <a:ea typeface="Be Vietnam Pro" pitchFamily="34" charset="-122"/>
-                <a:cs typeface="Be Vietnam Pro" pitchFamily="34" charset="-120"/>
-              </a:rPr>
-              <a:t> vệ</a:t>
-            </a:r>
-            <a:r>
-              <a:rPr lang="en-US" sz="2550" dirty="0" spc="24" kern="0">
-                <a:solidFill>
-                  <a:srgbClr val="14161C"/>
-                </a:solidFill>
-                <a:latin typeface="Be Vietnam Pro" pitchFamily="34" charset="0"/>
-                <a:ea typeface="Be Vietnam Pro" pitchFamily="34" charset="-122"/>
-                <a:cs typeface="Be Vietnam Pro" pitchFamily="34" charset="-120"/>
-              </a:rPr>
-              <a:t> ứng</a:t>
+              <a:t> lên hệ</a:t>
             </a:r>
             <a:r>
               <a:rPr lang="en-US" sz="2550" dirty="0" spc="-1" kern="0">
@@ -22175,40 +22653,40 @@
                 <a:ea typeface="Be Vietnam Pro" pitchFamily="34" charset="-122"/>
                 <a:cs typeface="Be Vietnam Pro" pitchFamily="34" charset="-120"/>
               </a:rPr>
-              <a:t> dụng</a:t>
-            </a:r>
-            <a:r>
-              <a:rPr lang="en-US" sz="2550" dirty="0" spc="-2" kern="0">
-                <a:solidFill>
-                  <a:srgbClr val="14161C"/>
-                </a:solidFill>
-                <a:latin typeface="Be Vietnam Pro" pitchFamily="34" charset="0"/>
-                <a:ea typeface="Be Vietnam Pro" pitchFamily="34" charset="-122"/>
-                <a:cs typeface="Be Vietnam Pro" pitchFamily="34" charset="-120"/>
-              </a:rPr>
-              <a:t> bằng</a:t>
-            </a:r>
-            <a:r>
-              <a:rPr lang="en-US" sz="2550" dirty="0" spc="-18" kern="0">
-                <a:solidFill>
-                  <a:srgbClr val="14161C"/>
-                </a:solidFill>
-                <a:latin typeface="Be Vietnam Pro" pitchFamily="34" charset="0"/>
-                <a:ea typeface="Be Vietnam Pro" pitchFamily="34" charset="-122"/>
-                <a:cs typeface="Be Vietnam Pro" pitchFamily="34" charset="-120"/>
-              </a:rPr>
-              <a:t> xác</a:t>
-            </a:r>
-            <a:r>
-              <a:rPr lang="en-US" sz="2550" dirty="0" spc="6" kern="0">
-                <a:solidFill>
-                  <a:srgbClr val="14161C"/>
-                </a:solidFill>
-                <a:latin typeface="Be Vietnam Pro" pitchFamily="34" charset="0"/>
-                <a:ea typeface="Be Vietnam Pro" pitchFamily="34" charset="-122"/>
-                <a:cs typeface="Be Vietnam Pro" pitchFamily="34" charset="-120"/>
-              </a:rPr>
-              <a:t> thực?</a:t>
+              <a:t> lớn</a:t>
+            </a:r>
+            <a:r>
+              <a:rPr lang="en-US" sz="2550" dirty="0" spc="0" kern="0">
+                <a:solidFill>
+                  <a:srgbClr val="14161C"/>
+                </a:solidFill>
+                <a:latin typeface="Be Vietnam Pro" pitchFamily="34" charset="0"/>
+                <a:ea typeface="Be Vietnam Pro" pitchFamily="34" charset="-122"/>
+                <a:cs typeface="Be Vietnam Pro" pitchFamily="34" charset="-120"/>
+              </a:rPr>
+              <a:t> hơn:</a:t>
+            </a:r>
+            <a:r>
+              <a:rPr lang="en-US" sz="2550" dirty="0" spc="7" kern="0">
+                <a:solidFill>
+                  <a:srgbClr val="14161C"/>
+                </a:solidFill>
+                <a:latin typeface="Be Vietnam Pro" pitchFamily="34" charset="0"/>
+                <a:ea typeface="Be Vietnam Pro" pitchFamily="34" charset="-122"/>
+                <a:cs typeface="Be Vietnam Pro" pitchFamily="34" charset="-120"/>
+              </a:rPr>
+              <a:t> bước</a:t>
+            </a:r>
+            <a:r>
+              <a:rPr lang="en-US" sz="2550" dirty="0" spc="0" kern="0">
+                <a:solidFill>
+                  <a:srgbClr val="14161C"/>
+                </a:solidFill>
+                <a:latin typeface="Be Vietnam Pro" pitchFamily="34" charset="0"/>
+                <a:ea typeface="Be Vietnam Pro" pitchFamily="34" charset="-122"/>
+                <a:cs typeface="Be Vietnam Pro" pitchFamily="34" charset="-120"/>
+              </a:rPr>
+              <a:t> nào?</a:t>
             </a:r>
             <a:endParaRPr lang="en-US" sz="2550" dirty="0"/>
           </a:p>
@@ -22225,6 +22703,28 @@
               <a:buChar char="•"/>
             </a:pPr>
             <a:r>
+              <a:rPr lang="en-US" sz="2550" dirty="0" spc="-1" kern="0">
+                <a:solidFill>
+                  <a:srgbClr val="14161C"/>
+                </a:solidFill>
+                <a:latin typeface="Be Vietnam Pro" pitchFamily="34" charset="0"/>
+                <a:ea typeface="Be Vietnam Pro" pitchFamily="34" charset="-122"/>
+                <a:cs typeface="Be Vietnam Pro" pitchFamily="34" charset="-120"/>
+              </a:rPr>
+              <a:t>Kiểm thử</a:t>
+            </a:r>
+            <a:r>
+              <a:rPr lang="en-US" sz="2550" dirty="0" spc="0" kern="0">
+                <a:solidFill>
+                  <a:srgbClr val="14161C"/>
+                </a:solidFill>
+                <a:latin typeface="Be Vietnam Pro" pitchFamily="34" charset="0"/>
+                <a:ea typeface="Be Vietnam Pro" pitchFamily="34" charset="-122"/>
+                <a:cs typeface="Be Vietnam Pro" pitchFamily="34" charset="-120"/>
+              </a:rPr>
+              <a:t> tự</a:t>
+            </a:r>
+            <a:r>
               <a:rPr lang="en-US" sz="2550" dirty="0" spc="10" kern="0">
                 <a:solidFill>
                   <a:srgbClr val="14161C"/>
@@ -22233,7 +22733,7 @@
                 <a:ea typeface="Be Vietnam Pro" pitchFamily="34" charset="-122"/>
                 <a:cs typeface="Be Vietnam Pro" pitchFamily="34" charset="-120"/>
               </a:rPr>
-              <a:t>Bước</a:t>
+              <a:t> động</a:t>
             </a:r>
             <a:r>
               <a:rPr lang="en-US" sz="2550" dirty="0" spc="0" kern="0">
@@ -22244,7 +22744,40 @@
                 <a:ea typeface="Be Vietnam Pro" pitchFamily="34" charset="-122"/>
                 <a:cs typeface="Be Vietnam Pro" pitchFamily="34" charset="-120"/>
               </a:rPr>
-              <a:t> nào</a:t>
+              <a:t> mỗi</a:t>
+            </a:r>
+            <a:r>
+              <a:rPr lang="en-US" sz="2550" dirty="0" spc="-7" kern="0">
+                <a:solidFill>
+                  <a:srgbClr val="14161C"/>
+                </a:solidFill>
+                <a:latin typeface="Be Vietnam Pro" pitchFamily="34" charset="0"/>
+                <a:ea typeface="Be Vietnam Pro" pitchFamily="34" charset="-122"/>
+                <a:cs typeface="Be Vietnam Pro" pitchFamily="34" charset="-120"/>
+              </a:rPr>
+              <a:t> thay</a:t>
+            </a:r>
+            <a:r>
+              <a:rPr lang="en-US" sz="2550" dirty="0" spc="10" kern="0">
+                <a:solidFill>
+                  <a:srgbClr val="14161C"/>
+                </a:solidFill>
+                <a:latin typeface="Be Vietnam Pro" pitchFamily="34" charset="0"/>
+                <a:ea typeface="Be Vietnam Pro" pitchFamily="34" charset="-122"/>
+                <a:cs typeface="Be Vietnam Pro" pitchFamily="34" charset="-120"/>
+              </a:rPr>
+              <a:t> đổi:</a:t>
+            </a:r>
+            <a:r>
+              <a:rPr lang="en-US" sz="2550" dirty="0" spc="7" kern="0">
+                <a:solidFill>
+                  <a:srgbClr val="14161C"/>
+                </a:solidFill>
+                <a:latin typeface="Be Vietnam Pro" pitchFamily="34" charset="0"/>
+                <a:ea typeface="Be Vietnam Pro" pitchFamily="34" charset="-122"/>
+                <a:cs typeface="Be Vietnam Pro" pitchFamily="34" charset="-120"/>
+              </a:rPr>
+              <a:t> bước</a:t>
             </a:r>
             <a:r>
               <a:rPr lang="en-US" sz="2550" dirty="0" spc="-1" kern="0">
@@ -22255,73 +22788,7 @@
                 <a:ea typeface="Be Vietnam Pro" pitchFamily="34" charset="-122"/>
                 <a:cs typeface="Be Vietnam Pro" pitchFamily="34" charset="-120"/>
               </a:rPr>
-              <a:t> tự</a:t>
-            </a:r>
-            <a:r>
-              <a:rPr lang="en-US" sz="2550" dirty="0" spc="10" kern="0">
-                <a:solidFill>
-                  <a:srgbClr val="14161C"/>
-                </a:solidFill>
-                <a:latin typeface="Be Vietnam Pro" pitchFamily="34" charset="0"/>
-                <a:ea typeface="Be Vietnam Pro" pitchFamily="34" charset="-122"/>
-                <a:cs typeface="Be Vietnam Pro" pitchFamily="34" charset="-120"/>
-              </a:rPr>
-              <a:t> động</a:t>
-            </a:r>
-            <a:r>
-              <a:rPr lang="en-US" sz="2550" dirty="0" spc="8" kern="0">
-                <a:solidFill>
-                  <a:srgbClr val="14161C"/>
-                </a:solidFill>
-                <a:latin typeface="Be Vietnam Pro" pitchFamily="34" charset="0"/>
-                <a:ea typeface="Be Vietnam Pro" pitchFamily="34" charset="-122"/>
-                <a:cs typeface="Be Vietnam Pro" pitchFamily="34" charset="-120"/>
-              </a:rPr>
-              <a:t> đưa</a:t>
-            </a:r>
-            <a:r>
-              <a:rPr lang="en-US" sz="2550" dirty="0" spc="1" kern="0">
-                <a:solidFill>
-                  <a:srgbClr val="14161C"/>
-                </a:solidFill>
-                <a:latin typeface="Be Vietnam Pro" pitchFamily="34" charset="0"/>
-                <a:ea typeface="Be Vietnam Pro" pitchFamily="34" charset="-122"/>
-                <a:cs typeface="Be Vietnam Pro" pitchFamily="34" charset="-120"/>
-              </a:rPr>
-              <a:t> mã</a:t>
-            </a:r>
-            <a:r>
-              <a:rPr lang="en-US" sz="2550" dirty="0" spc="-12" kern="0">
-                <a:solidFill>
-                  <a:srgbClr val="14161C"/>
-                </a:solidFill>
-                <a:latin typeface="Be Vietnam Pro" pitchFamily="34" charset="0"/>
-                <a:ea typeface="Be Vietnam Pro" pitchFamily="34" charset="-122"/>
-                <a:cs typeface="Be Vietnam Pro" pitchFamily="34" charset="-120"/>
-              </a:rPr>
-              <a:t> tới</a:t>
-            </a:r>
-            <a:r>
-              <a:rPr lang="en-US" sz="2550" dirty="0" spc="-1" kern="0">
-                <a:solidFill>
-                  <a:srgbClr val="14161C"/>
-                </a:solidFill>
-                <a:latin typeface="Be Vietnam Pro" pitchFamily="34" charset="0"/>
-                <a:ea typeface="Be Vietnam Pro" pitchFamily="34" charset="-122"/>
-                <a:cs typeface="Be Vietnam Pro" pitchFamily="34" charset="-120"/>
-              </a:rPr>
-              <a:t> nơi</a:t>
-            </a:r>
-            <a:r>
-              <a:rPr lang="en-US" sz="2550" dirty="0" spc="-7" kern="0">
-                <a:solidFill>
-                  <a:srgbClr val="14161C"/>
-                </a:solidFill>
-                <a:latin typeface="Be Vietnam Pro" pitchFamily="34" charset="0"/>
-                <a:ea typeface="Be Vietnam Pro" pitchFamily="34" charset="-122"/>
-                <a:cs typeface="Be Vietnam Pro" pitchFamily="34" charset="-120"/>
-              </a:rPr>
-              <a:t> chạy?</a:t>
+              <a:t> nào?</a:t>
             </a:r>
             <a:endParaRPr lang="en-US" sz="2550" dirty="0"/>
           </a:p>
@@ -22335,37 +22802,37 @@
               <a:buChar char="•"/>
             </a:pPr>
             <a:r>
-              <a:rPr lang="en-US" sz="2550" dirty="0" spc="10" kern="0">
-                <a:solidFill>
-                  <a:srgbClr val="14161C"/>
-                </a:solidFill>
-                <a:latin typeface="Be Vietnam Pro" pitchFamily="34" charset="0"/>
-                <a:ea typeface="Be Vietnam Pro" pitchFamily="34" charset="-122"/>
-                <a:cs typeface="Be Vietnam Pro" pitchFamily="34" charset="-120"/>
-              </a:rPr>
-              <a:t>Bước</a:t>
-            </a:r>
-            <a:r>
-              <a:rPr lang="en-US" sz="2550" dirty="0" spc="-5" kern="0">
-                <a:solidFill>
-                  <a:srgbClr val="14161C"/>
-                </a:solidFill>
-                <a:latin typeface="Be Vietnam Pro" pitchFamily="34" charset="0"/>
-                <a:ea typeface="Be Vietnam Pro" pitchFamily="34" charset="-122"/>
-                <a:cs typeface="Be Vietnam Pro" pitchFamily="34" charset="-120"/>
-              </a:rPr>
-              <a:t> 11</a:t>
-            </a:r>
-            <a:r>
-              <a:rPr lang="en-US" sz="2550" dirty="0" spc="-1" kern="0">
-                <a:solidFill>
-                  <a:srgbClr val="14161C"/>
-                </a:solidFill>
-                <a:latin typeface="Be Vietnam Pro" pitchFamily="34" charset="0"/>
-                <a:ea typeface="Be Vietnam Pro" pitchFamily="34" charset="-122"/>
-                <a:cs typeface="Be Vietnam Pro" pitchFamily="34" charset="-120"/>
-              </a:rPr>
-              <a:t> nói</a:t>
+              <a:rPr lang="en-US" sz="2550" dirty="0" spc="-11" kern="0">
+                <a:solidFill>
+                  <a:srgbClr val="14161C"/>
+                </a:solidFill>
+                <a:latin typeface="Be Vietnam Pro" pitchFamily="34" charset="0"/>
+                <a:ea typeface="Be Vietnam Pro" pitchFamily="34" charset="-122"/>
+                <a:cs typeface="Be Vietnam Pro" pitchFamily="34" charset="-120"/>
+              </a:rPr>
+              <a:t>Container</a:t>
+            </a:r>
+            <a:r>
+              <a:rPr lang="en-US" sz="2550" dirty="0" spc="0" kern="0">
+                <a:solidFill>
+                  <a:srgbClr val="14161C"/>
+                </a:solidFill>
+                <a:latin typeface="Be Vietnam Pro" pitchFamily="34" charset="0"/>
+                <a:ea typeface="Be Vietnam Pro" pitchFamily="34" charset="-122"/>
+                <a:cs typeface="Be Vietnam Pro" pitchFamily="34" charset="-120"/>
+              </a:rPr>
+              <a:t> hỏng</a:t>
+            </a:r>
+            <a:r>
+              <a:rPr lang="en-US" sz="2550" dirty="0" spc="6" kern="0">
+                <a:solidFill>
+                  <a:srgbClr val="14161C"/>
+                </a:solidFill>
+                <a:latin typeface="Be Vietnam Pro" pitchFamily="34" charset="0"/>
+                <a:ea typeface="Be Vietnam Pro" pitchFamily="34" charset="-122"/>
+                <a:cs typeface="Be Vietnam Pro" pitchFamily="34" charset="-120"/>
+              </a:rPr>
+              <a:t> giữa</a:t>
             </a:r>
             <a:r>
               <a:rPr lang="en-US" sz="2550" dirty="0" spc="-18" kern="0">
@@ -22376,18 +22843,7 @@
                 <a:ea typeface="Be Vietnam Pro" pitchFamily="34" charset="-122"/>
                 <a:cs typeface="Be Vietnam Pro" pitchFamily="34" charset="-120"/>
               </a:rPr>
-              <a:t> về</a:t>
-            </a:r>
-            <a:r>
-              <a:rPr lang="en-US" sz="2550" dirty="0" spc="-4" kern="0">
-                <a:solidFill>
-                  <a:srgbClr val="14161C"/>
-                </a:solidFill>
-                <a:latin typeface="Be Vietnam Pro" pitchFamily="34" charset="0"/>
-                <a:ea typeface="Be Vietnam Pro" pitchFamily="34" charset="-122"/>
-                <a:cs typeface="Be Vietnam Pro" pitchFamily="34" charset="-120"/>
-              </a:rPr>
-              <a:t> việc</a:t>
+              <a:t> ngày</a:t>
             </a:r>
             <a:r>
               <a:rPr lang="en-US" sz="2550" dirty="0" spc="1" kern="0">
@@ -22398,7 +22854,29 @@
                 <a:ea typeface="Be Vietnam Pro" pitchFamily="34" charset="-122"/>
                 <a:cs typeface="Be Vietnam Pro" pitchFamily="34" charset="-120"/>
               </a:rPr>
-              <a:t> gì?</a:t>
+              <a:t> hội:</a:t>
+            </a:r>
+            <a:r>
+              <a:rPr lang="en-US" sz="2550" dirty="0" spc="6" kern="0">
+                <a:solidFill>
+                  <a:srgbClr val="14161C"/>
+                </a:solidFill>
+                <a:latin typeface="Be Vietnam Pro" pitchFamily="34" charset="0"/>
+                <a:ea typeface="Be Vietnam Pro" pitchFamily="34" charset="-122"/>
+                <a:cs typeface="Be Vietnam Pro" pitchFamily="34" charset="-120"/>
+              </a:rPr>
+              <a:t> bước</a:t>
+            </a:r>
+            <a:r>
+              <a:rPr lang="en-US" sz="2550" dirty="0" spc="0" kern="0">
+                <a:solidFill>
+                  <a:srgbClr val="14161C"/>
+                </a:solidFill>
+                <a:latin typeface="Be Vietnam Pro" pitchFamily="34" charset="0"/>
+                <a:ea typeface="Be Vietnam Pro" pitchFamily="34" charset="-122"/>
+                <a:cs typeface="Be Vietnam Pro" pitchFamily="34" charset="-120"/>
+              </a:rPr>
+              <a:t> nào?</a:t>
             </a:r>
             <a:endParaRPr lang="en-US" sz="2550" dirty="0"/>
           </a:p>
@@ -22543,7 +23021,7 @@
               <a:buNone/>
             </a:pPr>
             <a:r>
-              <a:rPr lang="en-US" sz="3900" dirty="0" spc="4" kern="0">
+              <a:rPr lang="en-US" sz="3900" dirty="0" spc="-4" kern="0">
                 <a:solidFill>
                   <a:srgbClr val="F3EEE3"/>
                 </a:solidFill>
@@ -22551,7 +23029,7 @@
                 <a:ea typeface="Bricolage Grotesque ExtraBold" pitchFamily="34" charset="-122"/>
                 <a:cs typeface="Bricolage Grotesque ExtraBold" pitchFamily="34" charset="-120"/>
               </a:rPr>
-              <a:t>5</a:t>
+              <a:t>6</a:t>
             </a:r>
             <a:endParaRPr lang="en-US" sz="3900" dirty="0"/>
           </a:p>
@@ -22582,7 +23060,7 @@
               <a:buNone/>
             </a:pPr>
             <a:r>
-              <a:rPr lang="en-US" sz="3150" dirty="0" spc="-25" kern="0">
+              <a:rPr lang="en-US" sz="3150" dirty="0" spc="-2" kern="0">
                 <a:solidFill>
                   <a:srgbClr val="14161C"/>
                 </a:solidFill>
@@ -22590,10 +23068,10 @@
                 <a:ea typeface="Bricolage Grotesque ExtraBold" pitchFamily="34" charset="-122"/>
                 <a:cs typeface="Bricolage Grotesque ExtraBold" pitchFamily="34" charset="-120"/>
               </a:rPr>
-              <a:t>Xác</a:t>
-            </a:r>
-            <a:r>
-              <a:rPr lang="en-US" sz="3150" dirty="0" spc="-26" kern="0">
+              <a:t>Cơ</a:t>
+            </a:r>
+            <a:r>
+              <a:rPr lang="en-US" sz="3150" dirty="0" spc="1" kern="0">
                 <a:solidFill>
                   <a:srgbClr val="14161C"/>
                 </a:solidFill>
@@ -22601,10 +23079,10 @@
                 <a:ea typeface="Bricolage Grotesque ExtraBold" pitchFamily="34" charset="-122"/>
                 <a:cs typeface="Bricolage Grotesque ExtraBold" pitchFamily="34" charset="-120"/>
               </a:rPr>
-              <a:t> thực</a:t>
-            </a:r>
-            <a:r>
-              <a:rPr lang="en-US" sz="3150" dirty="0" spc="-35" kern="0">
+              <a:t> sở</a:t>
+            </a:r>
+            <a:r>
+              <a:rPr lang="en-US" sz="3150" dirty="0" spc="2" kern="0">
                 <a:solidFill>
                   <a:srgbClr val="14161C"/>
                 </a:solidFill>
@@ -22612,10 +23090,10 @@
                 <a:ea typeface="Bricolage Grotesque ExtraBold" pitchFamily="34" charset="-122"/>
                 <a:cs typeface="Bricolage Grotesque ExtraBold" pitchFamily="34" charset="-120"/>
               </a:rPr>
-              <a:t> và</a:t>
-            </a:r>
-            <a:r>
-              <a:rPr lang="en-US" sz="3150" dirty="0" spc="2" kern="0">
+              <a:t> dữ</a:t>
+            </a:r>
+            <a:r>
+              <a:rPr lang="en-US" sz="3150" dirty="0" spc="4" kern="0">
                 <a:solidFill>
                   <a:srgbClr val="14161C"/>
                 </a:solidFill>
@@ -22623,18 +23101,7 @@
                 <a:ea typeface="Bricolage Grotesque ExtraBold" pitchFamily="34" charset="-122"/>
                 <a:cs typeface="Bricolage Grotesque ExtraBold" pitchFamily="34" charset="-120"/>
               </a:rPr>
-              <a:t> kiểm</a:t>
-            </a:r>
-            <a:r>
-              <a:rPr lang="en-US" sz="3150" dirty="0" spc="-1" kern="0">
-                <a:solidFill>
-                  <a:srgbClr val="14161C"/>
-                </a:solidFill>
-                <a:latin typeface="Bricolage Grotesque ExtraBold" pitchFamily="34" charset="0"/>
-                <a:ea typeface="Bricolage Grotesque ExtraBold" pitchFamily="34" charset="-122"/>
-                <a:cs typeface="Bricolage Grotesque ExtraBold" pitchFamily="34" charset="-120"/>
-              </a:rPr>
-              <a:t> thử</a:t>
+              <a:t> liệu</a:t>
             </a:r>
             <a:endParaRPr lang="en-US" sz="3150" dirty="0"/>
           </a:p>
@@ -22668,6 +23135,105 @@
               <a:buNone/>
             </a:pPr>
             <a:r>
+              <a:rPr lang="en-US" sz="2100" dirty="0" spc="-62" kern="0">
+                <a:solidFill>
+                  <a:srgbClr val="14161C"/>
+                </a:solidFill>
+                <a:latin typeface="Be Vietnam Pro" pitchFamily="34" charset="0"/>
+                <a:ea typeface="Be Vietnam Pro" pitchFamily="34" charset="-122"/>
+                <a:cs typeface="Be Vietnam Pro" pitchFamily="34" charset="-120"/>
+              </a:rPr>
+              <a:t>Tài</a:t>
+            </a:r>
+            <a:r>
+              <a:rPr lang="en-US" sz="2100" dirty="0" spc="1" kern="0">
+                <a:solidFill>
+                  <a:srgbClr val="14161C"/>
+                </a:solidFill>
+                <a:latin typeface="Be Vietnam Pro" pitchFamily="34" charset="0"/>
+                <a:ea typeface="Be Vietnam Pro" pitchFamily="34" charset="-122"/>
+                <a:cs typeface="Be Vietnam Pro" pitchFamily="34" charset="-120"/>
+              </a:rPr>
+              <a:t> liệu</a:t>
+            </a:r>
+            <a:r>
+              <a:rPr lang="en-US" sz="2100" dirty="0" spc="5" kern="0">
+                <a:solidFill>
+                  <a:srgbClr val="14161C"/>
+                </a:solidFill>
+                <a:latin typeface="Be Vietnam Pro" pitchFamily="34" charset="0"/>
+                <a:ea typeface="Be Vietnam Pro" pitchFamily="34" charset="-122"/>
+                <a:cs typeface="Be Vietnam Pro" pitchFamily="34" charset="-120"/>
+              </a:rPr>
+              <a:t> Python:</a:t>
+            </a:r>
+            <a:r>
+              <a:rPr lang="en-US" sz="2100" dirty="0" spc="-3" kern="0">
+                <a:solidFill>
+                  <a:srgbClr val="14161C"/>
+                </a:solidFill>
+                <a:latin typeface="Be Vietnam Pro" pitchFamily="34" charset="0"/>
+                <a:ea typeface="Be Vietnam Pro" pitchFamily="34" charset="-122"/>
+                <a:cs typeface="Be Vietnam Pro" pitchFamily="34" charset="-120"/>
+              </a:rPr>
+              <a:t> làm</a:t>
+            </a:r>
+            <a:r>
+              <a:rPr lang="en-US" sz="2100" dirty="0" spc="-1" kern="0">
+                <a:solidFill>
+                  <a:srgbClr val="14161C"/>
+                </a:solidFill>
+                <a:latin typeface="Be Vietnam Pro" pitchFamily="34" charset="0"/>
+                <a:ea typeface="Be Vietnam Pro" pitchFamily="34" charset="-122"/>
+                <a:cs typeface="Be Vietnam Pro" pitchFamily="34" charset="-120"/>
+              </a:rPr>
+              <a:t> thử</a:t>
+            </a:r>
+            <a:r>
+              <a:rPr lang="en-US" sz="2100" dirty="0" spc="-12" kern="0">
+                <a:solidFill>
+                  <a:srgbClr val="14161C"/>
+                </a:solidFill>
+                <a:latin typeface="Be Vietnam Pro" pitchFamily="34" charset="0"/>
+                <a:ea typeface="Be Vietnam Pro" pitchFamily="34" charset="-122"/>
+                <a:cs typeface="Be Vietnam Pro" pitchFamily="34" charset="-120"/>
+              </a:rPr>
+              <a:t> với</a:t>
+            </a:r>
+            <a:r>
+              <a:rPr lang="en-US" sz="2100" dirty="0" spc="-3" kern="0">
+                <a:solidFill>
+                  <a:srgbClr val="14161C"/>
+                </a:solidFill>
+                <a:latin typeface="Be Vietnam Pro" pitchFamily="34" charset="0"/>
+                <a:ea typeface="Be Vietnam Pro" pitchFamily="34" charset="-122"/>
+                <a:cs typeface="Be Vietnam Pro" pitchFamily="34" charset="-120"/>
+              </a:rPr>
+              <a:t> SQLite</a:t>
+            </a:r>
+            <a:r>
+              <a:rPr lang="en-US" sz="2100" dirty="0" spc="-23" kern="0">
+                <a:solidFill>
+                  <a:srgbClr val="14161C"/>
+                </a:solidFill>
+                <a:latin typeface="Be Vietnam Pro" pitchFamily="34" charset="0"/>
+                <a:ea typeface="Be Vietnam Pro" pitchFamily="34" charset="-122"/>
+                <a:cs typeface="Be Vietnam Pro" pitchFamily="34" charset="-120"/>
+              </a:rPr>
+              <a:t> rồi</a:t>
+            </a:r>
+            <a:r>
+              <a:rPr lang="en-US" sz="2100" dirty="0" spc="-10" kern="0">
+                <a:solidFill>
+                  <a:srgbClr val="14161C"/>
+                </a:solidFill>
+                <a:latin typeface="Be Vietnam Pro" pitchFamily="34" charset="0"/>
+                <a:ea typeface="Be Vietnam Pro" pitchFamily="34" charset="-122"/>
+                <a:cs typeface="Be Vietnam Pro" pitchFamily="34" charset="-120"/>
+              </a:rPr>
+              <a:t> chuyển</a:t>
+            </a:r>
+            <a:r>
               <a:rPr lang="en-US" sz="2100" dirty="0" spc="-5" kern="0">
                 <a:solidFill>
                   <a:srgbClr val="14161C"/>
@@ -22676,7 +23242,18 @@
                 <a:ea typeface="Be Vietnam Pro" pitchFamily="34" charset="-122"/>
                 <a:cs typeface="Be Vietnam Pro" pitchFamily="34" charset="-120"/>
               </a:rPr>
-              <a:t>Học</a:t>
+              <a:t> sang</a:t>
+            </a:r>
+            <a:r>
+              <a:rPr lang="en-US" sz="2100" dirty="0" spc="0" kern="0">
+                <a:solidFill>
+                  <a:srgbClr val="14161C"/>
+                </a:solidFill>
+                <a:latin typeface="Be Vietnam Pro" pitchFamily="34" charset="0"/>
+                <a:ea typeface="Be Vietnam Pro" pitchFamily="34" charset="-122"/>
+                <a:cs typeface="Be Vietnam Pro" pitchFamily="34" charset="-120"/>
+              </a:rPr>
+              <a:t> hệ</a:t>
             </a:r>
             <a:r>
               <a:rPr lang="en-US" sz="2100" dirty="0" spc="-2" kern="0">
@@ -22687,40 +23264,7 @@
                 <a:ea typeface="Be Vietnam Pro" pitchFamily="34" charset="-122"/>
                 <a:cs typeface="Be Vietnam Pro" pitchFamily="34" charset="-120"/>
               </a:rPr>
-              <a:t> cách</a:t>
-            </a:r>
-            <a:r>
-              <a:rPr lang="en-US" sz="2100" dirty="0" spc="-6" kern="0">
-                <a:solidFill>
-                  <a:srgbClr val="14161C"/>
-                </a:solidFill>
-                <a:latin typeface="Be Vietnam Pro" pitchFamily="34" charset="0"/>
-                <a:ea typeface="Be Vietnam Pro" pitchFamily="34" charset="-122"/>
-                <a:cs typeface="Be Vietnam Pro" pitchFamily="34" charset="-120"/>
-              </a:rPr>
-              <a:t> bảo</a:t>
-            </a:r>
-            <a:r>
-              <a:rPr lang="en-US" sz="2100" dirty="0" spc="-16" kern="0">
-                <a:solidFill>
-                  <a:srgbClr val="14161C"/>
-                </a:solidFill>
-                <a:latin typeface="Be Vietnam Pro" pitchFamily="34" charset="0"/>
-                <a:ea typeface="Be Vietnam Pro" pitchFamily="34" charset="-122"/>
-                <a:cs typeface="Be Vietnam Pro" pitchFamily="34" charset="-120"/>
-              </a:rPr>
-              <a:t> vệ</a:t>
-            </a:r>
-            <a:r>
-              <a:rPr lang="en-US" sz="2100" dirty="0" spc="22" kern="0">
-                <a:solidFill>
-                  <a:srgbClr val="14161C"/>
-                </a:solidFill>
-                <a:latin typeface="Be Vietnam Pro" pitchFamily="34" charset="0"/>
-                <a:ea typeface="Be Vietnam Pro" pitchFamily="34" charset="-122"/>
-                <a:cs typeface="Be Vietnam Pro" pitchFamily="34" charset="-120"/>
-              </a:rPr>
-              <a:t> ứng</a:t>
+              <a:t> lớn</a:t>
             </a:r>
             <a:r>
               <a:rPr lang="en-US" sz="2100" dirty="0" spc="-1" kern="0">
@@ -22731,84 +23275,18 @@
                 <a:ea typeface="Be Vietnam Pro" pitchFamily="34" charset="-122"/>
                 <a:cs typeface="Be Vietnam Pro" pitchFamily="34" charset="-120"/>
               </a:rPr>
-              <a:t> dụng</a:t>
-            </a:r>
-            <a:r>
-              <a:rPr lang="en-US" sz="2100" dirty="0" spc="-4" kern="0">
-                <a:solidFill>
-                  <a:srgbClr val="14161C"/>
-                </a:solidFill>
-                <a:latin typeface="Be Vietnam Pro" pitchFamily="34" charset="0"/>
-                <a:ea typeface="Be Vietnam Pro" pitchFamily="34" charset="-122"/>
-                <a:cs typeface="Be Vietnam Pro" pitchFamily="34" charset="-120"/>
-              </a:rPr>
-              <a:t> bằng</a:t>
-            </a:r>
-            <a:r>
-              <a:rPr lang="en-US" sz="2100" dirty="0" spc="-30" kern="0">
-                <a:solidFill>
-                  <a:srgbClr val="14161C"/>
-                </a:solidFill>
-                <a:latin typeface="Be Vietnam Pro" pitchFamily="34" charset="0"/>
-                <a:ea typeface="Be Vietnam Pro" pitchFamily="34" charset="-122"/>
-                <a:cs typeface="Be Vietnam Pro" pitchFamily="34" charset="-120"/>
-              </a:rPr>
-              <a:t> JWT,</a:t>
-            </a:r>
-            <a:r>
-              <a:rPr lang="en-US" sz="2100" dirty="0" spc="-17" kern="0">
-                <a:solidFill>
-                  <a:srgbClr val="14161C"/>
-                </a:solidFill>
-                <a:latin typeface="Be Vietnam Pro" pitchFamily="34" charset="0"/>
-                <a:ea typeface="Be Vietnam Pro" pitchFamily="34" charset="-122"/>
-                <a:cs typeface="Be Vietnam Pro" pitchFamily="34" charset="-120"/>
-              </a:rPr>
-              <a:t> OAuth2;</a:t>
-            </a:r>
-            <a:r>
-              <a:rPr lang="en-US" sz="2100" dirty="0" spc="-1" kern="0">
-                <a:solidFill>
-                  <a:srgbClr val="14161C"/>
-                </a:solidFill>
-                <a:latin typeface="Be Vietnam Pro" pitchFamily="34" charset="0"/>
-                <a:ea typeface="Be Vietnam Pro" pitchFamily="34" charset="-122"/>
-                <a:cs typeface="Be Vietnam Pro" pitchFamily="34" charset="-120"/>
-              </a:rPr>
-              <a:t> thành</a:t>
-            </a:r>
-            <a:r>
-              <a:rPr lang="en-US" sz="2100" dirty="0" spc="-3" kern="0">
-                <a:solidFill>
-                  <a:srgbClr val="14161C"/>
-                </a:solidFill>
-                <a:latin typeface="Be Vietnam Pro" pitchFamily="34" charset="0"/>
-                <a:ea typeface="Be Vietnam Pro" pitchFamily="34" charset="-122"/>
-                <a:cs typeface="Be Vietnam Pro" pitchFamily="34" charset="-120"/>
-              </a:rPr>
-              <a:t> thạo</a:t>
-            </a:r>
-            <a:r>
-              <a:rPr lang="en-US" sz="2100" dirty="0" spc="2" kern="0">
-                <a:solidFill>
-                  <a:srgbClr val="14161C"/>
-                </a:solidFill>
-                <a:latin typeface="Be Vietnam Pro" pitchFamily="34" charset="0"/>
-                <a:ea typeface="Be Vietnam Pro" pitchFamily="34" charset="-122"/>
-                <a:cs typeface="Be Vietnam Pro" pitchFamily="34" charset="-120"/>
-              </a:rPr>
-              <a:t> kiểm</a:t>
-            </a:r>
-            <a:r>
-              <a:rPr lang="en-US" sz="2100" dirty="0" spc="-1" kern="0">
-                <a:solidFill>
-                  <a:srgbClr val="14161C"/>
-                </a:solidFill>
-                <a:latin typeface="Be Vietnam Pro" pitchFamily="34" charset="0"/>
-                <a:ea typeface="Be Vietnam Pro" pitchFamily="34" charset="-122"/>
-                <a:cs typeface="Be Vietnam Pro" pitchFamily="34" charset="-120"/>
-              </a:rPr>
-              <a:t> thử.</a:t>
+              <a:t> hơn như</a:t>
+            </a:r>
+            <a:r>
+              <a:rPr lang="en-US" sz="2100" dirty="0" spc="-14" kern="0">
+                <a:solidFill>
+                  <a:srgbClr val="14161C"/>
+                </a:solidFill>
+                <a:latin typeface="Be Vietnam Pro" pitchFamily="34" charset="0"/>
+                <a:ea typeface="Be Vietnam Pro" pitchFamily="34" charset="-122"/>
+                <a:cs typeface="Be Vietnam Pro" pitchFamily="34" charset="-120"/>
+              </a:rPr>
+              <a:t> PostgreSQL.</a:t>
             </a:r>
             <a:endParaRPr lang="en-US" sz="2100" dirty="0"/>
           </a:p>
@@ -22965,7 +23443,40 @@
                 <a:ea typeface="Be Vietnam Pro" pitchFamily="34" charset="-122"/>
                 <a:cs typeface="Be Vietnam Pro" pitchFamily="34" charset="-120"/>
               </a:rPr>
-              <a:t> Actions,</a:t>
+              <a:t> Actions:</a:t>
+            </a:r>
+            <a:r>
+              <a:rPr lang="en-US" sz="2100" dirty="0" spc="-25" kern="0">
+                <a:solidFill>
+                  <a:srgbClr val="14161C"/>
+                </a:solidFill>
+                <a:latin typeface="Be Vietnam Pro" pitchFamily="34" charset="0"/>
+                <a:ea typeface="Be Vietnam Pro" pitchFamily="34" charset="-122"/>
+                <a:cs typeface="Be Vietnam Pro" pitchFamily="34" charset="-120"/>
+              </a:rPr>
+              <a:t> xây</a:t>
+            </a:r>
+            <a:r>
+              <a:rPr lang="en-US" sz="2100" dirty="0" spc="16" kern="0">
+                <a:solidFill>
+                  <a:srgbClr val="14161C"/>
+                </a:solidFill>
+                <a:latin typeface="Be Vietnam Pro" pitchFamily="34" charset="0"/>
+                <a:ea typeface="Be Vietnam Pro" pitchFamily="34" charset="-122"/>
+                <a:cs typeface="Be Vietnam Pro" pitchFamily="34" charset="-120"/>
+              </a:rPr>
+              <a:t> dựng</a:t>
+            </a:r>
+            <a:r>
+              <a:rPr lang="en-US" sz="2100" dirty="0" spc="-18" kern="0">
+                <a:solidFill>
+                  <a:srgbClr val="14161C"/>
+                </a:solidFill>
+                <a:latin typeface="Be Vietnam Pro" pitchFamily="34" charset="0"/>
+                <a:ea typeface="Be Vietnam Pro" pitchFamily="34" charset="-122"/>
+                <a:cs typeface="Be Vietnam Pro" pitchFamily="34" charset="-120"/>
+              </a:rPr>
+              <a:t> và</a:t>
             </a:r>
             <a:r>
               <a:rPr lang="en-US" sz="2100" dirty="0" spc="2" kern="0">
@@ -22976,51 +23487,7 @@
                 <a:ea typeface="Be Vietnam Pro" pitchFamily="34" charset="-122"/>
                 <a:cs typeface="Be Vietnam Pro" pitchFamily="34" charset="-120"/>
               </a:rPr>
-              <a:t> Jenkins</a:t>
-            </a:r>
-            <a:r>
-              <a:rPr lang="en-US" sz="2100" dirty="0" spc="-5" kern="0">
-                <a:solidFill>
-                  <a:srgbClr val="14161C"/>
-                </a:solidFill>
-                <a:latin typeface="Be Vietnam Pro" pitchFamily="34" charset="0"/>
-                <a:ea typeface="Be Vietnam Pro" pitchFamily="34" charset="-122"/>
-                <a:cs typeface="Be Vietnam Pro" pitchFamily="34" charset="-120"/>
-              </a:rPr>
-              <a:t> hoặc</a:t>
-            </a:r>
-            <a:r>
-              <a:rPr lang="en-US" sz="2100" dirty="0" spc="-9" kern="0">
-                <a:solidFill>
-                  <a:srgbClr val="14161C"/>
-                </a:solidFill>
-                <a:latin typeface="Be Vietnam Pro" pitchFamily="34" charset="0"/>
-                <a:ea typeface="Be Vietnam Pro" pitchFamily="34" charset="-122"/>
-                <a:cs typeface="Be Vietnam Pro" pitchFamily="34" charset="-120"/>
-              </a:rPr>
-              <a:t> CircleCI</a:t>
-            </a:r>
-            <a:r>
-              <a:rPr lang="en-US" sz="2100" dirty="0" spc="14" kern="0">
-                <a:solidFill>
-                  <a:srgbClr val="14161C"/>
-                </a:solidFill>
-                <a:latin typeface="Be Vietnam Pro" pitchFamily="34" charset="0"/>
-                <a:ea typeface="Be Vietnam Pro" pitchFamily="34" charset="-122"/>
-                <a:cs typeface="Be Vietnam Pro" pitchFamily="34" charset="-120"/>
-              </a:rPr>
-              <a:t> để</a:t>
-            </a:r>
-            <a:r>
-              <a:rPr lang="en-US" sz="2100" dirty="0" spc="-5" kern="0">
-                <a:solidFill>
-                  <a:srgbClr val="14161C"/>
-                </a:solidFill>
-                <a:latin typeface="Be Vietnam Pro" pitchFamily="34" charset="0"/>
-                <a:ea typeface="Be Vietnam Pro" pitchFamily="34" charset="-122"/>
-                <a:cs typeface="Be Vietnam Pro" pitchFamily="34" charset="-120"/>
-              </a:rPr>
-              <a:t> học</a:t>
+              <a:t> kiểm</a:t>
             </a:r>
             <a:r>
               <a:rPr lang="en-US" sz="2100" dirty="0" spc="-1" kern="0">
@@ -23031,51 +23498,7 @@
                 <a:ea typeface="Be Vietnam Pro" pitchFamily="34" charset="-122"/>
                 <a:cs typeface="Be Vietnam Pro" pitchFamily="34" charset="-120"/>
               </a:rPr>
-              <a:t> tích</a:t>
-            </a:r>
-            <a:r>
-              <a:rPr lang="en-US" sz="2100" dirty="0" spc="-4" kern="0">
-                <a:solidFill>
-                  <a:srgbClr val="14161C"/>
-                </a:solidFill>
-                <a:latin typeface="Be Vietnam Pro" pitchFamily="34" charset="0"/>
-                <a:ea typeface="Be Vietnam Pro" pitchFamily="34" charset="-122"/>
-                <a:cs typeface="Be Vietnam Pro" pitchFamily="34" charset="-120"/>
-              </a:rPr>
-              <a:t> hợp</a:t>
-            </a:r>
-            <a:r>
-              <a:rPr lang="en-US" sz="2100" dirty="0" spc="1" kern="0">
-                <a:solidFill>
-                  <a:srgbClr val="14161C"/>
-                </a:solidFill>
-                <a:latin typeface="Be Vietnam Pro" pitchFamily="34" charset="0"/>
-                <a:ea typeface="Be Vietnam Pro" pitchFamily="34" charset="-122"/>
-                <a:cs typeface="Be Vietnam Pro" pitchFamily="34" charset="-120"/>
-              </a:rPr>
-              <a:t> liên</a:t>
-            </a:r>
-            <a:r>
-              <a:rPr lang="en-US" sz="2100" dirty="0" spc="0" kern="0">
-                <a:solidFill>
-                  <a:srgbClr val="14161C"/>
-                </a:solidFill>
-                <a:latin typeface="Be Vietnam Pro" pitchFamily="34" charset="0"/>
-                <a:ea typeface="Be Vietnam Pro" pitchFamily="34" charset="-122"/>
-                <a:cs typeface="Be Vietnam Pro" pitchFamily="34" charset="-120"/>
-              </a:rPr>
-              <a:t> tục</a:t>
-            </a:r>
-            <a:r>
-              <a:rPr lang="en-US" sz="2100" dirty="0" spc="-18" kern="0">
-                <a:solidFill>
-                  <a:srgbClr val="14161C"/>
-                </a:solidFill>
-                <a:latin typeface="Be Vietnam Pro" pitchFamily="34" charset="0"/>
-                <a:ea typeface="Be Vietnam Pro" pitchFamily="34" charset="-122"/>
-                <a:cs typeface="Be Vietnam Pro" pitchFamily="34" charset="-120"/>
-              </a:rPr>
-              <a:t> và</a:t>
+              <a:t> thử</a:t>
             </a:r>
             <a:r>
               <a:rPr lang="en-US" sz="2100" dirty="0" spc="-2" kern="0">
@@ -23086,40 +23509,18 @@
                 <a:ea typeface="Be Vietnam Pro" pitchFamily="34" charset="-122"/>
                 <a:cs typeface="Be Vietnam Pro" pitchFamily="34" charset="-120"/>
               </a:rPr>
-              <a:t> phân</a:t>
-            </a:r>
-            <a:r>
-              <a:rPr lang="en-US" sz="2100" dirty="0" spc="-3" kern="0">
-                <a:solidFill>
-                  <a:srgbClr val="14161C"/>
-                </a:solidFill>
-                <a:latin typeface="Be Vietnam Pro" pitchFamily="34" charset="0"/>
-                <a:ea typeface="Be Vietnam Pro" pitchFamily="34" charset="-122"/>
-                <a:cs typeface="Be Vietnam Pro" pitchFamily="34" charset="-120"/>
-              </a:rPr>
-              <a:t> phối</a:t>
-            </a:r>
-            <a:r>
-              <a:rPr lang="en-US" sz="2100" dirty="0" spc="1" kern="0">
-                <a:solidFill>
-                  <a:srgbClr val="14161C"/>
-                </a:solidFill>
-                <a:latin typeface="Be Vietnam Pro" pitchFamily="34" charset="0"/>
-                <a:ea typeface="Be Vietnam Pro" pitchFamily="34" charset="-122"/>
-                <a:cs typeface="Be Vietnam Pro" pitchFamily="34" charset="-120"/>
-              </a:rPr>
-              <a:t> liên</a:t>
-            </a:r>
-            <a:r>
-              <a:rPr lang="en-US" sz="2100" dirty="0" spc="0" kern="0">
-                <a:solidFill>
-                  <a:srgbClr val="14161C"/>
-                </a:solidFill>
-                <a:latin typeface="Be Vietnam Pro" pitchFamily="34" charset="0"/>
-                <a:ea typeface="Be Vietnam Pro" pitchFamily="34" charset="-122"/>
-                <a:cs typeface="Be Vietnam Pro" pitchFamily="34" charset="-120"/>
-              </a:rPr>
-              <a:t> tục.</a:t>
+              <a:t> mỗi pull</a:t>
+            </a:r>
+            <a:r>
+              <a:rPr lang="en-US" sz="2100" dirty="0" spc="-15" kern="0">
+                <a:solidFill>
+                  <a:srgbClr val="14161C"/>
+                </a:solidFill>
+                <a:latin typeface="Be Vietnam Pro" pitchFamily="34" charset="0"/>
+                <a:ea typeface="Be Vietnam Pro" pitchFamily="34" charset="-122"/>
+                <a:cs typeface="Be Vietnam Pro" pitchFamily="34" charset="-120"/>
+              </a:rPr>
+              <a:t> request.</a:t>
             </a:r>
             <a:endParaRPr lang="en-US" sz="2100" dirty="0"/>
           </a:p>
@@ -23142,7 +23543,7 @@
             </a:avLst>
           </a:prstGeom>
           <a:solidFill>
-            <a:srgbClr val="E4DAF6"/>
+            <a:srgbClr val="F3DFB8"/>
           </a:solidFill>
           <a:ln/>
         </p:spPr>
@@ -23164,7 +23565,7 @@
             </a:avLst>
           </a:prstGeom>
           <a:solidFill>
-            <a:srgbClr val="6D28D9"/>
+            <a:srgbClr val="B45309"/>
           </a:solidFill>
           <a:ln/>
         </p:spPr>
@@ -23176,7 +23577,7 @@
               <a:buNone/>
             </a:pPr>
             <a:r>
-              <a:rPr lang="en-US" sz="3900" dirty="0" spc="-4" kern="0">
+              <a:rPr lang="en-US" sz="3900" dirty="0" spc="5" kern="0">
                 <a:solidFill>
                   <a:srgbClr val="F3EEE3"/>
                 </a:solidFill>
@@ -23184,7 +23585,7 @@
                 <a:ea typeface="Bricolage Grotesque ExtraBold" pitchFamily="34" charset="-122"/>
                 <a:cs typeface="Bricolage Grotesque ExtraBold" pitchFamily="34" charset="-120"/>
               </a:rPr>
-              <a:t>11</a:t>
+              <a:t>4</a:t>
             </a:r>
             <a:endParaRPr lang="en-US" sz="3900" dirty="0"/>
           </a:p>
@@ -23215,7 +23616,7 @@
               <a:buNone/>
             </a:pPr>
             <a:r>
-              <a:rPr lang="en-US" sz="3150" dirty="0" spc="0" kern="0">
+              <a:rPr lang="en-US" sz="3150" dirty="0" spc="-1" kern="0">
                 <a:solidFill>
                   <a:srgbClr val="14161C"/>
                 </a:solidFill>
@@ -23223,10 +23624,10 @@
                 <a:ea typeface="Bricolage Grotesque ExtraBold" pitchFamily="34" charset="-122"/>
                 <a:cs typeface="Bricolage Grotesque ExtraBold" pitchFamily="34" charset="-120"/>
               </a:rPr>
-              <a:t>Công</a:t>
-            </a:r>
-            <a:r>
-              <a:rPr lang="en-US" sz="3150" dirty="0" spc="1" kern="0">
+              <a:t>Máy</a:t>
+            </a:r>
+            <a:r>
+              <a:rPr lang="en-US" sz="3150" dirty="0" spc="0" kern="0">
                 <a:solidFill>
                   <a:srgbClr val="14161C"/>
                 </a:solidFill>
@@ -23234,10 +23635,10 @@
                 <a:ea typeface="Bricolage Grotesque ExtraBold" pitchFamily="34" charset="-122"/>
                 <a:cs typeface="Bricolage Grotesque ExtraBold" pitchFamily="34" charset="-120"/>
               </a:rPr>
-              <a:t> cụ</a:t>
-            </a:r>
-            <a:r>
-              <a:rPr lang="en-US" sz="3150" dirty="0" spc="2" kern="0">
+              <a:t> chủ</a:t>
+            </a:r>
+            <a:r>
+              <a:rPr lang="en-US" sz="3150" dirty="0" spc="-13" kern="0">
                 <a:solidFill>
                   <a:srgbClr val="14161C"/>
                 </a:solidFill>
@@ -23245,7 +23646,40 @@
                 <a:ea typeface="Bricolage Grotesque ExtraBold" pitchFamily="34" charset="-122"/>
                 <a:cs typeface="Bricolage Grotesque ExtraBold" pitchFamily="34" charset="-120"/>
               </a:rPr>
-              <a:t> AI</a:t>
+              <a:t> web</a:t>
+            </a:r>
+            <a:r>
+              <a:rPr lang="en-US" sz="3150" dirty="0" spc="-36" kern="0">
+                <a:solidFill>
+                  <a:srgbClr val="14161C"/>
+                </a:solidFill>
+                <a:latin typeface="Bricolage Grotesque ExtraBold" pitchFamily="34" charset="0"/>
+                <a:ea typeface="Bricolage Grotesque ExtraBold" pitchFamily="34" charset="-122"/>
+                <a:cs typeface="Bricolage Grotesque ExtraBold" pitchFamily="34" charset="-120"/>
+              </a:rPr>
+              <a:t> và</a:t>
+            </a:r>
+            <a:r>
+              <a:rPr lang="en-US" sz="3150" dirty="0" spc="2" kern="0">
+                <a:solidFill>
+                  <a:srgbClr val="14161C"/>
+                </a:solidFill>
+                <a:latin typeface="Bricolage Grotesque ExtraBold" pitchFamily="34" charset="0"/>
+                <a:ea typeface="Bricolage Grotesque ExtraBold" pitchFamily="34" charset="-122"/>
+                <a:cs typeface="Bricolage Grotesque ExtraBold" pitchFamily="34" charset="-120"/>
+              </a:rPr>
+              <a:t> lưu</a:t>
+            </a:r>
+            <a:r>
+              <a:rPr lang="en-US" sz="3150" dirty="0" spc="4" kern="0">
+                <a:solidFill>
+                  <a:srgbClr val="14161C"/>
+                </a:solidFill>
+                <a:latin typeface="Bricolage Grotesque ExtraBold" pitchFamily="34" charset="0"/>
+                <a:ea typeface="Bricolage Grotesque ExtraBold" pitchFamily="34" charset="-122"/>
+                <a:cs typeface="Bricolage Grotesque ExtraBold" pitchFamily="34" charset="-120"/>
+              </a:rPr>
+              <a:t> trữ</a:t>
             </a:r>
             <a:endParaRPr lang="en-US" sz="3150" dirty="0"/>
           </a:p>
@@ -23279,15 +23713,26 @@
               <a:buNone/>
             </a:pPr>
             <a:r>
-              <a:rPr lang="en-US" sz="2100" dirty="0" spc="-62" kern="0">
-                <a:solidFill>
-                  <a:srgbClr val="14161C"/>
-                </a:solidFill>
-                <a:latin typeface="Be Vietnam Pro" pitchFamily="34" charset="0"/>
-                <a:ea typeface="Be Vietnam Pro" pitchFamily="34" charset="-122"/>
-                <a:cs typeface="Be Vietnam Pro" pitchFamily="34" charset="-120"/>
-              </a:rPr>
-              <a:t>Tận</a:t>
+              <a:rPr lang="en-US" sz="2100" dirty="0" spc="-17" kern="0">
+                <a:solidFill>
+                  <a:srgbClr val="14161C"/>
+                </a:solidFill>
+                <a:latin typeface="Be Vietnam Pro" pitchFamily="34" charset="0"/>
+                <a:ea typeface="Be Vietnam Pro" pitchFamily="34" charset="-122"/>
+                <a:cs typeface="Be Vietnam Pro" pitchFamily="34" charset="-120"/>
+              </a:rPr>
+              <a:t>Kubernetes:</a:t>
+            </a:r>
+            <a:r>
+              <a:rPr lang="en-US" sz="2100" dirty="0" spc="-9" kern="0">
+                <a:solidFill>
+                  <a:srgbClr val="14161C"/>
+                </a:solidFill>
+                <a:latin typeface="Be Vietnam Pro" pitchFamily="34" charset="0"/>
+                <a:ea typeface="Be Vietnam Pro" pitchFamily="34" charset="-122"/>
+                <a:cs typeface="Be Vietnam Pro" pitchFamily="34" charset="-120"/>
+              </a:rPr>
+              <a:t> chạy container</a:t>
             </a:r>
             <a:r>
               <a:rPr lang="en-US" sz="2100" dirty="0" spc="-1" kern="0">
@@ -23298,51 +23743,7 @@
                 <a:ea typeface="Be Vietnam Pro" pitchFamily="34" charset="-122"/>
                 <a:cs typeface="Be Vietnam Pro" pitchFamily="34" charset="-120"/>
               </a:rPr>
-              <a:t> dụng GitHub</a:t>
-            </a:r>
-            <a:r>
-              <a:rPr lang="en-US" sz="2100" dirty="0" spc="-4" kern="0">
-                <a:solidFill>
-                  <a:srgbClr val="14161C"/>
-                </a:solidFill>
-                <a:latin typeface="Be Vietnam Pro" pitchFamily="34" charset="0"/>
-                <a:ea typeface="Be Vietnam Pro" pitchFamily="34" charset="-122"/>
-                <a:cs typeface="Be Vietnam Pro" pitchFamily="34" charset="-120"/>
-              </a:rPr>
-              <a:t> Copilot,</a:t>
-            </a:r>
-            <a:r>
-              <a:rPr lang="en-US" sz="2100" dirty="0" spc="-36" kern="0">
-                <a:solidFill>
-                  <a:srgbClr val="14161C"/>
-                </a:solidFill>
-                <a:latin typeface="Be Vietnam Pro" pitchFamily="34" charset="0"/>
-                <a:ea typeface="Be Vietnam Pro" pitchFamily="34" charset="-122"/>
-                <a:cs typeface="Be Vietnam Pro" pitchFamily="34" charset="-120"/>
-              </a:rPr>
-              <a:t> ChatGPT,</a:t>
-            </a:r>
-            <a:r>
-              <a:rPr lang="en-US" sz="2100" dirty="0" spc="-12" kern="0">
-                <a:solidFill>
-                  <a:srgbClr val="14161C"/>
-                </a:solidFill>
-                <a:latin typeface="Be Vietnam Pro" pitchFamily="34" charset="0"/>
-                <a:ea typeface="Be Vietnam Pro" pitchFamily="34" charset="-122"/>
-                <a:cs typeface="Be Vietnam Pro" pitchFamily="34" charset="-120"/>
-              </a:rPr>
-              <a:t> Langchain</a:t>
-            </a:r>
-            <a:r>
-              <a:rPr lang="en-US" sz="2100" dirty="0" spc="14" kern="0">
-                <a:solidFill>
-                  <a:srgbClr val="14161C"/>
-                </a:solidFill>
-                <a:latin typeface="Be Vietnam Pro" pitchFamily="34" charset="0"/>
-                <a:ea typeface="Be Vietnam Pro" pitchFamily="34" charset="-122"/>
-                <a:cs typeface="Be Vietnam Pro" pitchFamily="34" charset="-120"/>
-              </a:rPr>
-              <a:t> để</a:t>
+              <a:t> khác</a:t>
             </a:r>
             <a:r>
               <a:rPr lang="en-US" sz="2100" dirty="0" spc="0" kern="0">
@@ -23353,51 +23754,40 @@
                 <a:ea typeface="Be Vietnam Pro" pitchFamily="34" charset="-122"/>
                 <a:cs typeface="Be Vietnam Pro" pitchFamily="34" charset="-120"/>
               </a:rPr>
-              <a:t> nghề nghiệp</a:t>
-            </a:r>
-            <a:r>
-              <a:rPr lang="en-US" sz="2100" dirty="0" spc="-3" kern="0">
-                <a:solidFill>
-                  <a:srgbClr val="14161C"/>
-                </a:solidFill>
-                <a:latin typeface="Be Vietnam Pro" pitchFamily="34" charset="0"/>
-                <a:ea typeface="Be Vietnam Pro" pitchFamily="34" charset="-122"/>
-                <a:cs typeface="Be Vietnam Pro" pitchFamily="34" charset="-120"/>
-              </a:rPr>
-              <a:t> bền</a:t>
-            </a:r>
-            <a:r>
-              <a:rPr lang="en-US" sz="2100" dirty="0" spc="-13" kern="0">
-                <a:solidFill>
-                  <a:srgbClr val="14161C"/>
-                </a:solidFill>
-                <a:latin typeface="Be Vietnam Pro" pitchFamily="34" charset="0"/>
-                <a:ea typeface="Be Vietnam Pro" pitchFamily="34" charset="-122"/>
-                <a:cs typeface="Be Vietnam Pro" pitchFamily="34" charset="-120"/>
-              </a:rPr>
-              <a:t> với</a:t>
-            </a:r>
-            <a:r>
-              <a:rPr lang="en-US" sz="2100" dirty="0" spc="4" kern="0">
-                <a:solidFill>
-                  <a:srgbClr val="14161C"/>
-                </a:solidFill>
-                <a:latin typeface="Be Vietnam Pro" pitchFamily="34" charset="0"/>
-                <a:ea typeface="Be Vietnam Pro" pitchFamily="34" charset="-122"/>
-                <a:cs typeface="Be Vietnam Pro" pitchFamily="34" charset="-120"/>
-              </a:rPr>
-              <a:t> tương</a:t>
-            </a:r>
-            <a:r>
-              <a:rPr lang="en-US" sz="2100" dirty="0" spc="0" kern="0">
-                <a:solidFill>
-                  <a:srgbClr val="14161C"/>
-                </a:solidFill>
-                <a:latin typeface="Be Vietnam Pro" pitchFamily="34" charset="0"/>
-                <a:ea typeface="Be Vietnam Pro" pitchFamily="34" charset="-122"/>
-                <a:cs typeface="Be Vietnam Pro" pitchFamily="34" charset="-120"/>
-              </a:rPr>
-              <a:t> lai.</a:t>
+              <a:t> lên</a:t>
+            </a:r>
+            <a:r>
+              <a:rPr lang="en-US" sz="2100" dirty="0" spc="1" kern="0">
+                <a:solidFill>
+                  <a:srgbClr val="14161C"/>
+                </a:solidFill>
+                <a:latin typeface="Be Vietnam Pro" pitchFamily="34" charset="0"/>
+                <a:ea typeface="Be Vietnam Pro" pitchFamily="34" charset="-122"/>
+                <a:cs typeface="Be Vietnam Pro" pitchFamily="34" charset="-120"/>
+              </a:rPr>
+              <a:t> khi</a:t>
+            </a:r>
+            <a:r>
+              <a:rPr lang="en-US" sz="2100" dirty="0" spc="-8" kern="0">
+                <a:solidFill>
+                  <a:srgbClr val="14161C"/>
+                </a:solidFill>
+                <a:latin typeface="Be Vietnam Pro" pitchFamily="34" charset="0"/>
+                <a:ea typeface="Be Vietnam Pro" pitchFamily="34" charset="-122"/>
+                <a:cs typeface="Be Vietnam Pro" pitchFamily="34" charset="-120"/>
+              </a:rPr>
+              <a:t> một</a:t>
+            </a:r>
+            <a:r>
+              <a:rPr lang="en-US" sz="2100" dirty="0" spc="-1" kern="0">
+                <a:solidFill>
+                  <a:srgbClr val="14161C"/>
+                </a:solidFill>
+                <a:latin typeface="Be Vietnam Pro" pitchFamily="34" charset="0"/>
+                <a:ea typeface="Be Vietnam Pro" pitchFamily="34" charset="-122"/>
+                <a:cs typeface="Be Vietnam Pro" pitchFamily="34" charset="-120"/>
+              </a:rPr>
+              <a:t> cái hỏng.</a:t>
             </a:r>
             <a:endParaRPr lang="en-US" sz="2100" dirty="0"/>
           </a:p>

--- a/system-design-101/vi/lessons/sd-10-027/slides/sd-10-027.pptx
+++ b/system-design-101/vi/lessons/sd-10-027/slides/sd-10-027.pptx
@@ -4190,6 +4190,28 @@
               <a:buNone/>
             </a:pPr>
             <a:r>
+              <a:rPr lang="en-US" sz="2100" dirty="0" spc="1" kern="0">
+                <a:solidFill>
+                  <a:srgbClr val="C4C8D6"/>
+                </a:solidFill>
+                <a:latin typeface="Be Vietnam Pro" pitchFamily="34" charset="0"/>
+                <a:ea typeface="Be Vietnam Pro" pitchFamily="34" charset="-122"/>
+                <a:cs typeface="Be Vietnam Pro" pitchFamily="34" charset="-120"/>
+              </a:rPr>
+              <a:t>Mang</a:t>
+            </a:r>
+            <a:r>
+              <a:rPr lang="en-US" sz="2100" dirty="0" spc="-1" kern="0">
+                <a:solidFill>
+                  <a:srgbClr val="C4C8D6"/>
+                </a:solidFill>
+                <a:latin typeface="Be Vietnam Pro" pitchFamily="34" charset="0"/>
+                <a:ea typeface="Be Vietnam Pro" pitchFamily="34" charset="-122"/>
+                <a:cs typeface="Be Vietnam Pro" pitchFamily="34" charset="-120"/>
+              </a:rPr>
+              <a:t> thông</a:t>
+            </a:r>
+            <a:r>
               <a:rPr lang="en-US" sz="2100" dirty="0" spc="0" kern="0">
                 <a:solidFill>
                   <a:srgbClr val="C4C8D6"/>
@@ -4198,7 +4220,51 @@
                 <a:ea typeface="Be Vietnam Pro" pitchFamily="34" charset="-122"/>
                 <a:cs typeface="Be Vietnam Pro" pitchFamily="34" charset="-120"/>
               </a:rPr>
-              <a:t>Chuỗi tự</a:t>
+              <a:t> tin</a:t>
+            </a:r>
+            <a:r>
+              <a:rPr lang="en-US" sz="2100" dirty="0" spc="-18" kern="0">
+                <a:solidFill>
+                  <a:srgbClr val="C4C8D6"/>
+                </a:solidFill>
+                <a:latin typeface="Be Vietnam Pro" pitchFamily="34" charset="0"/>
+                <a:ea typeface="Be Vietnam Pro" pitchFamily="34" charset="-122"/>
+                <a:cs typeface="Be Vietnam Pro" pitchFamily="34" charset="-120"/>
+              </a:rPr>
+              <a:t> xác</a:t>
+            </a:r>
+            <a:r>
+              <a:rPr lang="en-US" sz="2100" dirty="0" spc="0" kern="0">
+                <a:solidFill>
+                  <a:srgbClr val="C4C8D6"/>
+                </a:solidFill>
+                <a:latin typeface="Be Vietnam Pro" pitchFamily="34" charset="0"/>
+                <a:ea typeface="Be Vietnam Pro" pitchFamily="34" charset="-122"/>
+                <a:cs typeface="Be Vietnam Pro" pitchFamily="34" charset="-120"/>
+              </a:rPr>
+              <a:t> nhận,</a:t>
+            </a:r>
+            <a:r>
+              <a:rPr lang="en-US" sz="2100" dirty="0" spc="2" kern="0">
+                <a:solidFill>
+                  <a:srgbClr val="C4C8D6"/>
+                </a:solidFill>
+                <a:latin typeface="Be Vietnam Pro" pitchFamily="34" charset="0"/>
+                <a:ea typeface="Be Vietnam Pro" pitchFamily="34" charset="-122"/>
+                <a:cs typeface="Be Vietnam Pro" pitchFamily="34" charset="-120"/>
+              </a:rPr>
+              <a:t> thường</a:t>
+            </a:r>
+            <a:r>
+              <a:rPr lang="en-US" sz="2100" dirty="0" spc="-2" kern="0">
+                <a:solidFill>
+                  <a:srgbClr val="C4C8D6"/>
+                </a:solidFill>
+                <a:latin typeface="Be Vietnam Pro" pitchFamily="34" charset="0"/>
+                <a:ea typeface="Be Vietnam Pro" pitchFamily="34" charset="-122"/>
+                <a:cs typeface="Be Vietnam Pro" pitchFamily="34" charset="-120"/>
+              </a:rPr>
+              <a:t> có</a:t>
             </a:r>
             <a:r>
               <a:rPr lang="en-US" sz="2100" dirty="0" spc="-1" kern="0">
@@ -4209,10 +4275,10 @@
                 <a:ea typeface="Be Vietnam Pro" pitchFamily="34" charset="-122"/>
                 <a:cs typeface="Be Vietnam Pro" pitchFamily="34" charset="-120"/>
               </a:rPr>
-              <a:t> mang thông</a:t>
-            </a:r>
-            <a:r>
-              <a:rPr lang="en-US" sz="2100" dirty="0" spc="0" kern="0">
+              <a:t> chữ ký;</a:t>
+            </a:r>
+            <a:r>
+              <a:rPr lang="en-US" sz="2100" dirty="0" spc="-2" kern="0">
                 <a:solidFill>
                   <a:srgbClr val="C4C8D6"/>
                 </a:solidFill>
@@ -4220,10 +4286,10 @@
                 <a:ea typeface="Be Vietnam Pro" pitchFamily="34" charset="-122"/>
                 <a:cs typeface="Be Vietnam Pro" pitchFamily="34" charset="-120"/>
               </a:rPr>
-              <a:t> tin</a:t>
-            </a:r>
-            <a:r>
-              <a:rPr lang="en-US" sz="2100" dirty="0" spc="5" kern="0">
+              <a:t> phải</a:t>
+            </a:r>
+            <a:r>
+              <a:rPr lang="en-US" sz="2100" dirty="0" spc="2" kern="0">
                 <a:solidFill>
                   <a:srgbClr val="C4C8D6"/>
                 </a:solidFill>
@@ -4231,10 +4297,10 @@
                 <a:ea typeface="Be Vietnam Pro" pitchFamily="34" charset="-122"/>
                 <a:cs typeface="Be Vietnam Pro" pitchFamily="34" charset="-120"/>
               </a:rPr>
-              <a:t> người</a:t>
-            </a:r>
-            <a:r>
-              <a:rPr lang="en-US" sz="2100" dirty="0" spc="-1" kern="0">
+              <a:t> kiểm</a:t>
+            </a:r>
+            <a:r>
+              <a:rPr lang="en-US" sz="2100" dirty="0" spc="-19" kern="0">
                 <a:solidFill>
                   <a:srgbClr val="C4C8D6"/>
                 </a:solidFill>
@@ -4242,51 +4308,7 @@
                 <a:ea typeface="Be Vietnam Pro" pitchFamily="34" charset="-122"/>
                 <a:cs typeface="Be Vietnam Pro" pitchFamily="34" charset="-120"/>
               </a:rPr>
-              <a:t> dùng</a:t>
-            </a:r>
-            <a:r>
-              <a:rPr lang="en-US" sz="2100" dirty="0" spc="-18" kern="0">
-                <a:solidFill>
-                  <a:srgbClr val="C4C8D6"/>
-                </a:solidFill>
-                <a:latin typeface="Be Vietnam Pro" pitchFamily="34" charset="0"/>
-                <a:ea typeface="Be Vietnam Pro" pitchFamily="34" charset="-122"/>
-                <a:cs typeface="Be Vietnam Pro" pitchFamily="34" charset="-120"/>
-              </a:rPr>
-              <a:t> và</a:t>
-            </a:r>
-            <a:r>
-              <a:rPr lang="en-US" sz="2100" dirty="0" spc="-3" kern="0">
-                <a:solidFill>
-                  <a:srgbClr val="C4C8D6"/>
-                </a:solidFill>
-                <a:latin typeface="Be Vietnam Pro" pitchFamily="34" charset="0"/>
-                <a:ea typeface="Be Vietnam Pro" pitchFamily="34" charset="-122"/>
-                <a:cs typeface="Be Vietnam Pro" pitchFamily="34" charset="-120"/>
-              </a:rPr>
-              <a:t> có</a:t>
-            </a:r>
-            <a:r>
-              <a:rPr lang="en-US" sz="2100" dirty="0" spc="-1" kern="0">
-                <a:solidFill>
-                  <a:srgbClr val="C4C8D6"/>
-                </a:solidFill>
-                <a:latin typeface="Be Vietnam Pro" pitchFamily="34" charset="0"/>
-                <a:ea typeface="Be Vietnam Pro" pitchFamily="34" charset="-122"/>
-                <a:cs typeface="Be Vietnam Pro" pitchFamily="34" charset="-120"/>
-              </a:rPr>
-              <a:t> chữ</a:t>
-            </a:r>
-            <a:r>
-              <a:rPr lang="en-US" sz="2100" dirty="0" spc="0" kern="0">
-                <a:solidFill>
-                  <a:srgbClr val="C4C8D6"/>
-                </a:solidFill>
-                <a:latin typeface="Be Vietnam Pro" pitchFamily="34" charset="0"/>
-                <a:ea typeface="Be Vietnam Pro" pitchFamily="34" charset="-122"/>
-                <a:cs typeface="Be Vietnam Pro" pitchFamily="34" charset="-120"/>
-              </a:rPr>
-              <a:t> ký.</a:t>
+              <a:t> tra.</a:t>
             </a:r>
             <a:endParaRPr lang="en-US" sz="2100" dirty="0"/>
           </a:p>
@@ -11637,7 +11659,7 @@
               <a:t>OAuth2</a:t>
             </a:r>
             <a:r>
-              <a:rPr lang="en-US" sz="2100" b="1" dirty="0" spc="-13" kern="0">
+              <a:rPr lang="en-US" sz="2100" b="1" dirty="0" spc="-19" kern="0">
                 <a:solidFill>
                   <a:srgbClr val="B45309"/>
                 </a:solidFill>
@@ -11645,10 +11667,10 @@
                 <a:ea typeface="Be Vietnam Pro" pitchFamily="34" charset="-122"/>
                 <a:cs typeface="Be Vietnam Pro" pitchFamily="34" charset="-120"/>
               </a:rPr>
-              <a:t> với</a:t>
-            </a:r>
-            <a:r>
-              <a:rPr lang="en-US" sz="2100" b="1" dirty="0" spc="-21" kern="0">
+              <a:t> và</a:t>
+            </a:r>
+            <a:r>
+              <a:rPr lang="en-US" sz="2100" b="1" dirty="0" spc="-3" kern="0">
                 <a:solidFill>
                   <a:srgbClr val="B45309"/>
                 </a:solidFill>
@@ -11656,7 +11678,18 @@
                 <a:ea typeface="Be Vietnam Pro" pitchFamily="34" charset="-122"/>
                 <a:cs typeface="Be Vietnam Pro" pitchFamily="34" charset="-120"/>
               </a:rPr>
-              <a:t> PKCE;</a:t>
+              <a:t> OpenID</a:t>
+            </a:r>
+            <a:r>
+              <a:rPr lang="en-US" sz="2100" b="1" dirty="0" spc="-5" kern="0">
+                <a:solidFill>
+                  <a:srgbClr val="B45309"/>
+                </a:solidFill>
+                <a:latin typeface="Be Vietnam Pro" pitchFamily="34" charset="0"/>
+                <a:ea typeface="Be Vietnam Pro" pitchFamily="34" charset="-122"/>
+                <a:cs typeface="Be Vietnam Pro" pitchFamily="34" charset="-120"/>
+              </a:rPr>
+              <a:t> Connect;</a:t>
             </a:r>
             <a:r>
               <a:rPr lang="en-US" sz="2100" b="1" dirty="0" spc="-7" kern="0">
